--- a/carbon_breakpoints_takeaway_figures/paris_at_ten_world_deck.pptx
+++ b/carbon_breakpoints_takeaway_figures/paris_at_ten_world_deck.pptx
@@ -16,15 +16,6 @@
     <p:sldId id="264" r:id="rId16"/>
     <p:sldId id="265" r:id="rId17"/>
     <p:sldId id="266" r:id="rId18"/>
-    <p:sldId id="267" r:id="rId19"/>
-    <p:sldId id="268" r:id="rId20"/>
-    <p:sldId id="269" r:id="rId21"/>
-    <p:sldId id="270" r:id="rId22"/>
-    <p:sldId id="271" r:id="rId23"/>
-    <p:sldId id="272" r:id="rId24"/>
-    <p:sldId id="273" r:id="rId25"/>
-    <p:sldId id="274" r:id="rId26"/>
-    <p:sldId id="275" r:id="rId27"/>
   </p:sldIdLst>
   <p:sldSz cx="12191695" cy="6858000" type="screen4x3"/>
   <p:notesSz cx="6858000" cy="9144000"/>
@@ -521,7 +512,7 @@
           <a:lstStyle/>
           <a:p>
             <a:r>
-              <a:t>World-level paper. The country-level mechanism analysis (97 breaks, 7 mechanisms, the nine) is deferred to the follow-on paper and referenced only at the end.</a:t>
+              <a:t>World-level paper. Country-level mechanism analysis is the follow-on paper, referenced once at the end.</a:t>
             </a:r>
           </a:p>
         </p:txBody>
@@ -591,7 +582,7 @@
           <a:lstStyle/>
           <a:p>
             <a:r>
-              <a:t>C/GDP -1.86 (t=4.9), C/E -0.84 (t=4.2), E/GDP -1.02 (t=4.8). Every best-fitting onset lands before 2015 — that is Act III.</a:t>
+              <a:t>Volunteer the window sensitivity — a referee will look for it.</a:t>
             </a:r>
           </a:p>
         </p:txBody>
@@ -661,567 +652,7 @@
           <a:lstStyle/>
           <a:p>
             <a:r>
-              <a:t>Rio-to-Paris: GDP +3.09, C/E +0.02, E/GDP -0.58, CO2 +2.52. After Paris: GDP +2.14, C/E -0.49, E/GDP -0.99, CO2 +0.65.</a:t>
-            </a:r>
-          </a:p>
-        </p:txBody>
-      </p:sp>
-      <p:sp>
-        <p:nvSpPr>
-          <p:cNvPr id="4" name="Slide Number Placeholder 3"/>
-          <p:cNvSpPr>
-            <a:spLocks noGrp="1"/>
-          </p:cNvSpPr>
-          <p:nvPr>
-            <p:ph type="sldNum" idx="5" sz="quarter"/>
-          </p:nvPr>
-        </p:nvSpPr>
-        <p:spPr/>
-      </p:sp>
-    </p:spTree>
-  </p:cSld>
-  <p:clrMapOvr>
-    <a:masterClrMapping/>
-  </p:clrMapOvr>
-</p:notes>
-</file>
-
-<file path=ppt/notesSlides/notesSlide12.xml><?xml version="1.0" encoding="utf-8"?>
-<p:notes xmlns:a="http://schemas.openxmlformats.org/drawingml/2006/main" xmlns:p="http://schemas.openxmlformats.org/presentationml/2006/main" xmlns:r="http://schemas.openxmlformats.org/officeDocument/2006/relationships">
-  <p:cSld>
-    <p:spTree>
-      <p:nvGrpSpPr>
-        <p:cNvPr id="1" name=""/>
-        <p:cNvGrpSpPr/>
-        <p:nvPr/>
-      </p:nvGrpSpPr>
-      <p:grpSpPr>
-        <a:xfrm>
-          <a:off x="0" y="0"/>
-          <a:ext cx="0" cy="0"/>
-          <a:chOff x="0" y="0"/>
-          <a:chExt cx="0" cy="0"/>
-        </a:xfrm>
-      </p:grpSpPr>
-      <p:sp>
-        <p:nvSpPr>
-          <p:cNvPr id="2" name="Slide Image Placeholder 1"/>
-          <p:cNvSpPr>
-            <a:spLocks noGrp="1"/>
-          </p:cNvSpPr>
-          <p:nvPr>
-            <p:ph type="sldImg" idx="2"/>
-          </p:nvPr>
-        </p:nvSpPr>
-        <p:spPr/>
-      </p:sp>
-      <p:sp>
-        <p:nvSpPr>
-          <p:cNvPr id="3" name="Notes Placeholder 2"/>
-          <p:cNvSpPr>
-            <a:spLocks noGrp="1"/>
-          </p:cNvSpPr>
-          <p:nvPr>
-            <p:ph type="body" idx="3" sz="quarter"/>
-          </p:nvPr>
-        </p:nvSpPr>
-        <p:spPr/>
-        <p:txBody>
-          <a:bodyPr/>
-          <a:lstStyle/>
-          <a:p>
-            <a:r>
-              <a:t>This is the paper's core. Paris is the first treaty date the global record cannot dismiss — and still cannot confirm.</a:t>
-            </a:r>
-          </a:p>
-        </p:txBody>
-      </p:sp>
-      <p:sp>
-        <p:nvSpPr>
-          <p:cNvPr id="4" name="Slide Number Placeholder 3"/>
-          <p:cNvSpPr>
-            <a:spLocks noGrp="1"/>
-          </p:cNvSpPr>
-          <p:nvPr>
-            <p:ph type="sldNum" idx="5" sz="quarter"/>
-          </p:nvPr>
-        </p:nvSpPr>
-        <p:spPr/>
-      </p:sp>
-    </p:spTree>
-  </p:cSld>
-  <p:clrMapOvr>
-    <a:masterClrMapping/>
-  </p:clrMapOvr>
-</p:notes>
-</file>
-
-<file path=ppt/notesSlides/notesSlide13.xml><?xml version="1.0" encoding="utf-8"?>
-<p:notes xmlns:a="http://schemas.openxmlformats.org/drawingml/2006/main" xmlns:p="http://schemas.openxmlformats.org/presentationml/2006/main" xmlns:r="http://schemas.openxmlformats.org/officeDocument/2006/relationships">
-  <p:cSld>
-    <p:spTree>
-      <p:nvGrpSpPr>
-        <p:cNvPr id="1" name=""/>
-        <p:cNvGrpSpPr/>
-        <p:nvPr/>
-      </p:nvGrpSpPr>
-      <p:grpSpPr>
-        <a:xfrm>
-          <a:off x="0" y="0"/>
-          <a:ext cx="0" cy="0"/>
-          <a:chOff x="0" y="0"/>
-          <a:chExt cx="0" cy="0"/>
-        </a:xfrm>
-      </p:grpSpPr>
-      <p:sp>
-        <p:nvSpPr>
-          <p:cNvPr id="2" name="Slide Image Placeholder 1"/>
-          <p:cNvSpPr>
-            <a:spLocks noGrp="1"/>
-          </p:cNvSpPr>
-          <p:nvPr>
-            <p:ph type="sldImg" idx="2"/>
-          </p:nvPr>
-        </p:nvSpPr>
-        <p:spPr/>
-      </p:sp>
-      <p:sp>
-        <p:nvSpPr>
-          <p:cNvPr id="3" name="Notes Placeholder 2"/>
-          <p:cNvSpPr>
-            <a:spLocks noGrp="1"/>
-          </p:cNvSpPr>
-          <p:nvPr>
-            <p:ph type="body" idx="3" sz="quarter"/>
-          </p:nvPr>
-        </p:nvSpPr>
-        <p:spPr/>
-        <p:txBody>
-          <a:bodyPr/>
-          <a:lstStyle/>
-          <a:p>
-            <a:r>
-              <a:t>Window-sensitive: on a 1990-start window Paris drops to the 79th percentile for C/GDP but holds at 95th for C/E. Report both.</a:t>
-            </a:r>
-          </a:p>
-        </p:txBody>
-      </p:sp>
-      <p:sp>
-        <p:nvSpPr>
-          <p:cNvPr id="4" name="Slide Number Placeholder 3"/>
-          <p:cNvSpPr>
-            <a:spLocks noGrp="1"/>
-          </p:cNvSpPr>
-          <p:nvPr>
-            <p:ph type="sldNum" idx="5" sz="quarter"/>
-          </p:nvPr>
-        </p:nvSpPr>
-        <p:spPr/>
-      </p:sp>
-    </p:spTree>
-  </p:cSld>
-  <p:clrMapOvr>
-    <a:masterClrMapping/>
-  </p:clrMapOvr>
-</p:notes>
-</file>
-
-<file path=ppt/notesSlides/notesSlide14.xml><?xml version="1.0" encoding="utf-8"?>
-<p:notes xmlns:a="http://schemas.openxmlformats.org/drawingml/2006/main" xmlns:p="http://schemas.openxmlformats.org/presentationml/2006/main" xmlns:r="http://schemas.openxmlformats.org/officeDocument/2006/relationships">
-  <p:cSld>
-    <p:spTree>
-      <p:nvGrpSpPr>
-        <p:cNvPr id="1" name=""/>
-        <p:cNvGrpSpPr/>
-        <p:nvPr/>
-      </p:nvGrpSpPr>
-      <p:grpSpPr>
-        <a:xfrm>
-          <a:off x="0" y="0"/>
-          <a:ext cx="0" cy="0"/>
-          <a:chOff x="0" y="0"/>
-          <a:chExt cx="0" cy="0"/>
-        </a:xfrm>
-      </p:grpSpPr>
-      <p:sp>
-        <p:nvSpPr>
-          <p:cNvPr id="2" name="Slide Image Placeholder 1"/>
-          <p:cNvSpPr>
-            <a:spLocks noGrp="1"/>
-          </p:cNvSpPr>
-          <p:nvPr>
-            <p:ph type="sldImg" idx="2"/>
-          </p:nvPr>
-        </p:nvSpPr>
-        <p:spPr/>
-      </p:sp>
-      <p:sp>
-        <p:nvSpPr>
-          <p:cNvPr id="3" name="Notes Placeholder 2"/>
-          <p:cNvSpPr>
-            <a:spLocks noGrp="1"/>
-          </p:cNvSpPr>
-          <p:nvPr>
-            <p:ph type="body" idx="3" sz="quarter"/>
-          </p:nvPr>
-        </p:nvSpPr>
-        <p:spPr/>
-        <p:txBody>
-          <a:bodyPr/>
-          <a:lstStyle/>
-          <a:p>
-            <a:r>
-              <a:t>This is the honest reason the global record cannot settle attribution — not that Paris failed, but that the instrument is blunt at this horizon.</a:t>
-            </a:r>
-          </a:p>
-        </p:txBody>
-      </p:sp>
-      <p:sp>
-        <p:nvSpPr>
-          <p:cNvPr id="4" name="Slide Number Placeholder 3"/>
-          <p:cNvSpPr>
-            <a:spLocks noGrp="1"/>
-          </p:cNvSpPr>
-          <p:nvPr>
-            <p:ph type="sldNum" idx="5" sz="quarter"/>
-          </p:nvPr>
-        </p:nvSpPr>
-        <p:spPr/>
-      </p:sp>
-    </p:spTree>
-  </p:cSld>
-  <p:clrMapOvr>
-    <a:masterClrMapping/>
-  </p:clrMapOvr>
-</p:notes>
-</file>
-
-<file path=ppt/notesSlides/notesSlide15.xml><?xml version="1.0" encoding="utf-8"?>
-<p:notes xmlns:a="http://schemas.openxmlformats.org/drawingml/2006/main" xmlns:p="http://schemas.openxmlformats.org/presentationml/2006/main" xmlns:r="http://schemas.openxmlformats.org/officeDocument/2006/relationships">
-  <p:cSld>
-    <p:spTree>
-      <p:nvGrpSpPr>
-        <p:cNvPr id="1" name=""/>
-        <p:cNvGrpSpPr/>
-        <p:nvPr/>
-      </p:nvGrpSpPr>
-      <p:grpSpPr>
-        <a:xfrm>
-          <a:off x="0" y="0"/>
-          <a:ext cx="0" cy="0"/>
-          <a:chOff x="0" y="0"/>
-          <a:chExt cx="0" cy="0"/>
-        </a:xfrm>
-      </p:grpSpPr>
-      <p:sp>
-        <p:nvSpPr>
-          <p:cNvPr id="2" name="Slide Image Placeholder 1"/>
-          <p:cNvSpPr>
-            <a:spLocks noGrp="1"/>
-          </p:cNvSpPr>
-          <p:nvPr>
-            <p:ph type="sldImg" idx="2"/>
-          </p:nvPr>
-        </p:nvSpPr>
-        <p:spPr/>
-      </p:sp>
-      <p:sp>
-        <p:nvSpPr>
-          <p:cNvPr id="3" name="Notes Placeholder 2"/>
-          <p:cNvSpPr>
-            <a:spLocks noGrp="1"/>
-          </p:cNvSpPr>
-          <p:nvPr>
-            <p:ph type="body" idx="3" sz="quarter"/>
-          </p:nvPr>
-        </p:nvSpPr>
-        <p:spPr/>
-        <p:txBody>
-          <a:bodyPr/>
-          <a:lstStyle/>
-          <a:p>
-            <a:r>
-              <a:t>If one sentence survives the talk, it is the bolded one. Neither vindication nor indictment: an honest 'consistent with, not identified'.</a:t>
-            </a:r>
-          </a:p>
-        </p:txBody>
-      </p:sp>
-      <p:sp>
-        <p:nvSpPr>
-          <p:cNvPr id="4" name="Slide Number Placeholder 3"/>
-          <p:cNvSpPr>
-            <a:spLocks noGrp="1"/>
-          </p:cNvSpPr>
-          <p:nvPr>
-            <p:ph type="sldNum" idx="5" sz="quarter"/>
-          </p:nvPr>
-        </p:nvSpPr>
-        <p:spPr/>
-      </p:sp>
-    </p:spTree>
-  </p:cSld>
-  <p:clrMapOvr>
-    <a:masterClrMapping/>
-  </p:clrMapOvr>
-</p:notes>
-</file>
-
-<file path=ppt/notesSlides/notesSlide16.xml><?xml version="1.0" encoding="utf-8"?>
-<p:notes xmlns:a="http://schemas.openxmlformats.org/drawingml/2006/main" xmlns:p="http://schemas.openxmlformats.org/presentationml/2006/main" xmlns:r="http://schemas.openxmlformats.org/officeDocument/2006/relationships">
-  <p:cSld>
-    <p:spTree>
-      <p:nvGrpSpPr>
-        <p:cNvPr id="1" name=""/>
-        <p:cNvGrpSpPr/>
-        <p:nvPr/>
-      </p:nvGrpSpPr>
-      <p:grpSpPr>
-        <a:xfrm>
-          <a:off x="0" y="0"/>
-          <a:ext cx="0" cy="0"/>
-          <a:chOff x="0" y="0"/>
-          <a:chExt cx="0" cy="0"/>
-        </a:xfrm>
-      </p:grpSpPr>
-      <p:sp>
-        <p:nvSpPr>
-          <p:cNvPr id="2" name="Slide Image Placeholder 1"/>
-          <p:cNvSpPr>
-            <a:spLocks noGrp="1"/>
-          </p:cNvSpPr>
-          <p:nvPr>
-            <p:ph type="sldImg" idx="2"/>
-          </p:nvPr>
-        </p:nvSpPr>
-        <p:spPr/>
-      </p:sp>
-      <p:sp>
-        <p:nvSpPr>
-          <p:cNvPr id="3" name="Notes Placeholder 2"/>
-          <p:cNvSpPr>
-            <a:spLocks noGrp="1"/>
-          </p:cNvSpPr>
-          <p:nvPr>
-            <p:ph type="body" idx="3" sz="quarter"/>
-          </p:nvPr>
-        </p:nvSpPr>
-        <p:spPr/>
-        <p:txBody>
-          <a:bodyPr/>
-          <a:lstStyle/>
-          <a:p>
-            <a:r>
-              <a:t>This is the bridge to the follow-on paper without spending slides on its content.</a:t>
-            </a:r>
-          </a:p>
-        </p:txBody>
-      </p:sp>
-      <p:sp>
-        <p:nvSpPr>
-          <p:cNvPr id="4" name="Slide Number Placeholder 3"/>
-          <p:cNvSpPr>
-            <a:spLocks noGrp="1"/>
-          </p:cNvSpPr>
-          <p:nvPr>
-            <p:ph type="sldNum" idx="5" sz="quarter"/>
-          </p:nvPr>
-        </p:nvSpPr>
-        <p:spPr/>
-      </p:sp>
-    </p:spTree>
-  </p:cSld>
-  <p:clrMapOvr>
-    <a:masterClrMapping/>
-  </p:clrMapOvr>
-</p:notes>
-</file>
-
-<file path=ppt/notesSlides/notesSlide17.xml><?xml version="1.0" encoding="utf-8"?>
-<p:notes xmlns:a="http://schemas.openxmlformats.org/drawingml/2006/main" xmlns:p="http://schemas.openxmlformats.org/presentationml/2006/main" xmlns:r="http://schemas.openxmlformats.org/officeDocument/2006/relationships">
-  <p:cSld>
-    <p:spTree>
-      <p:nvGrpSpPr>
-        <p:cNvPr id="1" name=""/>
-        <p:cNvGrpSpPr/>
-        <p:nvPr/>
-      </p:nvGrpSpPr>
-      <p:grpSpPr>
-        <a:xfrm>
-          <a:off x="0" y="0"/>
-          <a:ext cx="0" cy="0"/>
-          <a:chOff x="0" y="0"/>
-          <a:chExt cx="0" cy="0"/>
-        </a:xfrm>
-      </p:grpSpPr>
-      <p:sp>
-        <p:nvSpPr>
-          <p:cNvPr id="2" name="Slide Image Placeholder 1"/>
-          <p:cNvSpPr>
-            <a:spLocks noGrp="1"/>
-          </p:cNvSpPr>
-          <p:nvPr>
-            <p:ph type="sldImg" idx="2"/>
-          </p:nvPr>
-        </p:nvSpPr>
-        <p:spPr/>
-      </p:sp>
-      <p:sp>
-        <p:nvSpPr>
-          <p:cNvPr id="3" name="Notes Placeholder 2"/>
-          <p:cNvSpPr>
-            <a:spLocks noGrp="1"/>
-          </p:cNvSpPr>
-          <p:nvPr>
-            <p:ph type="body" idx="3" sz="quarter"/>
-          </p:nvPr>
-        </p:nvSpPr>
-        <p:spPr/>
-        <p:txBody>
-          <a:bodyPr/>
-          <a:lstStyle/>
-          <a:p>
-            <a:r>
-              <a:t>Forward-looking and methodological. Ends on the question the paper exists to pose.</a:t>
-            </a:r>
-          </a:p>
-        </p:txBody>
-      </p:sp>
-      <p:sp>
-        <p:nvSpPr>
-          <p:cNvPr id="4" name="Slide Number Placeholder 3"/>
-          <p:cNvSpPr>
-            <a:spLocks noGrp="1"/>
-          </p:cNvSpPr>
-          <p:nvPr>
-            <p:ph type="sldNum" idx="5" sz="quarter"/>
-          </p:nvPr>
-        </p:nvSpPr>
-        <p:spPr/>
-      </p:sp>
-    </p:spTree>
-  </p:cSld>
-  <p:clrMapOvr>
-    <a:masterClrMapping/>
-  </p:clrMapOvr>
-</p:notes>
-</file>
-
-<file path=ppt/notesSlides/notesSlide18.xml><?xml version="1.0" encoding="utf-8"?>
-<p:notes xmlns:a="http://schemas.openxmlformats.org/drawingml/2006/main" xmlns:p="http://schemas.openxmlformats.org/presentationml/2006/main" xmlns:r="http://schemas.openxmlformats.org/officeDocument/2006/relationships">
-  <p:cSld>
-    <p:spTree>
-      <p:nvGrpSpPr>
-        <p:cNvPr id="1" name=""/>
-        <p:cNvGrpSpPr/>
-        <p:nvPr/>
-      </p:nvGrpSpPr>
-      <p:grpSpPr>
-        <a:xfrm>
-          <a:off x="0" y="0"/>
-          <a:ext cx="0" cy="0"/>
-          <a:chOff x="0" y="0"/>
-          <a:chExt cx="0" cy="0"/>
-        </a:xfrm>
-      </p:grpSpPr>
-      <p:sp>
-        <p:nvSpPr>
-          <p:cNvPr id="2" name="Slide Image Placeholder 1"/>
-          <p:cNvSpPr>
-            <a:spLocks noGrp="1"/>
-          </p:cNvSpPr>
-          <p:nvPr>
-            <p:ph type="sldImg" idx="2"/>
-          </p:nvPr>
-        </p:nvSpPr>
-        <p:spPr/>
-      </p:sp>
-      <p:sp>
-        <p:nvSpPr>
-          <p:cNvPr id="3" name="Notes Placeholder 2"/>
-          <p:cNvSpPr>
-            <a:spLocks noGrp="1"/>
-          </p:cNvSpPr>
-          <p:nvPr>
-            <p:ph type="body" idx="3" sz="quarter"/>
-          </p:nvPr>
-        </p:nvSpPr>
-        <p:spPr/>
-        <p:txBody>
-          <a:bodyPr/>
-          <a:lstStyle/>
-          <a:p>
-            <a:r>
-              <a:t>The credibility slide. The window-sensitivity admission is the one a referee will look for — better volunteered.</a:t>
-            </a:r>
-          </a:p>
-        </p:txBody>
-      </p:sp>
-      <p:sp>
-        <p:nvSpPr>
-          <p:cNvPr id="4" name="Slide Number Placeholder 3"/>
-          <p:cNvSpPr>
-            <a:spLocks noGrp="1"/>
-          </p:cNvSpPr>
-          <p:nvPr>
-            <p:ph type="sldNum" idx="5" sz="quarter"/>
-          </p:nvPr>
-        </p:nvSpPr>
-        <p:spPr/>
-      </p:sp>
-    </p:spTree>
-  </p:cSld>
-  <p:clrMapOvr>
-    <a:masterClrMapping/>
-  </p:clrMapOvr>
-</p:notes>
-</file>
-
-<file path=ppt/notesSlides/notesSlide19.xml><?xml version="1.0" encoding="utf-8"?>
-<p:notes xmlns:a="http://schemas.openxmlformats.org/drawingml/2006/main" xmlns:p="http://schemas.openxmlformats.org/presentationml/2006/main" xmlns:r="http://schemas.openxmlformats.org/officeDocument/2006/relationships">
-  <p:cSld>
-    <p:spTree>
-      <p:nvGrpSpPr>
-        <p:cNvPr id="1" name=""/>
-        <p:cNvGrpSpPr/>
-        <p:nvPr/>
-      </p:nvGrpSpPr>
-      <p:grpSpPr>
-        <a:xfrm>
-          <a:off x="0" y="0"/>
-          <a:ext cx="0" cy="0"/>
-          <a:chOff x="0" y="0"/>
-          <a:chExt cx="0" cy="0"/>
-        </a:xfrm>
-      </p:grpSpPr>
-      <p:sp>
-        <p:nvSpPr>
-          <p:cNvPr id="2" name="Slide Image Placeholder 1"/>
-          <p:cNvSpPr>
-            <a:spLocks noGrp="1"/>
-          </p:cNvSpPr>
-          <p:nvPr>
-            <p:ph type="sldImg" idx="2"/>
-          </p:nvPr>
-        </p:nvSpPr>
-        <p:spPr/>
-      </p:sp>
-      <p:sp>
-        <p:nvSpPr>
-          <p:cNvPr id="3" name="Notes Placeholder 2"/>
-          <p:cNvSpPr>
-            <a:spLocks noGrp="1"/>
-          </p:cNvSpPr>
-          <p:nvPr>
-            <p:ph type="body" idx="3" sz="quarter"/>
-          </p:nvPr>
-        </p:nvSpPr>
-        <p:spPr/>
-        <p:txBody>
-          <a:bodyPr/>
-          <a:lstStyle/>
-          <a:p>
-            <a:r>
-              <a:t>One slide only. Tees up paper 2 without previewing its results — the 97 breaks, seven mechanisms, and nine constructive cases live there.</a:t>
+              <a:t>Close on the reframed headline.</a:t>
             </a:r>
           </a:p>
         </p:txBody>
@@ -1291,77 +722,7 @@
           <a:lstStyle/>
           <a:p>
             <a:r>
-              <a:t>Sympathetic frame, then the identity that justifies the design. Note the numbers here are balanced-panel: +2.5 to +0.7 CO2 growth, -2.2%/yr intensity in the current episode.</a:t>
-            </a:r>
-          </a:p>
-        </p:txBody>
-      </p:sp>
-      <p:sp>
-        <p:nvSpPr>
-          <p:cNvPr id="4" name="Slide Number Placeholder 3"/>
-          <p:cNvSpPr>
-            <a:spLocks noGrp="1"/>
-          </p:cNvSpPr>
-          <p:nvPr>
-            <p:ph type="sldNum" idx="5" sz="quarter"/>
-          </p:nvPr>
-        </p:nvSpPr>
-        <p:spPr/>
-      </p:sp>
-    </p:spTree>
-  </p:cSld>
-  <p:clrMapOvr>
-    <a:masterClrMapping/>
-  </p:clrMapOvr>
-</p:notes>
-</file>
-
-<file path=ppt/notesSlides/notesSlide20.xml><?xml version="1.0" encoding="utf-8"?>
-<p:notes xmlns:a="http://schemas.openxmlformats.org/drawingml/2006/main" xmlns:p="http://schemas.openxmlformats.org/presentationml/2006/main" xmlns:r="http://schemas.openxmlformats.org/officeDocument/2006/relationships">
-  <p:cSld>
-    <p:spTree>
-      <p:nvGrpSpPr>
-        <p:cNvPr id="1" name=""/>
-        <p:cNvGrpSpPr/>
-        <p:nvPr/>
-      </p:nvGrpSpPr>
-      <p:grpSpPr>
-        <a:xfrm>
-          <a:off x="0" y="0"/>
-          <a:ext cx="0" cy="0"/>
-          <a:chOff x="0" y="0"/>
-          <a:chExt cx="0" cy="0"/>
-        </a:xfrm>
-      </p:grpSpPr>
-      <p:sp>
-        <p:nvSpPr>
-          <p:cNvPr id="2" name="Slide Image Placeholder 1"/>
-          <p:cNvSpPr>
-            <a:spLocks noGrp="1"/>
-          </p:cNvSpPr>
-          <p:nvPr>
-            <p:ph type="sldImg" idx="2"/>
-          </p:nvPr>
-        </p:nvSpPr>
-        <p:spPr/>
-      </p:sp>
-      <p:sp>
-        <p:nvSpPr>
-          <p:cNvPr id="3" name="Notes Placeholder 2"/>
-          <p:cNvSpPr>
-            <a:spLocks noGrp="1"/>
-          </p:cNvSpPr>
-          <p:nvPr>
-            <p:ph type="body" idx="3" sz="quarter"/>
-          </p:nvPr>
-        </p:nvSpPr>
-        <p:spPr/>
-        <p:txBody>
-          <a:bodyPr/>
-          <a:lstStyle/>
-          <a:p>
-            <a:r>
-              <a:t>Close on the reframed headline: not a null, an unresolvable-but-favourable coincidence.</a:t>
+              <a:t>Frame sympathetically, then set up the decomposition that structures the whole talk.</a:t>
             </a:r>
           </a:p>
         </p:txBody>
@@ -1431,7 +792,7 @@
           <a:lstStyle/>
           <a:p>
             <a:r>
-              <a:t>Act III is the pivot: the finding is not a null, it is an unresolvable-but-favourable coincidence. Act IV hands off to the national paper.</a:t>
+              <a:t>One methodology slide. If asked for detail: two-segment regression with an autocorrelation-robust test, BIC for model choice, and a placebo sweep over candidate years.</a:t>
             </a:r>
           </a:p>
         </p:txBody>
@@ -1501,7 +862,7 @@
           <a:lstStyle/>
           <a:p>
             <a:r>
-              <a:t>Keep it conversational. The 'two doors' framing pays off in Act II, where both doors turn out to be moving.</a:t>
+              <a:t>182 countries, 99.8% of 2015 global CO2, 13 interpolated cells out of 5,824. The 2022-23 cliff is a reporting lag, not a real change, and including it would badly distort the post-Paris window.</a:t>
             </a:r>
           </a:p>
         </p:txBody>
@@ -1571,7 +932,7 @@
           <a:lstStyle/>
           <a:p>
             <a:r>
-              <a:t>The balanced-panel point is a genuine methods contribution for a world-level paper: naive aggregation understated the recent acceleration.</a:t>
+              <a:t>Before → after: GDP +3.1 → +2.1; fuel mix -0.0 → -0.4; efficiency -1.0 → -1.0; CO2 +2.1 → +0.7. The efficiency result is the surprise: fifty years of steady improvement, entirely unaffected by the treaty era.</a:t>
             </a:r>
           </a:p>
         </p:txBody>
@@ -1641,7 +1002,7 @@
           <a:lstStyle/>
           <a:p>
             <a:r>
-              <a:t>The stall-then-surge shape is the single most useful thing this paper can put on the record.</a:t>
+              <a:t>Fuel mix -0.7 pp/yr faster than trend (t = 3.4); overall intensity -1.0 (t = 2.3); efficiency -0.3 (t = 1.3, not significant). Supply-side change, not demand-side.</a:t>
             </a:r>
           </a:p>
         </p:txBody>
@@ -1711,7 +1072,7 @@
           <a:lstStyle/>
           <a:p>
             <a:r>
-              <a:t>BIC prefers three breaks over one. The 2002-2012 plateau is the China/WTO coal era; the post-2012 episode is the renewables cost collapse plus post-crisis restructuring.</a:t>
+              <a:t>Rio: 14th percentile for overall intensity, 66th for fuel mix. Paris: 97th and 93rd. This is the contrast that makes the paper — the same test that dismisses Rio does not dismiss Paris.</a:t>
             </a:r>
           </a:p>
         </p:txBody>
@@ -1781,7 +1142,7 @@
           <a:lstStyle/>
           <a:p>
             <a:r>
-              <a:t>This is why the naive aggregate understated the post-Paris acceleration: the 2022-23 points were computed on 78 countries, and the pre-2015 baseline was flattened by China.</a:t>
+              <a:t>If one sentence survives, it is the bolded one. Neither vindication nor indictment.</a:t>
             </a:r>
           </a:p>
         </p:txBody>
@@ -1851,7 +1212,7 @@
           <a:lstStyle/>
           <a:p>
             <a:r>
-              <a:t>On the naive aggregate the demand side looked flat; on the balanced panel it is significant. That correction matters.</a:t>
+              <a:t>Forward-looking. Hands off to the national paper without previewing its results.</a:t>
             </a:r>
           </a:p>
         </p:txBody>
@@ -4865,8 +4226,8 @@
         </p:nvSpPr>
         <p:spPr>
           <a:xfrm>
-            <a:off x="822960" y="1463040"/>
-            <a:ext cx="10515600" cy="3383280"/>
+            <a:off x="822960" y="1554480"/>
+            <a:ext cx="10515600" cy="3291840"/>
           </a:xfrm>
           <a:prstGeom prst="rect">
             <a:avLst/>
@@ -4901,13 +4262,13 @@
               </a:spcAft>
             </a:pPr>
             <a:r>
-              <a:rPr sz="1800" b="0" i="0">
+              <a:rPr sz="1900" b="0" i="0">
                 <a:solidFill>
                   <a:srgbClr val="555555"/>
                 </a:solidFill>
                 <a:latin typeface="Calibri"/>
               </a:rPr>
-              <a:t>The world's carbon-intensity curve is bending faster than at any time on record — and for the first time, a treaty date survives the placebo test. It still is not the best-fitting one.</a:t>
+              <a:t>Emissions growth has fallen by two thirds since the Paris Agreement. We ask what the global record can, and cannot, credit the treaty for.</a:t>
             </a:r>
           </a:p>
           <a:p>
@@ -4923,46 +4284,7 @@
                 </a:solidFill>
                 <a:latin typeface="Calibri"/>
               </a:rPr>
-              <a:t>Structural breaks · Kaya pathways · the global record, 1971-2021</a:t>
-            </a:r>
-          </a:p>
-        </p:txBody>
-      </p:sp>
-      <p:sp>
-        <p:nvSpPr>
-          <p:cNvPr id="3" name="TextBox 2"/>
-          <p:cNvSpPr txBox="1"/>
-          <p:nvPr/>
-        </p:nvSpPr>
-        <p:spPr>
-          <a:xfrm>
-            <a:off x="822960" y="5440680"/>
-            <a:ext cx="10515600" cy="822960"/>
-          </a:xfrm>
-          <a:prstGeom prst="rect">
-            <a:avLst/>
-          </a:prstGeom>
-          <a:noFill/>
-        </p:spPr>
-        <p:txBody>
-          <a:bodyPr wrap="square">
-            <a:spAutoFit/>
-          </a:bodyPr>
-          <a:lstStyle/>
-          <a:p>
-            <a:pPr algn="l">
-              <a:spcAft>
-                <a:spcPts val="600"/>
-              </a:spcAft>
-            </a:pPr>
-            <a:r>
-              <a:rPr sz="1300" b="1" i="0">
-                <a:solidFill>
-                  <a:srgbClr val="212121"/>
-                </a:solidFill>
-                <a:latin typeface="Calibri"/>
-              </a:rPr>
-              <a:t>58-country composition-constant panel · 87% of global CO2 · four estimated episodes · three Kaya pathways</a:t>
+              <a:t>182 countries · 99.8% of global CO2 · 1990-2021</a:t>
             </a:r>
           </a:p>
         </p:txBody>
@@ -5015,11 +4337,11 @@
             <a:r>
               <a:rPr sz="1200" b="1" i="0">
                 <a:solidFill>
-                  <a:srgbClr val="1B7837"/>
-                </a:solidFill>
-                <a:latin typeface="Calibri"/>
-              </a:rPr>
-              <a:t>ACT II · THE ANNIVERSARY TEST</a:t>
+                  <a:srgbClr val="B33A3A"/>
+                </a:solidFill>
+                <a:latin typeface="Calibri"/>
+              </a:rPr>
+              <a:t>LIMITS</a:t>
             </a:r>
           </a:p>
           <a:p>
@@ -5035,7 +4357,7 @@
                 </a:solidFill>
                 <a:latin typeface="Calibri"/>
               </a:rPr>
-              <a:t>The world is running well ahead of its own trend</a:t>
+              <a:t>What we are not claiming</a:t>
             </a:r>
           </a:p>
         </p:txBody>
@@ -5048,8 +4370,8 @@
         </p:nvSpPr>
         <p:spPr>
           <a:xfrm>
-            <a:off x="502920" y="1188720"/>
-            <a:ext cx="11201400" cy="731520"/>
+            <a:off x="502920" y="1463040"/>
+            <a:ext cx="5394960" cy="2377440"/>
           </a:xfrm>
           <a:prstGeom prst="rect">
             <a:avLst/>
@@ -5064,17 +4386,33 @@
           <a:p>
             <a:pPr algn="l">
               <a:spcAft>
+                <a:spcPts val="400"/>
+              </a:spcAft>
+            </a:pPr>
+            <a:r>
+              <a:rPr sz="1450" b="1" i="0">
+                <a:solidFill>
+                  <a:srgbClr val="212121"/>
+                </a:solidFill>
+                <a:latin typeface="Calibri"/>
+              </a:rPr>
+              <a:t>This is not causal</a:t>
+            </a:r>
+          </a:p>
+          <a:p>
+            <a:pPr algn="l">
+              <a:spcAft>
                 <a:spcPts val="0"/>
               </a:spcAft>
             </a:pPr>
             <a:r>
-              <a:rPr sz="1300" b="0" i="0">
+              <a:rPr sz="1200" b="0" i="0">
                 <a:solidFill>
                   <a:srgbClr val="555555"/>
                 </a:solidFill>
                 <a:latin typeface="Calibri"/>
               </a:rPr>
-              <a:t>Every point since 2015 falls below the extrapolated Rio-to-Paris trend, in all three series, and the gap widens each year. This is not a marginal result: overall intensity is improving 1.9 percentage points a year faster than its prior trend. And it runs through both doors — the fuel mix and energy intensity are both accelerating, which is what a broad transition rather than a single technology looks like.</a:t>
+              <a:t>A turning point identifies when a trend changed, never why. Even a perfect fit at 2015 would be a coincidence of timing. And an agreement that prevented backsliding would leave no turning point at all — so the absence of one is not the absence of an effect.</a:t>
             </a:r>
           </a:p>
         </p:txBody>
@@ -5087,8 +4425,8 @@
         </p:nvSpPr>
         <p:spPr>
           <a:xfrm>
-            <a:off x="502920" y="1956816"/>
-            <a:ext cx="11201400" cy="457200"/>
+            <a:off x="6400800" y="1463040"/>
+            <a:ext cx="5394960" cy="2377440"/>
           </a:xfrm>
           <a:prstGeom prst="rect">
             <a:avLst/>
@@ -5101,56 +4439,149 @@
           </a:bodyPr>
           <a:lstStyle/>
           <a:p>
-            <a:pPr>
+            <a:pPr algn="l">
+              <a:spcAft>
+                <a:spcPts val="400"/>
+              </a:spcAft>
+            </a:pPr>
+            <a:r>
+              <a:rPr sz="1450" b="1" i="0">
+                <a:solidFill>
+                  <a:srgbClr val="212121"/>
+                </a:solidFill>
+                <a:latin typeface="Calibri"/>
+              </a:rPr>
+              <a:t>The window matters</a:t>
+            </a:r>
+          </a:p>
+          <a:p>
+            <a:pPr algn="l">
               <a:spcAft>
                 <a:spcPts val="0"/>
               </a:spcAft>
             </a:pPr>
             <a:r>
-              <a:rPr sz="1150" b="1" i="1">
-                <a:solidFill>
-                  <a:srgbClr val="3A66A5"/>
-                </a:solidFill>
-                <a:latin typeface="Calibri"/>
-              </a:rPr>
-              <a:t>How to read it: </a:t>
-            </a:r>
-            <a:r>
-              <a:rPr sz="1150" b="0" i="1">
-                <a:solidFill>
-                  <a:srgbClr val="8A8A8A"/>
-                </a:solidFill>
-                <a:latin typeface="Calibri"/>
-              </a:rPr>
-              <a:t>1990 = 100, log scale. Solid line is the 1990-2015 trend; dashed extends it with a 95% band for where years should fall if nothing had changed; red points are observed since Paris.</a:t>
-            </a:r>
-          </a:p>
-        </p:txBody>
-      </p:sp>
-      <p:pic>
-        <p:nvPicPr>
-          <p:cNvPr id="5" name="Picture 4" descr="world_fig02_anniversary_test.png"/>
-          <p:cNvPicPr>
-            <a:picLocks noChangeAspect="1"/>
-          </p:cNvPicPr>
+              <a:rPr sz="1200" b="0" i="0">
+                <a:solidFill>
+                  <a:srgbClr val="555555"/>
+                </a:solidFill>
+                <a:latin typeface="Calibri"/>
+              </a:rPr>
+              <a:t>Paris ranks 97th percentile against candidate years on a 1980-start series and lower on a 1990-start one; the fuel-mix result holds above the 90th in both. We report both rather than the flattering one.</a:t>
+            </a:r>
+          </a:p>
+        </p:txBody>
+      </p:sp>
+      <p:sp>
+        <p:nvSpPr>
+          <p:cNvPr id="5" name="TextBox 4"/>
+          <p:cNvSpPr txBox="1"/>
           <p:nvPr/>
-        </p:nvPicPr>
-        <p:blipFill>
-          <a:blip r:embed="rId2"/>
-          <a:stretch>
-            <a:fillRect/>
-          </a:stretch>
-        </p:blipFill>
+        </p:nvSpPr>
         <p:spPr>
           <a:xfrm>
-            <a:off x="1597152" y="2468880"/>
-            <a:ext cx="8994648" cy="4151376"/>
+            <a:off x="502920" y="3977639"/>
+            <a:ext cx="5394960" cy="2377440"/>
           </a:xfrm>
           <a:prstGeom prst="rect">
             <a:avLst/>
           </a:prstGeom>
+          <a:noFill/>
         </p:spPr>
-      </p:pic>
+        <p:txBody>
+          <a:bodyPr wrap="square">
+            <a:spAutoFit/>
+          </a:bodyPr>
+          <a:lstStyle/>
+          <a:p>
+            <a:pPr algn="l">
+              <a:spcAft>
+                <a:spcPts val="400"/>
+              </a:spcAft>
+            </a:pPr>
+            <a:r>
+              <a:rPr sz="1450" b="1" i="0">
+                <a:solidFill>
+                  <a:srgbClr val="212121"/>
+                </a:solidFill>
+                <a:latin typeface="Calibri"/>
+              </a:rPr>
+              <a:t>Coverage and vintage</a:t>
+            </a:r>
+          </a:p>
+          <a:p>
+            <a:pPr algn="l">
+              <a:spcAft>
+                <a:spcPts val="0"/>
+              </a:spcAft>
+            </a:pPr>
+            <a:r>
+              <a:rPr sz="1200" b="0" i="0">
+                <a:solidFill>
+                  <a:srgbClr val="555555"/>
+                </a:solidFill>
+                <a:latin typeface="Calibri"/>
+              </a:rPr>
+              <a:t>182 countries and 99.8% of CO2, but only 13 gaps interpolated and the series stops in 2021 because 2022-23 reporting is incomplete. Adding those two years on partial coverage would overstate the acceleration.</a:t>
+            </a:r>
+          </a:p>
+        </p:txBody>
+      </p:sp>
+      <p:sp>
+        <p:nvSpPr>
+          <p:cNvPr id="6" name="TextBox 5"/>
+          <p:cNvSpPr txBox="1"/>
+          <p:nvPr/>
+        </p:nvSpPr>
+        <p:spPr>
+          <a:xfrm>
+            <a:off x="6400800" y="3977639"/>
+            <a:ext cx="5394960" cy="2377440"/>
+          </a:xfrm>
+          <a:prstGeom prst="rect">
+            <a:avLst/>
+          </a:prstGeom>
+          <a:noFill/>
+        </p:spPr>
+        <p:txBody>
+          <a:bodyPr wrap="square">
+            <a:spAutoFit/>
+          </a:bodyPr>
+          <a:lstStyle/>
+          <a:p>
+            <a:pPr algn="l">
+              <a:spcAft>
+                <a:spcPts val="400"/>
+              </a:spcAft>
+            </a:pPr>
+            <a:r>
+              <a:rPr sz="1450" b="1" i="0">
+                <a:solidFill>
+                  <a:srgbClr val="212121"/>
+                </a:solidFill>
+                <a:latin typeface="Calibri"/>
+              </a:rPr>
+              <a:t>Production-based accounting</a:t>
+            </a:r>
+          </a:p>
+          <a:p>
+            <a:pPr algn="l">
+              <a:spcAft>
+                <a:spcPts val="0"/>
+              </a:spcAft>
+            </a:pPr>
+            <a:r>
+              <a:rPr sz="1200" b="0" i="0">
+                <a:solidFill>
+                  <a:srgbClr val="555555"/>
+                </a:solidFill>
+                <a:latin typeface="Calibri"/>
+              </a:rPr>
+              <a:t>Emissions are counted where they are produced. At the world level that is the right frame — global production equals global consumption — but it matters for the national work that follows.</a:t>
+            </a:r>
+          </a:p>
+        </p:txBody>
+      </p:sp>
     </p:spTree>
   </p:cSld>
   <p:clrMapOvr>
@@ -5177,8 +4608,8 @@
         </p:nvSpPr>
         <p:spPr>
           <a:xfrm>
-            <a:off x="502920" y="274320"/>
-            <a:ext cx="11201400" cy="914400"/>
+            <a:off x="822960" y="1463040"/>
+            <a:ext cx="10515600" cy="1828800"/>
           </a:xfrm>
           <a:prstGeom prst="rect">
             <a:avLst/>
@@ -5197,13 +4628,13 @@
               </a:spcAft>
             </a:pPr>
             <a:r>
-              <a:rPr sz="1200" b="1" i="0">
-                <a:solidFill>
-                  <a:srgbClr val="1B7837"/>
-                </a:solidFill>
-                <a:latin typeface="Calibri"/>
-              </a:rPr>
-              <a:t>ACT II · THE ARITHMETIC</a:t>
+              <a:rPr sz="2800" b="1" i="0">
+                <a:solidFill>
+                  <a:srgbClr val="212121"/>
+                </a:solidFill>
+                <a:latin typeface="Calibri"/>
+              </a:rPr>
+              <a:t>The curve is bending.</a:t>
             </a:r>
           </a:p>
           <a:p>
@@ -5213,13 +4644,13 @@
               </a:spcAft>
             </a:pPr>
             <a:r>
-              <a:rPr sz="2400" b="1" i="0">
-                <a:solidFill>
-                  <a:srgbClr val="212121"/>
-                </a:solidFill>
-                <a:latin typeface="Calibri"/>
-              </a:rPr>
-              <a:t>This time, intensity is doing about half the work</a:t>
+              <a:rPr sz="2800" b="1" i="0">
+                <a:solidFill>
+                  <a:srgbClr val="1B7837"/>
+                </a:solidFill>
+                <a:latin typeface="Calibri"/>
+              </a:rPr>
+              <a:t>The record cannot yet tell us who bent it.</a:t>
             </a:r>
           </a:p>
         </p:txBody>
@@ -5232,8 +4663,8 @@
         </p:nvSpPr>
         <p:spPr>
           <a:xfrm>
-            <a:off x="502920" y="1188720"/>
-            <a:ext cx="11201400" cy="731520"/>
+            <a:off x="822960" y="3383280"/>
+            <a:ext cx="10515600" cy="2651760"/>
           </a:xfrm>
           <a:prstGeom prst="rect">
             <a:avLst/>
@@ -5245,20 +4676,105 @@
             <a:spAutoFit/>
           </a:bodyPr>
           <a:lstStyle/>
-          <a:p>
-            <a:pPr algn="l">
+          <a:p/>
+          <a:p>
+            <a:pPr>
               <a:spcAft>
-                <a:spcPts val="0"/>
+                <a:spcPts val="1000"/>
               </a:spcAft>
             </a:pPr>
             <a:r>
-              <a:rPr sz="1300" b="0" i="0">
+              <a:rPr sz="1500" b="1" i="0">
+                <a:solidFill>
+                  <a:srgbClr val="1B7837"/>
+                </a:solidFill>
+                <a:latin typeface="Calibri"/>
+              </a:rPr>
+              <a:t>—  </a:t>
+            </a:r>
+            <a:r>
+              <a:rPr sz="1500" b="0" i="0">
                 <a:solidFill>
                   <a:srgbClr val="555555"/>
                 </a:solidFill>
                 <a:latin typeface="Calibri"/>
               </a:rPr>
-              <a:t>Emissions growth fell by 1.9 percentage points after Paris. Roughly half of that is slower economic growth — including the pandemic — and roughly half is faster intensity improvement, split between a cleaner fuel mix and lower energy intensity. That is a materially better mix than the Rio-to-Paris era, when the fuel mix contributed nothing at all. But the dotted line shows the target: intensity must fall as fast as the economy grows before emissions stop rising.</a:t>
+              <a:t>Emissions growth fell by two thirds after Paris — but two thirds of that is slower economic growth.</a:t>
+            </a:r>
+          </a:p>
+          <a:p>
+            <a:pPr>
+              <a:spcAft>
+                <a:spcPts val="1000"/>
+              </a:spcAft>
+            </a:pPr>
+            <a:r>
+              <a:rPr sz="1500" b="1" i="0">
+                <a:solidFill>
+                  <a:srgbClr val="1B7837"/>
+                </a:solidFill>
+                <a:latin typeface="Calibri"/>
+              </a:rPr>
+              <a:t>—  </a:t>
+            </a:r>
+            <a:r>
+              <a:rPr sz="1500" b="0" i="0">
+                <a:solidFill>
+                  <a:srgbClr val="555555"/>
+                </a:solidFill>
+                <a:latin typeface="Calibri"/>
+              </a:rPr>
+              <a:t>The fuel mix is the one component beating its long-run trend. Energy efficiency has not changed at all.</a:t>
+            </a:r>
+          </a:p>
+          <a:p>
+            <a:pPr>
+              <a:spcAft>
+                <a:spcPts val="1000"/>
+              </a:spcAft>
+            </a:pPr>
+            <a:r>
+              <a:rPr sz="1500" b="1" i="0">
+                <a:solidFill>
+                  <a:srgbClr val="1B7837"/>
+                </a:solidFill>
+                <a:latin typeface="Calibri"/>
+              </a:rPr>
+              <a:t>—  </a:t>
+            </a:r>
+            <a:r>
+              <a:rPr sz="1500" b="0" i="0">
+                <a:solidFill>
+                  <a:srgbClr val="555555"/>
+                </a:solidFill>
+                <a:latin typeface="Calibri"/>
+              </a:rPr>
+              <a:t>Rio fails the placebo test; Paris passes it — the first treaty date the record does not reject.</a:t>
+            </a:r>
+          </a:p>
+          <a:p>
+            <a:pPr>
+              <a:spcAft>
+                <a:spcPts val="1000"/>
+              </a:spcAft>
+            </a:pPr>
+            <a:r>
+              <a:rPr sz="1500" b="1" i="0">
+                <a:solidFill>
+                  <a:srgbClr val="1B7837"/>
+                </a:solidFill>
+                <a:latin typeface="Calibri"/>
+              </a:rPr>
+              <a:t>—  </a:t>
+            </a:r>
+            <a:r>
+              <a:rPr sz="1500" b="0" i="0">
+                <a:solidFill>
+                  <a:srgbClr val="555555"/>
+                </a:solidFill>
+                <a:latin typeface="Calibri"/>
+              </a:rPr>
+              <a:t>And the change coincides with the clean-energy cost collapse, which six years of data cannot separate from it.</a:t>
             </a:r>
           </a:p>
         </p:txBody>
@@ -5271,8 +4787,8 @@
         </p:nvSpPr>
         <p:spPr>
           <a:xfrm>
-            <a:off x="502920" y="1956816"/>
-            <a:ext cx="11201400" cy="457200"/>
+            <a:off x="822960" y="6035040"/>
+            <a:ext cx="10515600" cy="640080"/>
           </a:xfrm>
           <a:prstGeom prst="rect">
             <a:avLst/>
@@ -5285,1740 +4801,19 @@
           </a:bodyPr>
           <a:lstStyle/>
           <a:p>
-            <a:pPr>
-              <a:spcAft>
-                <a:spcPts val="0"/>
-              </a:spcAft>
-            </a:pPr>
-            <a:r>
-              <a:rPr sz="1150" b="1" i="1">
-                <a:solidFill>
-                  <a:srgbClr val="3A66A5"/>
-                </a:solidFill>
-                <a:latin typeface="Calibri"/>
-              </a:rPr>
-              <a:t>How to read it: </a:t>
-            </a:r>
-            <a:r>
-              <a:rPr sz="1150" b="0" i="1">
-                <a:solidFill>
-                  <a:srgbClr val="8A8A8A"/>
-                </a:solidFill>
-                <a:latin typeface="Calibri"/>
-              </a:rPr>
-              <a:t>Each bar is an average annual growth rate; by construction the red emissions bar equals the grey GDP bar plus the two coloured intensity bars.</a:t>
-            </a:r>
-          </a:p>
-        </p:txBody>
-      </p:sp>
-      <p:pic>
-        <p:nvPicPr>
-          <p:cNvPr id="5" name="Picture 4" descr="world_fig03_arithmetic.png"/>
-          <p:cNvPicPr>
-            <a:picLocks noChangeAspect="1"/>
-          </p:cNvPicPr>
-          <p:nvPr/>
-        </p:nvPicPr>
-        <p:blipFill>
-          <a:blip r:embed="rId2"/>
-          <a:stretch>
-            <a:fillRect/>
-          </a:stretch>
-        </p:blipFill>
-        <p:spPr>
-          <a:xfrm>
-            <a:off x="1770126" y="2468880"/>
-            <a:ext cx="8648699" cy="4151376"/>
-          </a:xfrm>
-          <a:prstGeom prst="rect">
-            <a:avLst/>
-          </a:prstGeom>
-        </p:spPr>
-      </p:pic>
-    </p:spTree>
-  </p:cSld>
-  <p:clrMapOvr>
-    <a:masterClrMapping/>
-  </p:clrMapOvr>
-</p:sld>
-</file>
-
-<file path=ppt/slides/slide12.xml><?xml version="1.0" encoding="utf-8"?>
-<p:sld xmlns:a="http://schemas.openxmlformats.org/drawingml/2006/main" xmlns:p="http://schemas.openxmlformats.org/presentationml/2006/main" xmlns:r="http://schemas.openxmlformats.org/officeDocument/2006/relationships">
-  <p:cSld>
-    <p:spTree>
-      <p:nvGrpSpPr>
-        <p:cNvPr id="1" name=""/>
-        <p:cNvGrpSpPr/>
-        <p:nvPr/>
-      </p:nvGrpSpPr>
-      <p:grpSpPr/>
-      <p:sp>
-        <p:nvSpPr>
-          <p:cNvPr id="2" name="TextBox 1"/>
-          <p:cNvSpPr txBox="1"/>
-          <p:nvPr/>
-        </p:nvSpPr>
-        <p:spPr>
-          <a:xfrm>
-            <a:off x="822960" y="777240"/>
-            <a:ext cx="10515600" cy="2377440"/>
-          </a:xfrm>
-          <a:prstGeom prst="rect">
-            <a:avLst/>
-          </a:prstGeom>
-          <a:noFill/>
-        </p:spPr>
-        <p:txBody>
-          <a:bodyPr wrap="square">
-            <a:spAutoFit/>
-          </a:bodyPr>
-          <a:lstStyle/>
-          <a:p>
-            <a:pPr algn="l">
-              <a:spcAft>
-                <a:spcPts val="0"/>
-              </a:spcAft>
-            </a:pPr>
-            <a:r>
-              <a:rPr sz="4400" b="1" i="0">
-                <a:solidFill>
-                  <a:srgbClr val="1B7837"/>
-                </a:solidFill>
-                <a:latin typeface="Calibri"/>
-              </a:rPr>
-              <a:t>III</a:t>
-            </a:r>
-          </a:p>
-          <a:p>
-            <a:pPr algn="l">
+            <a:pPr algn="ctr">
               <a:spcAft>
                 <a:spcPts val="600"/>
               </a:spcAft>
             </a:pPr>
             <a:r>
-              <a:rPr sz="1200" b="1" i="0">
+              <a:rPr sz="1300" b="0" i="1">
                 <a:solidFill>
                   <a:srgbClr val="8A8A8A"/>
                 </a:solidFill>
                 <a:latin typeface="Calibri"/>
               </a:rPr>
-              <a:t>ACT III</a:t>
-            </a:r>
-          </a:p>
-          <a:p>
-            <a:pPr algn="l">
-              <a:spcAft>
-                <a:spcPts val="800"/>
-              </a:spcAft>
-            </a:pPr>
-            <a:r>
-              <a:rPr sz="2800" b="1" i="0">
-                <a:solidFill>
-                  <a:srgbClr val="212121"/>
-                </a:solidFill>
-                <a:latin typeface="Calibri"/>
-              </a:rPr>
-              <a:t>Can the record name the author?</a:t>
-            </a:r>
-          </a:p>
-          <a:p>
-            <a:pPr algn="l">
-              <a:spcAft>
-                <a:spcPts val="0"/>
-              </a:spcAft>
-            </a:pPr>
-            <a:r>
-              <a:rPr sz="1400" b="0" i="0">
-                <a:solidFill>
-                  <a:srgbClr val="555555"/>
-                </a:solidFill>
-                <a:latin typeface="Calibri"/>
-              </a:rPr>
-              <a:t>An acceleration is not an attribution. The test is whether the treaty year beats the years around it — the same test that dismissed Rio.</a:t>
-            </a:r>
-          </a:p>
-        </p:txBody>
-      </p:sp>
-      <p:sp>
-        <p:nvSpPr>
-          <p:cNvPr id="3" name="TextBox 2"/>
-          <p:cNvSpPr txBox="1"/>
-          <p:nvPr/>
-        </p:nvSpPr>
-        <p:spPr>
-          <a:xfrm>
-            <a:off x="822960" y="4297680"/>
-            <a:ext cx="3474720" cy="1828800"/>
-          </a:xfrm>
-          <a:prstGeom prst="rect">
-            <a:avLst/>
-          </a:prstGeom>
-          <a:noFill/>
-        </p:spPr>
-        <p:txBody>
-          <a:bodyPr wrap="square">
-            <a:spAutoFit/>
-          </a:bodyPr>
-          <a:lstStyle/>
-          <a:p>
-            <a:pPr algn="l">
-              <a:spcAft>
-                <a:spcPts val="200"/>
-              </a:spcAft>
-            </a:pPr>
-            <a:r>
-              <a:rPr sz="2800" b="1" i="0">
-                <a:solidFill>
-                  <a:srgbClr val="1B7837"/>
-                </a:solidFill>
-                <a:latin typeface="Calibri"/>
-              </a:rPr>
-              <a:t>7th vs 97th</a:t>
-            </a:r>
-          </a:p>
-          <a:p>
-            <a:pPr algn="l">
-              <a:spcAft>
-                <a:spcPts val="0"/>
-              </a:spcAft>
-            </a:pPr>
-            <a:r>
-              <a:rPr sz="1250" b="0" i="0">
-                <a:solidFill>
-                  <a:srgbClr val="555555"/>
-                </a:solidFill>
-                <a:latin typeface="Calibri"/>
-              </a:rPr>
-              <a:t>percentile of candidate years: Rio versus Paris, overall intensity</a:t>
-            </a:r>
-          </a:p>
-        </p:txBody>
-      </p:sp>
-      <p:sp>
-        <p:nvSpPr>
-          <p:cNvPr id="4" name="TextBox 3"/>
-          <p:cNvSpPr txBox="1"/>
-          <p:nvPr/>
-        </p:nvSpPr>
-        <p:spPr>
-          <a:xfrm>
-            <a:off x="4434840" y="4297680"/>
-            <a:ext cx="3474720" cy="1828800"/>
-          </a:xfrm>
-          <a:prstGeom prst="rect">
-            <a:avLst/>
-          </a:prstGeom>
-          <a:noFill/>
-        </p:spPr>
-        <p:txBody>
-          <a:bodyPr wrap="square">
-            <a:spAutoFit/>
-          </a:bodyPr>
-          <a:lstStyle/>
-          <a:p>
-            <a:pPr algn="l">
-              <a:spcAft>
-                <a:spcPts val="200"/>
-              </a:spcAft>
-            </a:pPr>
-            <a:r>
-              <a:rPr sz="2800" b="1" i="0">
-                <a:solidFill>
-                  <a:srgbClr val="1B7837"/>
-                </a:solidFill>
-                <a:latin typeface="Calibri"/>
-              </a:rPr>
-              <a:t>2012-2014</a:t>
-            </a:r>
-          </a:p>
-          <a:p>
-            <a:pPr algn="l">
-              <a:spcAft>
-                <a:spcPts val="0"/>
-              </a:spcAft>
-            </a:pPr>
-            <a:r>
-              <a:rPr sz="1250" b="0" i="0">
-                <a:solidFill>
-                  <a:srgbClr val="555555"/>
-                </a:solidFill>
-                <a:latin typeface="Calibri"/>
-              </a:rPr>
-              <a:t>where the best-fitting onset lands in every component</a:t>
-            </a:r>
-          </a:p>
-        </p:txBody>
-      </p:sp>
-      <p:sp>
-        <p:nvSpPr>
-          <p:cNvPr id="5" name="TextBox 4"/>
-          <p:cNvSpPr txBox="1"/>
-          <p:nvPr/>
-        </p:nvSpPr>
-        <p:spPr>
-          <a:xfrm>
-            <a:off x="8046720" y="4297680"/>
-            <a:ext cx="3474720" cy="1828800"/>
-          </a:xfrm>
-          <a:prstGeom prst="rect">
-            <a:avLst/>
-          </a:prstGeom>
-          <a:noFill/>
-        </p:spPr>
-        <p:txBody>
-          <a:bodyPr wrap="square">
-            <a:spAutoFit/>
-          </a:bodyPr>
-          <a:lstStyle/>
-          <a:p>
-            <a:pPr algn="l">
-              <a:spcAft>
-                <a:spcPts val="200"/>
-              </a:spcAft>
-            </a:pPr>
-            <a:r>
-              <a:rPr sz="2800" b="1" i="0">
-                <a:solidFill>
-                  <a:srgbClr val="1B7837"/>
-                </a:solidFill>
-                <a:latin typeface="Calibri"/>
-              </a:rPr>
-              <a:t>~0.8 pp/yr</a:t>
-            </a:r>
-          </a:p>
-          <a:p>
-            <a:pPr algn="l">
-              <a:spcAft>
-                <a:spcPts val="0"/>
-              </a:spcAft>
-            </a:pPr>
-            <a:r>
-              <a:rPr sz="1250" b="0" i="0">
-                <a:solidFill>
-                  <a:srgbClr val="555555"/>
-                </a:solidFill>
-                <a:latin typeface="Calibri"/>
-              </a:rPr>
-              <a:t>the smallest effect ten years of data could have detected</a:t>
-            </a:r>
-          </a:p>
-        </p:txBody>
-      </p:sp>
-    </p:spTree>
-  </p:cSld>
-  <p:clrMapOvr>
-    <a:masterClrMapping/>
-  </p:clrMapOvr>
-</p:sld>
-</file>
-
-<file path=ppt/slides/slide13.xml><?xml version="1.0" encoding="utf-8"?>
-<p:sld xmlns:a="http://schemas.openxmlformats.org/drawingml/2006/main" xmlns:p="http://schemas.openxmlformats.org/presentationml/2006/main" xmlns:r="http://schemas.openxmlformats.org/officeDocument/2006/relationships">
-  <p:cSld>
-    <p:spTree>
-      <p:nvGrpSpPr>
-        <p:cNvPr id="1" name=""/>
-        <p:cNvGrpSpPr/>
-        <p:nvPr/>
-      </p:nvGrpSpPr>
-      <p:grpSpPr/>
-      <p:sp>
-        <p:nvSpPr>
-          <p:cNvPr id="2" name="TextBox 1"/>
-          <p:cNvSpPr txBox="1"/>
-          <p:nvPr/>
-        </p:nvSpPr>
-        <p:spPr>
-          <a:xfrm>
-            <a:off x="502920" y="274320"/>
-            <a:ext cx="11201400" cy="914400"/>
-          </a:xfrm>
-          <a:prstGeom prst="rect">
-            <a:avLst/>
-          </a:prstGeom>
-          <a:noFill/>
-        </p:spPr>
-        <p:txBody>
-          <a:bodyPr wrap="square">
-            <a:spAutoFit/>
-          </a:bodyPr>
-          <a:lstStyle/>
-          <a:p>
-            <a:pPr algn="l">
-              <a:spcAft>
-                <a:spcPts val="200"/>
-              </a:spcAft>
-            </a:pPr>
-            <a:r>
-              <a:rPr sz="1200" b="1" i="0">
-                <a:solidFill>
-                  <a:srgbClr val="C77F00"/>
-                </a:solidFill>
-                <a:latin typeface="Calibri"/>
-              </a:rPr>
-              <a:t>ACT III · RIO VERSUS PARIS</a:t>
-            </a:r>
-          </a:p>
-          <a:p>
-            <a:pPr algn="l">
-              <a:spcAft>
-                <a:spcPts val="0"/>
-              </a:spcAft>
-            </a:pPr>
-            <a:r>
-              <a:rPr sz="2400" b="1" i="0">
-                <a:solidFill>
-                  <a:srgbClr val="212121"/>
-                </a:solidFill>
-                <a:latin typeface="Calibri"/>
-              </a:rPr>
-              <a:t>Rio the record dismisses. Paris it cannot.</a:t>
-            </a:r>
-          </a:p>
-        </p:txBody>
-      </p:sp>
-      <p:sp>
-        <p:nvSpPr>
-          <p:cNvPr id="3" name="TextBox 2"/>
-          <p:cNvSpPr txBox="1"/>
-          <p:nvPr/>
-        </p:nvSpPr>
-        <p:spPr>
-          <a:xfrm>
-            <a:off x="502920" y="1188720"/>
-            <a:ext cx="11201400" cy="731520"/>
-          </a:xfrm>
-          <a:prstGeom prst="rect">
-            <a:avLst/>
-          </a:prstGeom>
-          <a:noFill/>
-        </p:spPr>
-        <p:txBody>
-          <a:bodyPr wrap="square">
-            <a:spAutoFit/>
-          </a:bodyPr>
-          <a:lstStyle/>
-          <a:p>
-            <a:pPr algn="l">
-              <a:spcAft>
-                <a:spcPts val="0"/>
-              </a:spcAft>
-            </a:pPr>
-            <a:r>
-              <a:rPr sz="1300" b="0" i="0">
-                <a:solidFill>
-                  <a:srgbClr val="555555"/>
-                </a:solidFill>
-                <a:latin typeface="Calibri"/>
-              </a:rPr>
-              <a:t>Place the break at every candidate year in turn and the two treaties look nothing alike. Rio sits at the 7th percentile of candidate years for overall intensity — which is why 1992 results never survive scrutiny. Paris sits at the 97th: the first treaty date this test does not throw out. But in none of the three components is it the best-fitting year, and what it sits on is a plateau, not a peak.</a:t>
-            </a:r>
-          </a:p>
-        </p:txBody>
-      </p:sp>
-      <p:sp>
-        <p:nvSpPr>
-          <p:cNvPr id="4" name="TextBox 3"/>
-          <p:cNvSpPr txBox="1"/>
-          <p:nvPr/>
-        </p:nvSpPr>
-        <p:spPr>
-          <a:xfrm>
-            <a:off x="502920" y="1956816"/>
-            <a:ext cx="11201400" cy="457200"/>
-          </a:xfrm>
-          <a:prstGeom prst="rect">
-            <a:avLst/>
-          </a:prstGeom>
-          <a:noFill/>
-        </p:spPr>
-        <p:txBody>
-          <a:bodyPr wrap="square">
-            <a:spAutoFit/>
-          </a:bodyPr>
-          <a:lstStyle/>
-          <a:p>
-            <a:pPr>
-              <a:spcAft>
-                <a:spcPts val="0"/>
-              </a:spcAft>
-            </a:pPr>
-            <a:r>
-              <a:rPr sz="1150" b="1" i="1">
-                <a:solidFill>
-                  <a:srgbClr val="3A66A5"/>
-                </a:solidFill>
-                <a:latin typeface="Calibri"/>
-              </a:rPr>
-              <a:t>How to read it: </a:t>
-            </a:r>
-            <a:r>
-              <a:rPr sz="1150" b="0" i="1">
-                <a:solidFill>
-                  <a:srgbClr val="8A8A8A"/>
-                </a:solidFill>
-                <a:latin typeface="Calibri"/>
-              </a:rPr>
-              <a:t>Evidence for a slope change placed at each candidate year; open circles mark 2015. Higher means the record prefers that year as the onset.</a:t>
-            </a:r>
-          </a:p>
-        </p:txBody>
-      </p:sp>
-      <p:pic>
-        <p:nvPicPr>
-          <p:cNvPr id="5" name="Picture 4" descr="world_fig04_placebo_plateau.png"/>
-          <p:cNvPicPr>
-            <a:picLocks noChangeAspect="1"/>
-          </p:cNvPicPr>
-          <p:nvPr/>
-        </p:nvPicPr>
-        <p:blipFill>
-          <a:blip r:embed="rId2"/>
-          <a:stretch>
-            <a:fillRect/>
-          </a:stretch>
-        </p:blipFill>
-        <p:spPr>
-          <a:xfrm>
-            <a:off x="1597152" y="2468880"/>
-            <a:ext cx="8994648" cy="4151376"/>
-          </a:xfrm>
-          <a:prstGeom prst="rect">
-            <a:avLst/>
-          </a:prstGeom>
-        </p:spPr>
-      </p:pic>
-    </p:spTree>
-  </p:cSld>
-  <p:clrMapOvr>
-    <a:masterClrMapping/>
-  </p:clrMapOvr>
-</p:sld>
-</file>
-
-<file path=ppt/slides/slide14.xml><?xml version="1.0" encoding="utf-8"?>
-<p:sld xmlns:a="http://schemas.openxmlformats.org/drawingml/2006/main" xmlns:p="http://schemas.openxmlformats.org/presentationml/2006/main" xmlns:r="http://schemas.openxmlformats.org/officeDocument/2006/relationships">
-  <p:cSld>
-    <p:spTree>
-      <p:nvGrpSpPr>
-        <p:cNvPr id="1" name=""/>
-        <p:cNvGrpSpPr/>
-        <p:nvPr/>
-      </p:nvGrpSpPr>
-      <p:grpSpPr/>
-      <p:sp>
-        <p:nvSpPr>
-          <p:cNvPr id="2" name="TextBox 1"/>
-          <p:cNvSpPr txBox="1"/>
-          <p:nvPr/>
-        </p:nvSpPr>
-        <p:spPr>
-          <a:xfrm>
-            <a:off x="502920" y="274320"/>
-            <a:ext cx="11201400" cy="914400"/>
-          </a:xfrm>
-          <a:prstGeom prst="rect">
-            <a:avLst/>
-          </a:prstGeom>
-          <a:noFill/>
-        </p:spPr>
-        <p:txBody>
-          <a:bodyPr wrap="square">
-            <a:spAutoFit/>
-          </a:bodyPr>
-          <a:lstStyle/>
-          <a:p>
-            <a:pPr algn="l">
-              <a:spcAft>
-                <a:spcPts val="200"/>
-              </a:spcAft>
-            </a:pPr>
-            <a:r>
-              <a:rPr sz="1200" b="1" i="0">
-                <a:solidFill>
-                  <a:srgbClr val="C77F00"/>
-                </a:solidFill>
-                <a:latin typeface="Calibri"/>
-              </a:rPr>
-              <a:t>ACT III · THE POWER PROBLEM</a:t>
-            </a:r>
-          </a:p>
-          <a:p>
-            <a:pPr algn="l">
-              <a:spcAft>
-                <a:spcPts val="0"/>
-              </a:spcAft>
-            </a:pPr>
-            <a:r>
-              <a:rPr sz="2400" b="1" i="0">
-                <a:solidFill>
-                  <a:srgbClr val="212121"/>
-                </a:solidFill>
-                <a:latin typeface="Calibri"/>
-              </a:rPr>
-              <a:t>Ten years of data can only reveal a very large effect</a:t>
-            </a:r>
-          </a:p>
-        </p:txBody>
-      </p:sp>
-      <p:sp>
-        <p:nvSpPr>
-          <p:cNvPr id="3" name="TextBox 2"/>
-          <p:cNvSpPr txBox="1"/>
-          <p:nvPr/>
-        </p:nvSpPr>
-        <p:spPr>
-          <a:xfrm>
-            <a:off x="502920" y="1188720"/>
-            <a:ext cx="11201400" cy="731520"/>
-          </a:xfrm>
-          <a:prstGeom prst="rect">
-            <a:avLst/>
-          </a:prstGeom>
-          <a:noFill/>
-        </p:spPr>
-        <p:txBody>
-          <a:bodyPr wrap="square">
-            <a:spAutoFit/>
-          </a:bodyPr>
-          <a:lstStyle/>
-          <a:p>
-            <a:pPr algn="l">
-              <a:spcAft>
-                <a:spcPts val="0"/>
-              </a:spcAft>
-            </a:pPr>
-            <a:r>
-              <a:rPr sz="1300" b="0" i="0">
-                <a:solidFill>
-                  <a:srgbClr val="555555"/>
-                </a:solidFill>
-                <a:latin typeface="Calibri"/>
-              </a:rPr>
-              <a:t>The observed acceleration clears the bar because it is unusually large. An effect half its size would not be visible until the early 2030s — so the record could not have detected a modest Paris effect had one existed, and it certainly cannot resolve a two-year difference in onset. The instrument is blunt at this horizon.</a:t>
-            </a:r>
-          </a:p>
-        </p:txBody>
-      </p:sp>
-      <p:sp>
-        <p:nvSpPr>
-          <p:cNvPr id="4" name="TextBox 3"/>
-          <p:cNvSpPr txBox="1"/>
-          <p:nvPr/>
-        </p:nvSpPr>
-        <p:spPr>
-          <a:xfrm>
-            <a:off x="502920" y="1956816"/>
-            <a:ext cx="11201400" cy="457200"/>
-          </a:xfrm>
-          <a:prstGeom prst="rect">
-            <a:avLst/>
-          </a:prstGeom>
-          <a:noFill/>
-        </p:spPr>
-        <p:txBody>
-          <a:bodyPr wrap="square">
-            <a:spAutoFit/>
-          </a:bodyPr>
-          <a:lstStyle/>
-          <a:p>
-            <a:pPr>
-              <a:spcAft>
-                <a:spcPts val="0"/>
-              </a:spcAft>
-            </a:pPr>
-            <a:r>
-              <a:rPr sz="1150" b="1" i="1">
-                <a:solidFill>
-                  <a:srgbClr val="3A66A5"/>
-                </a:solidFill>
-                <a:latin typeface="Calibri"/>
-              </a:rPr>
-              <a:t>How to read it: </a:t>
-            </a:r>
-            <a:r>
-              <a:rPr sz="1150" b="0" i="1">
-                <a:solidFill>
-                  <a:srgbClr val="8A8A8A"/>
-                </a:solidFill>
-                <a:latin typeface="Calibri"/>
-              </a:rPr>
-              <a:t>The smallest post-2015 slope change detectable at 80% power (solid) and at the significance threshold (dashed), as more years accumulate; the red line is what we actually observe.</a:t>
-            </a:r>
-          </a:p>
-        </p:txBody>
-      </p:sp>
-      <p:pic>
-        <p:nvPicPr>
-          <p:cNvPr id="5" name="Picture 4" descr="world_fig06_power.png"/>
-          <p:cNvPicPr>
-            <a:picLocks noChangeAspect="1"/>
-          </p:cNvPicPr>
-          <p:nvPr/>
-        </p:nvPicPr>
-        <p:blipFill>
-          <a:blip r:embed="rId2"/>
-          <a:stretch>
-            <a:fillRect/>
-          </a:stretch>
-        </p:blipFill>
-        <p:spPr>
-          <a:xfrm>
-            <a:off x="1770126" y="2468880"/>
-            <a:ext cx="8648699" cy="4151376"/>
-          </a:xfrm>
-          <a:prstGeom prst="rect">
-            <a:avLst/>
-          </a:prstGeom>
-        </p:spPr>
-      </p:pic>
-    </p:spTree>
-  </p:cSld>
-  <p:clrMapOvr>
-    <a:masterClrMapping/>
-  </p:clrMapOvr>
-</p:sld>
-</file>
-
-<file path=ppt/slides/slide15.xml><?xml version="1.0" encoding="utf-8"?>
-<p:sld xmlns:a="http://schemas.openxmlformats.org/drawingml/2006/main" xmlns:p="http://schemas.openxmlformats.org/presentationml/2006/main" xmlns:r="http://schemas.openxmlformats.org/officeDocument/2006/relationships">
-  <p:cSld>
-    <p:spTree>
-      <p:nvGrpSpPr>
-        <p:cNvPr id="1" name=""/>
-        <p:cNvGrpSpPr/>
-        <p:nvPr/>
-      </p:nvGrpSpPr>
-      <p:grpSpPr/>
-      <p:sp>
-        <p:nvSpPr>
-          <p:cNvPr id="2" name="TextBox 1"/>
-          <p:cNvSpPr txBox="1"/>
-          <p:nvPr/>
-        </p:nvSpPr>
-        <p:spPr>
-          <a:xfrm>
-            <a:off x="502920" y="274320"/>
-            <a:ext cx="11201400" cy="914400"/>
-          </a:xfrm>
-          <a:prstGeom prst="rect">
-            <a:avLst/>
-          </a:prstGeom>
-          <a:noFill/>
-        </p:spPr>
-        <p:txBody>
-          <a:bodyPr wrap="square">
-            <a:spAutoFit/>
-          </a:bodyPr>
-          <a:lstStyle/>
-          <a:p>
-            <a:pPr algn="l">
-              <a:spcAft>
-                <a:spcPts val="200"/>
-              </a:spcAft>
-            </a:pPr>
-            <a:r>
-              <a:rPr sz="1200" b="1" i="0">
-                <a:solidFill>
-                  <a:srgbClr val="C77F00"/>
-                </a:solidFill>
-                <a:latin typeface="Calibri"/>
-              </a:rPr>
-              <a:t>WHERE ACT III LEAVES US</a:t>
-            </a:r>
-          </a:p>
-          <a:p>
-            <a:pPr algn="l">
-              <a:spcAft>
-                <a:spcPts val="0"/>
-              </a:spcAft>
-            </a:pPr>
-            <a:r>
-              <a:rPr sz="2400" b="1" i="0">
-                <a:solidFill>
-                  <a:srgbClr val="212121"/>
-                </a:solidFill>
-                <a:latin typeface="Calibri"/>
-              </a:rPr>
-              <a:t>The strongest defensible claim</a:t>
-            </a:r>
-          </a:p>
-        </p:txBody>
-      </p:sp>
-      <p:sp>
-        <p:nvSpPr>
-          <p:cNvPr id="3" name="TextBox 2"/>
-          <p:cNvSpPr txBox="1"/>
-          <p:nvPr/>
-        </p:nvSpPr>
-        <p:spPr>
-          <a:xfrm>
-            <a:off x="502920" y="1463040"/>
-            <a:ext cx="5532120" cy="4937760"/>
-          </a:xfrm>
-          <a:prstGeom prst="rect">
-            <a:avLst/>
-          </a:prstGeom>
-          <a:noFill/>
-        </p:spPr>
-        <p:txBody>
-          <a:bodyPr wrap="square">
-            <a:spAutoFit/>
-          </a:bodyPr>
-          <a:lstStyle/>
-          <a:p>
-            <a:pPr algn="l">
-              <a:spcAft>
-                <a:spcPts val="600"/>
-              </a:spcAft>
-            </a:pPr>
-            <a:r>
-              <a:rPr sz="1500" b="1" i="0">
-                <a:solidFill>
-                  <a:srgbClr val="1B7837"/>
-                </a:solidFill>
-                <a:latin typeface="Calibri"/>
-              </a:rPr>
-              <a:t>What the record establishes</a:t>
-            </a:r>
-          </a:p>
-          <a:p>
-            <a:pPr algn="l">
-              <a:spcAft>
-                <a:spcPts val="0"/>
-              </a:spcAft>
-            </a:pPr>
-            <a:r>
-              <a:rPr sz="1350" b="0" i="0">
-                <a:solidFill>
-                  <a:srgbClr val="555555"/>
-                </a:solidFill>
-                <a:latin typeface="Calibri"/>
-              </a:rPr>
-              <a:t>The world is decarbonizing faster than at any point in the observed record, through both Kaya doors, and the improvement is large and statistically unambiguous. Paris is the first climate treaty whose date survives comparison with its neighbouring years — a test Rio fails badly. Whatever is happening began in the same window as the agreement and is entirely consistent with it.</a:t>
-            </a:r>
-          </a:p>
-        </p:txBody>
-      </p:sp>
-      <p:sp>
-        <p:nvSpPr>
-          <p:cNvPr id="4" name="TextBox 3"/>
-          <p:cNvSpPr txBox="1"/>
-          <p:nvPr/>
-        </p:nvSpPr>
-        <p:spPr>
-          <a:xfrm>
-            <a:off x="6400800" y="1463040"/>
-            <a:ext cx="5303520" cy="4937760"/>
-          </a:xfrm>
-          <a:prstGeom prst="rect">
-            <a:avLst/>
-          </a:prstGeom>
-          <a:noFill/>
-        </p:spPr>
-        <p:txBody>
-          <a:bodyPr wrap="square">
-            <a:spAutoFit/>
-          </a:bodyPr>
-          <a:lstStyle/>
-          <a:p>
-            <a:pPr algn="l">
-              <a:spcAft>
-                <a:spcPts val="600"/>
-              </a:spcAft>
-            </a:pPr>
-            <a:r>
-              <a:rPr sz="1500" b="1" i="0">
-                <a:solidFill>
-                  <a:srgbClr val="B33A3A"/>
-                </a:solidFill>
-                <a:latin typeface="Calibri"/>
-              </a:rPr>
-              <a:t>What it cannot establish</a:t>
-            </a:r>
-          </a:p>
-          <a:p>
-            <a:pPr algn="l">
-              <a:spcAft>
-                <a:spcPts val="800"/>
-              </a:spcAft>
-            </a:pPr>
-            <a:r>
-              <a:rPr sz="1350" b="0" i="0">
-                <a:solidFill>
-                  <a:srgbClr val="555555"/>
-                </a:solidFill>
-                <a:latin typeface="Calibri"/>
-              </a:rPr>
-              <a:t>The best-fitting onset is 2012-2014, before the treaty, and the evidence forms a plateau across those years rather than a peak at 2015. With ten years of data the test cannot resolve differences of two or three years, and could not have seen a modest effect at all. The acceleration also coincides exactly with the collapse in renewable costs — a rival explanation the global series has no way to separate.</a:t>
-            </a:r>
-          </a:p>
-          <a:p>
-            <a:pPr algn="l">
-              <a:spcAft>
-                <a:spcPts val="0"/>
-              </a:spcAft>
-            </a:pPr>
-            <a:r>
-              <a:rPr sz="1350" b="1" i="0">
-                <a:solidFill>
-                  <a:srgbClr val="212121"/>
-                </a:solidFill>
-                <a:latin typeface="Calibri"/>
-              </a:rPr>
-              <a:t>Paris is consistent with the acceleration, and indistinguishable from the technology shift it helped consolidate.</a:t>
-            </a:r>
-          </a:p>
-        </p:txBody>
-      </p:sp>
-    </p:spTree>
-  </p:cSld>
-  <p:clrMapOvr>
-    <a:masterClrMapping/>
-  </p:clrMapOvr>
-</p:sld>
-</file>
-
-<file path=ppt/slides/slide16.xml><?xml version="1.0" encoding="utf-8"?>
-<p:sld xmlns:a="http://schemas.openxmlformats.org/drawingml/2006/main" xmlns:p="http://schemas.openxmlformats.org/presentationml/2006/main" xmlns:r="http://schemas.openxmlformats.org/officeDocument/2006/relationships">
-  <p:cSld>
-    <p:spTree>
-      <p:nvGrpSpPr>
-        <p:cNvPr id="1" name=""/>
-        <p:cNvGrpSpPr/>
-        <p:nvPr/>
-      </p:nvGrpSpPr>
-      <p:grpSpPr/>
-      <p:sp>
-        <p:nvSpPr>
-          <p:cNvPr id="2" name="TextBox 1"/>
-          <p:cNvSpPr txBox="1"/>
-          <p:nvPr/>
-        </p:nvSpPr>
-        <p:spPr>
-          <a:xfrm>
-            <a:off x="822960" y="777240"/>
-            <a:ext cx="10515600" cy="2377440"/>
-          </a:xfrm>
-          <a:prstGeom prst="rect">
-            <a:avLst/>
-          </a:prstGeom>
-          <a:noFill/>
-        </p:spPr>
-        <p:txBody>
-          <a:bodyPr wrap="square">
-            <a:spAutoFit/>
-          </a:bodyPr>
-          <a:lstStyle/>
-          <a:p>
-            <a:pPr algn="l">
-              <a:spcAft>
-                <a:spcPts val="0"/>
-              </a:spcAft>
-            </a:pPr>
-            <a:r>
-              <a:rPr sz="4400" b="1" i="0">
-                <a:solidFill>
-                  <a:srgbClr val="1B7837"/>
-                </a:solidFill>
-                <a:latin typeface="Calibri"/>
-              </a:rPr>
-              <a:t>IV</a:t>
-            </a:r>
-          </a:p>
-          <a:p>
-            <a:pPr algn="l">
-              <a:spcAft>
-                <a:spcPts val="600"/>
-              </a:spcAft>
-            </a:pPr>
-            <a:r>
-              <a:rPr sz="1200" b="1" i="0">
-                <a:solidFill>
-                  <a:srgbClr val="8A8A8A"/>
-                </a:solidFill>
-                <a:latin typeface="Calibri"/>
-              </a:rPr>
-              <a:t>ACT IV</a:t>
-            </a:r>
-          </a:p>
-          <a:p>
-            <a:pPr algn="l">
-              <a:spcAft>
-                <a:spcPts val="800"/>
-              </a:spcAft>
-            </a:pPr>
-            <a:r>
-              <a:rPr sz="2800" b="1" i="0">
-                <a:solidFill>
-                  <a:srgbClr val="212121"/>
-                </a:solidFill>
-                <a:latin typeface="Calibri"/>
-              </a:rPr>
-              <a:t>What would settle it</a:t>
-            </a:r>
-          </a:p>
-          <a:p>
-            <a:pPr algn="l">
-              <a:spcAft>
-                <a:spcPts val="0"/>
-              </a:spcAft>
-            </a:pPr>
-            <a:r>
-              <a:rPr sz="1400" b="0" i="0">
-                <a:solidFill>
-                  <a:srgbClr val="555555"/>
-                </a:solidFill>
-                <a:latin typeface="Calibri"/>
-              </a:rPr>
-              <a:t>The global aggregate has told us what it can. Three things would decide the question — and two of them require leaving the world level.</a:t>
-            </a:r>
-          </a:p>
-        </p:txBody>
-      </p:sp>
-      <p:sp>
-        <p:nvSpPr>
-          <p:cNvPr id="3" name="TextBox 2"/>
-          <p:cNvSpPr txBox="1"/>
-          <p:nvPr/>
-        </p:nvSpPr>
-        <p:spPr>
-          <a:xfrm>
-            <a:off x="822960" y="4297680"/>
-            <a:ext cx="3474720" cy="1828800"/>
-          </a:xfrm>
-          <a:prstGeom prst="rect">
-            <a:avLst/>
-          </a:prstGeom>
-          <a:noFill/>
-        </p:spPr>
-        <p:txBody>
-          <a:bodyPr wrap="square">
-            <a:spAutoFit/>
-          </a:bodyPr>
-          <a:lstStyle/>
-          <a:p>
-            <a:pPr algn="l">
-              <a:spcAft>
-                <a:spcPts val="200"/>
-              </a:spcAft>
-            </a:pPr>
-            <a:r>
-              <a:rPr sz="2800" b="1" i="0">
-                <a:solidFill>
-                  <a:srgbClr val="1B7837"/>
-                </a:solidFill>
-                <a:latin typeface="Calibri"/>
-              </a:rPr>
-              <a:t>Paris + 20</a:t>
-            </a:r>
-          </a:p>
-          <a:p>
-            <a:pPr algn="l">
-              <a:spcAft>
-                <a:spcPts val="0"/>
-              </a:spcAft>
-            </a:pPr>
-            <a:r>
-              <a:rPr sz="1250" b="0" i="0">
-                <a:solidFill>
-                  <a:srgbClr val="555555"/>
-                </a:solidFill>
-                <a:latin typeface="Calibri"/>
-              </a:rPr>
-              <a:t>when a modest effect first becomes detectable in this series</a:t>
-            </a:r>
-          </a:p>
-        </p:txBody>
-      </p:sp>
-      <p:sp>
-        <p:nvSpPr>
-          <p:cNvPr id="4" name="TextBox 3"/>
-          <p:cNvSpPr txBox="1"/>
-          <p:nvPr/>
-        </p:nvSpPr>
-        <p:spPr>
-          <a:xfrm>
-            <a:off x="4434840" y="4297680"/>
-            <a:ext cx="3474720" cy="1828800"/>
-          </a:xfrm>
-          <a:prstGeom prst="rect">
-            <a:avLst/>
-          </a:prstGeom>
-          <a:noFill/>
-        </p:spPr>
-        <p:txBody>
-          <a:bodyPr wrap="square">
-            <a:spAutoFit/>
-          </a:bodyPr>
-          <a:lstStyle/>
-          <a:p>
-            <a:pPr algn="l">
-              <a:spcAft>
-                <a:spcPts val="200"/>
-              </a:spcAft>
-            </a:pPr>
-            <a:r>
-              <a:rPr sz="2800" b="1" i="0">
-                <a:solidFill>
-                  <a:srgbClr val="1B7837"/>
-                </a:solidFill>
-                <a:latin typeface="Calibri"/>
-              </a:rPr>
-              <a:t>both doors</a:t>
-            </a:r>
-          </a:p>
-          <a:p>
-            <a:pPr algn="l">
-              <a:spcAft>
-                <a:spcPts val="0"/>
-              </a:spcAft>
-            </a:pPr>
-            <a:r>
-              <a:rPr sz="1250" b="0" i="0">
-                <a:solidFill>
-                  <a:srgbClr val="555555"/>
-                </a:solidFill>
-                <a:latin typeface="Calibri"/>
-              </a:rPr>
-              <a:t>a demand-side acceleration is harder to attribute to cheap solar</a:t>
-            </a:r>
-          </a:p>
-        </p:txBody>
-      </p:sp>
-      <p:sp>
-        <p:nvSpPr>
-          <p:cNvPr id="5" name="TextBox 4"/>
-          <p:cNvSpPr txBox="1"/>
-          <p:nvPr/>
-        </p:nvSpPr>
-        <p:spPr>
-          <a:xfrm>
-            <a:off x="8046720" y="4297680"/>
-            <a:ext cx="3474720" cy="1828800"/>
-          </a:xfrm>
-          <a:prstGeom prst="rect">
-            <a:avLst/>
-          </a:prstGeom>
-          <a:noFill/>
-        </p:spPr>
-        <p:txBody>
-          <a:bodyPr wrap="square">
-            <a:spAutoFit/>
-          </a:bodyPr>
-          <a:lstStyle/>
-          <a:p>
-            <a:pPr algn="l">
-              <a:spcAft>
-                <a:spcPts val="200"/>
-              </a:spcAft>
-            </a:pPr>
-            <a:r>
-              <a:rPr sz="2800" b="1" i="0">
-                <a:solidFill>
-                  <a:srgbClr val="1B7837"/>
-                </a:solidFill>
-                <a:latin typeface="Calibri"/>
-              </a:rPr>
-              <a:t>country by country</a:t>
-            </a:r>
-          </a:p>
-          <a:p>
-            <a:pPr algn="l">
-              <a:spcAft>
-                <a:spcPts val="0"/>
-              </a:spcAft>
-            </a:pPr>
-            <a:r>
-              <a:rPr sz="1250" b="0" i="0">
-                <a:solidFill>
-                  <a:srgbClr val="555555"/>
-                </a:solidFill>
-                <a:latin typeface="Calibri"/>
-              </a:rPr>
-              <a:t>where placebo tests have the power the aggregate lacks</a:t>
-            </a:r>
-          </a:p>
-        </p:txBody>
-      </p:sp>
-    </p:spTree>
-  </p:cSld>
-  <p:clrMapOvr>
-    <a:masterClrMapping/>
-  </p:clrMapOvr>
-</p:sld>
-</file>
-
-<file path=ppt/slides/slide17.xml><?xml version="1.0" encoding="utf-8"?>
-<p:sld xmlns:a="http://schemas.openxmlformats.org/drawingml/2006/main" xmlns:p="http://schemas.openxmlformats.org/presentationml/2006/main" xmlns:r="http://schemas.openxmlformats.org/officeDocument/2006/relationships">
-  <p:cSld>
-    <p:spTree>
-      <p:nvGrpSpPr>
-        <p:cNvPr id="1" name=""/>
-        <p:cNvGrpSpPr/>
-        <p:nvPr/>
-      </p:nvGrpSpPr>
-      <p:grpSpPr/>
-      <p:sp>
-        <p:nvSpPr>
-          <p:cNvPr id="2" name="TextBox 1"/>
-          <p:cNvSpPr txBox="1"/>
-          <p:nvPr/>
-        </p:nvSpPr>
-        <p:spPr>
-          <a:xfrm>
-            <a:off x="502920" y="274320"/>
-            <a:ext cx="11201400" cy="914400"/>
-          </a:xfrm>
-          <a:prstGeom prst="rect">
-            <a:avLst/>
-          </a:prstGeom>
-          <a:noFill/>
-        </p:spPr>
-        <p:txBody>
-          <a:bodyPr wrap="square">
-            <a:spAutoFit/>
-          </a:bodyPr>
-          <a:lstStyle/>
-          <a:p>
-            <a:pPr algn="l">
-              <a:spcAft>
-                <a:spcPts val="200"/>
-              </a:spcAft>
-            </a:pPr>
-            <a:r>
-              <a:rPr sz="1200" b="1" i="0">
-                <a:solidFill>
-                  <a:srgbClr val="1B7837"/>
-                </a:solidFill>
-                <a:latin typeface="Calibri"/>
-              </a:rPr>
-              <a:t>THE ASK</a:t>
-            </a:r>
-          </a:p>
-          <a:p>
-            <a:pPr algn="l">
-              <a:spcAft>
-                <a:spcPts val="0"/>
-              </a:spcAft>
-            </a:pPr>
-            <a:r>
-              <a:rPr sz="2400" b="1" i="0">
-                <a:solidFill>
-                  <a:srgbClr val="212121"/>
-                </a:solidFill>
-                <a:latin typeface="Calibri"/>
-              </a:rPr>
-              <a:t>Judge the regime where its signal must appear</a:t>
-            </a:r>
-          </a:p>
-        </p:txBody>
-      </p:sp>
-      <p:sp>
-        <p:nvSpPr>
-          <p:cNvPr id="3" name="TextBox 2"/>
-          <p:cNvSpPr txBox="1"/>
-          <p:nvPr/>
-        </p:nvSpPr>
-        <p:spPr>
-          <a:xfrm>
-            <a:off x="502920" y="1508760"/>
-            <a:ext cx="10881360" cy="4572000"/>
-          </a:xfrm>
-          <a:prstGeom prst="rect">
-            <a:avLst/>
-          </a:prstGeom>
-          <a:noFill/>
-        </p:spPr>
-        <p:txBody>
-          <a:bodyPr wrap="square">
-            <a:spAutoFit/>
-          </a:bodyPr>
-          <a:lstStyle/>
-          <a:p>
-            <a:pPr algn="l">
-              <a:spcAft>
-                <a:spcPts val="1200"/>
-              </a:spcAft>
-            </a:pPr>
-            <a:r>
-              <a:rPr sz="1500" b="0" i="0">
-                <a:solidFill>
-                  <a:srgbClr val="555555"/>
-                </a:solidFill>
-                <a:latin typeface="Calibri"/>
-              </a:rPr>
-              <a:t>If the argument holds, the right test of a climate agreement is not whether emissions charts bend at signing ceremonies. Emissions are the last thing to move. The test is whether intensity slopes accelerate, in the supply door first, at a date that beats its own neighbours — and that test needs to be run where it has power.</a:t>
-            </a:r>
-          </a:p>
-          <a:p>
-            <a:pPr algn="l">
-              <a:spcAft>
-                <a:spcPts val="1200"/>
-              </a:spcAft>
-            </a:pPr>
-            <a:r>
-              <a:rPr sz="1500" b="0" i="0">
-                <a:solidFill>
-                  <a:srgbClr val="555555"/>
-                </a:solidFill>
-                <a:latin typeface="Calibri"/>
-              </a:rPr>
-              <a:t>Three things would decide this. Time: at current noise levels, an effect half the size of what we observe becomes visible in this series around 2030, so Paris+20 is a genuine decision point rather than a rhetorical one. Pathway: the demand-side acceleration is the more informative half, because it is much harder to attribute to falling solar costs than the fuel-mix acceleration is. And disaggregation: the same placebo discipline, applied country by country, has the statistical power and the documentary record that the global aggregate lacks — which is where this work goes next.</a:t>
-            </a:r>
-          </a:p>
-          <a:p>
-            <a:pPr algn="l">
-              <a:spcAft>
-                <a:spcPts val="0"/>
-              </a:spcAft>
-            </a:pPr>
-            <a:r>
-              <a:rPr sz="1500" b="1" i="0">
-                <a:solidFill>
-                  <a:srgbClr val="212121"/>
-                </a:solidFill>
-                <a:latin typeface="Calibri"/>
-              </a:rPr>
-              <a:t>The question we would put to the field: should treaty assessment be built on intensity breakpoints and placebo discipline, rather than on emissions levels and anniversaries?</a:t>
-            </a:r>
-          </a:p>
-        </p:txBody>
-      </p:sp>
-    </p:spTree>
-  </p:cSld>
-  <p:clrMapOvr>
-    <a:masterClrMapping/>
-  </p:clrMapOvr>
-</p:sld>
-</file>
-
-<file path=ppt/slides/slide18.xml><?xml version="1.0" encoding="utf-8"?>
-<p:sld xmlns:a="http://schemas.openxmlformats.org/drawingml/2006/main" xmlns:p="http://schemas.openxmlformats.org/presentationml/2006/main" xmlns:r="http://schemas.openxmlformats.org/officeDocument/2006/relationships">
-  <p:cSld>
-    <p:spTree>
-      <p:nvGrpSpPr>
-        <p:cNvPr id="1" name=""/>
-        <p:cNvGrpSpPr/>
-        <p:nvPr/>
-      </p:nvGrpSpPr>
-      <p:grpSpPr/>
-      <p:sp>
-        <p:nvSpPr>
-          <p:cNvPr id="2" name="TextBox 1"/>
-          <p:cNvSpPr txBox="1"/>
-          <p:nvPr/>
-        </p:nvSpPr>
-        <p:spPr>
-          <a:xfrm>
-            <a:off x="502920" y="274320"/>
-            <a:ext cx="11201400" cy="914400"/>
-          </a:xfrm>
-          <a:prstGeom prst="rect">
-            <a:avLst/>
-          </a:prstGeom>
-          <a:noFill/>
-        </p:spPr>
-        <p:txBody>
-          <a:bodyPr wrap="square">
-            <a:spAutoFit/>
-          </a:bodyPr>
-          <a:lstStyle/>
-          <a:p>
-            <a:pPr algn="l">
-              <a:spcAft>
-                <a:spcPts val="200"/>
-              </a:spcAft>
-            </a:pPr>
-            <a:r>
-              <a:rPr sz="1200" b="1" i="0">
-                <a:solidFill>
-                  <a:srgbClr val="B33A3A"/>
-                </a:solidFill>
-                <a:latin typeface="Calibri"/>
-              </a:rPr>
-              <a:t>THE LIMITS</a:t>
-            </a:r>
-          </a:p>
-          <a:p>
-            <a:pPr algn="l">
-              <a:spcAft>
-                <a:spcPts val="0"/>
-              </a:spcAft>
-            </a:pPr>
-            <a:r>
-              <a:rPr sz="2400" b="1" i="0">
-                <a:solidFill>
-                  <a:srgbClr val="212121"/>
-                </a:solidFill>
-                <a:latin typeface="Calibri"/>
-              </a:rPr>
-              <a:t>What this design supports, and what it refuses to claim</a:t>
-            </a:r>
-          </a:p>
-        </p:txBody>
-      </p:sp>
-      <p:sp>
-        <p:nvSpPr>
-          <p:cNvPr id="3" name="TextBox 2"/>
-          <p:cNvSpPr txBox="1"/>
-          <p:nvPr/>
-        </p:nvSpPr>
-        <p:spPr>
-          <a:xfrm>
-            <a:off x="502920" y="1417320"/>
-            <a:ext cx="5394960" cy="2423160"/>
-          </a:xfrm>
-          <a:prstGeom prst="rect">
-            <a:avLst/>
-          </a:prstGeom>
-          <a:noFill/>
-        </p:spPr>
-        <p:txBody>
-          <a:bodyPr wrap="square">
-            <a:spAutoFit/>
-          </a:bodyPr>
-          <a:lstStyle/>
-          <a:p>
-            <a:pPr algn="l">
-              <a:spcAft>
-                <a:spcPts val="400"/>
-              </a:spcAft>
-            </a:pPr>
-            <a:r>
-              <a:rPr sz="1450" b="1" i="0">
-                <a:solidFill>
-                  <a:srgbClr val="212121"/>
-                </a:solidFill>
-                <a:latin typeface="Calibri"/>
-              </a:rPr>
-              <a:t>Composition and coverage</a:t>
-            </a:r>
-          </a:p>
-          <a:p>
-            <a:pPr algn="l">
-              <a:spcAft>
-                <a:spcPts val="0"/>
-              </a:spcAft>
-            </a:pPr>
-            <a:r>
-              <a:rPr sz="1200" b="0" i="0">
-                <a:solidFill>
-                  <a:srgbClr val="555555"/>
-                </a:solidFill>
-                <a:latin typeface="Calibri"/>
-              </a:rPr>
-              <a:t>Results are reported on a 58-country constant panel covering 87% of global CO2, not on all reporting countries. That excludes most of Africa and many small states, and it ends in 2021 because 2022-23 reporting is incomplete. The choice is defensible but it is a choice, and the naive alternative gives materially weaker estimates.</a:t>
-            </a:r>
-          </a:p>
-        </p:txBody>
-      </p:sp>
-      <p:sp>
-        <p:nvSpPr>
-          <p:cNvPr id="4" name="TextBox 3"/>
-          <p:cNvSpPr txBox="1"/>
-          <p:nvPr/>
-        </p:nvSpPr>
-        <p:spPr>
-          <a:xfrm>
-            <a:off x="6400800" y="1417320"/>
-            <a:ext cx="5394960" cy="2423160"/>
-          </a:xfrm>
-          <a:prstGeom prst="rect">
-            <a:avLst/>
-          </a:prstGeom>
-          <a:noFill/>
-        </p:spPr>
-        <p:txBody>
-          <a:bodyPr wrap="square">
-            <a:spAutoFit/>
-          </a:bodyPr>
-          <a:lstStyle/>
-          <a:p>
-            <a:pPr algn="l">
-              <a:spcAft>
-                <a:spcPts val="400"/>
-              </a:spcAft>
-            </a:pPr>
-            <a:r>
-              <a:rPr sz="1450" b="1" i="0">
-                <a:solidFill>
-                  <a:srgbClr val="212121"/>
-                </a:solidFill>
-                <a:latin typeface="Calibri"/>
-              </a:rPr>
-              <a:t>Rival explanations</a:t>
-            </a:r>
-          </a:p>
-          <a:p>
-            <a:pPr algn="l">
-              <a:spcAft>
-                <a:spcPts val="0"/>
-              </a:spcAft>
-            </a:pPr>
-            <a:r>
-              <a:rPr sz="1200" b="0" i="0">
-                <a:solidFill>
-                  <a:srgbClr val="555555"/>
-                </a:solidFill>
-                <a:latin typeface="Calibri"/>
-              </a:rPr>
-              <a:t>The post-2012 acceleration coincides with the collapse in solar and battery costs, the post-crisis slowdown in Chinese heavy industry, and coal-to-gas substitution in several large economies. The global series cannot separate these from treaty effects, and we do not claim it can.</a:t>
-            </a:r>
-          </a:p>
-        </p:txBody>
-      </p:sp>
-      <p:sp>
-        <p:nvSpPr>
-          <p:cNvPr id="5" name="TextBox 4"/>
-          <p:cNvSpPr txBox="1"/>
-          <p:nvPr/>
-        </p:nvSpPr>
-        <p:spPr>
-          <a:xfrm>
-            <a:off x="502920" y="3931920"/>
-            <a:ext cx="5394960" cy="2423160"/>
-          </a:xfrm>
-          <a:prstGeom prst="rect">
-            <a:avLst/>
-          </a:prstGeom>
-          <a:noFill/>
-        </p:spPr>
-        <p:txBody>
-          <a:bodyPr wrap="square">
-            <a:spAutoFit/>
-          </a:bodyPr>
-          <a:lstStyle/>
-          <a:p>
-            <a:pPr algn="l">
-              <a:spcAft>
-                <a:spcPts val="400"/>
-              </a:spcAft>
-            </a:pPr>
-            <a:r>
-              <a:rPr sz="1450" b="1" i="0">
-                <a:solidFill>
-                  <a:srgbClr val="212121"/>
-                </a:solidFill>
-                <a:latin typeface="Calibri"/>
-              </a:rPr>
-              <a:t>What a breakpoint is</a:t>
-            </a:r>
-          </a:p>
-          <a:p>
-            <a:pPr algn="l">
-              <a:spcAft>
-                <a:spcPts val="0"/>
-              </a:spcAft>
-            </a:pPr>
-            <a:r>
-              <a:rPr sz="1200" b="0" i="0">
-                <a:solidFill>
-                  <a:srgbClr val="555555"/>
-                </a:solidFill>
-                <a:latin typeface="Calibri"/>
-              </a:rPr>
-              <a:t>A breakpoint identifies when a trend changed, never why. Even a perfect fit at 2015 would be a coincidence of timing, not a causal estimate. And a treaty that prevented backsliding would produce no break at all — absence of a break is not absence of an effect.</a:t>
-            </a:r>
-          </a:p>
-        </p:txBody>
-      </p:sp>
-      <p:sp>
-        <p:nvSpPr>
-          <p:cNvPr id="6" name="TextBox 5"/>
-          <p:cNvSpPr txBox="1"/>
-          <p:nvPr/>
-        </p:nvSpPr>
-        <p:spPr>
-          <a:xfrm>
-            <a:off x="6400800" y="3931920"/>
-            <a:ext cx="5394960" cy="2423160"/>
-          </a:xfrm>
-          <a:prstGeom prst="rect">
-            <a:avLst/>
-          </a:prstGeom>
-          <a:noFill/>
-        </p:spPr>
-        <p:txBody>
-          <a:bodyPr wrap="square">
-            <a:spAutoFit/>
-          </a:bodyPr>
-          <a:lstStyle/>
-          <a:p>
-            <a:pPr algn="l">
-              <a:spcAft>
-                <a:spcPts val="400"/>
-              </a:spcAft>
-            </a:pPr>
-            <a:r>
-              <a:rPr sz="1450" b="1" i="0">
-                <a:solidFill>
-                  <a:srgbClr val="212121"/>
-                </a:solidFill>
-                <a:latin typeface="Calibri"/>
-              </a:rPr>
-              <a:t>Window sensitivity</a:t>
-            </a:r>
-          </a:p>
-          <a:p>
-            <a:pPr algn="l">
-              <a:spcAft>
-                <a:spcPts val="0"/>
-              </a:spcAft>
-            </a:pPr>
-            <a:r>
-              <a:rPr sz="1200" b="0" i="0">
-                <a:solidFill>
-                  <a:srgbClr val="555555"/>
-                </a:solidFill>
-                <a:latin typeface="Calibri"/>
-              </a:rPr>
-              <a:t>Paris's standing depends on the comparison window: it sits at the 97th percentile of candidate years on a 1980-start series and the 79th on a 1990-start one for overall intensity, though it holds above the 95th for the fuel mix in both. We report both rather than choosing the flattering one.</a:t>
-            </a:r>
-          </a:p>
-        </p:txBody>
-      </p:sp>
-    </p:spTree>
-  </p:cSld>
-  <p:clrMapOvr>
-    <a:masterClrMapping/>
-  </p:clrMapOvr>
-</p:sld>
-</file>
-
-<file path=ppt/slides/slide19.xml><?xml version="1.0" encoding="utf-8"?>
-<p:sld xmlns:a="http://schemas.openxmlformats.org/drawingml/2006/main" xmlns:p="http://schemas.openxmlformats.org/presentationml/2006/main" xmlns:r="http://schemas.openxmlformats.org/officeDocument/2006/relationships">
-  <p:cSld>
-    <p:spTree>
-      <p:nvGrpSpPr>
-        <p:cNvPr id="1" name=""/>
-        <p:cNvGrpSpPr/>
-        <p:nvPr/>
-      </p:nvGrpSpPr>
-      <p:grpSpPr/>
-      <p:sp>
-        <p:nvSpPr>
-          <p:cNvPr id="2" name="TextBox 1"/>
-          <p:cNvSpPr txBox="1"/>
-          <p:nvPr/>
-        </p:nvSpPr>
-        <p:spPr>
-          <a:xfrm>
-            <a:off x="502920" y="274320"/>
-            <a:ext cx="11201400" cy="914400"/>
-          </a:xfrm>
-          <a:prstGeom prst="rect">
-            <a:avLst/>
-          </a:prstGeom>
-          <a:noFill/>
-        </p:spPr>
-        <p:txBody>
-          <a:bodyPr wrap="square">
-            <a:spAutoFit/>
-          </a:bodyPr>
-          <a:lstStyle/>
-          <a:p>
-            <a:pPr algn="l">
-              <a:spcAft>
-                <a:spcPts val="200"/>
-              </a:spcAft>
-            </a:pPr>
-            <a:r>
-              <a:rPr sz="1200" b="1" i="0">
-                <a:solidFill>
-                  <a:srgbClr val="1B7837"/>
-                </a:solidFill>
-                <a:latin typeface="Calibri"/>
-              </a:rPr>
-              <a:t>WHAT'S NEXT</a:t>
-            </a:r>
-          </a:p>
-          <a:p>
-            <a:pPr algn="l">
-              <a:spcAft>
-                <a:spcPts val="0"/>
-              </a:spcAft>
-            </a:pPr>
-            <a:r>
-              <a:rPr sz="2400" b="1" i="0">
-                <a:solidFill>
-                  <a:srgbClr val="212121"/>
-                </a:solidFill>
-                <a:latin typeface="Calibri"/>
-              </a:rPr>
-              <a:t>The same discipline, where it has power</a:t>
-            </a:r>
-          </a:p>
-        </p:txBody>
-      </p:sp>
-      <p:sp>
-        <p:nvSpPr>
-          <p:cNvPr id="3" name="TextBox 2"/>
-          <p:cNvSpPr txBox="1"/>
-          <p:nvPr/>
-        </p:nvSpPr>
-        <p:spPr>
-          <a:xfrm>
-            <a:off x="502920" y="1554480"/>
-            <a:ext cx="10881360" cy="4206240"/>
-          </a:xfrm>
-          <a:prstGeom prst="rect">
-            <a:avLst/>
-          </a:prstGeom>
-          <a:noFill/>
-        </p:spPr>
-        <p:txBody>
-          <a:bodyPr wrap="square">
-            <a:spAutoFit/>
-          </a:bodyPr>
-          <a:lstStyle/>
-          <a:p>
-            <a:pPr algn="l">
-              <a:spcAft>
-                <a:spcPts val="1200"/>
-              </a:spcAft>
-            </a:pPr>
-            <a:r>
-              <a:rPr sz="1500" b="0" i="0">
-                <a:solidFill>
-                  <a:srgbClr val="555555"/>
-                </a:solidFill>
-                <a:latin typeface="Calibri"/>
-              </a:rPr>
-              <a:t>The global aggregate is the wrong instrument for treaty attribution, and this paper's own results explain why: eight to ten post-treaty observations, an onset plateau spanning the treaty year, and rival explanations moving on the same schedule. Paris was designed to work through national pledges and national transformation, so its signature should appear country by country — where the series are longer, the placebo tests are independent, and a documentary record exists to say what accompanied each bend.</a:t>
-            </a:r>
-          </a:p>
-          <a:p>
-            <a:pPr algn="l">
-              <a:spcAft>
-                <a:spcPts val="1200"/>
-              </a:spcAft>
-            </a:pPr>
-            <a:r>
-              <a:rPr sz="1500" b="0" i="0">
-                <a:solidFill>
-                  <a:srgbClr val="555555"/>
-                </a:solidFill>
-                <a:latin typeface="Calibri"/>
-              </a:rPr>
-              <a:t>That is the companion paper: the same breakpoint and placebo machinery applied to every country with adequate data, with historically coded mechanisms and a transition-quality framework that separates genuine decarbonization from recession, disruption, and offshoring.</a:t>
-            </a:r>
-          </a:p>
-          <a:p>
-            <a:pPr>
-              <a:spcAft>
-                <a:spcPts val="600"/>
-              </a:spcAft>
-            </a:pPr>
-            <a:r>
-              <a:rPr sz="1500" b="1" i="0">
-                <a:solidFill>
-                  <a:srgbClr val="212121"/>
-                </a:solidFill>
-                <a:latin typeface="Calibri"/>
-              </a:rPr>
-              <a:t>This paper establishes the puzzle at the global level. The national paper is where it gets resolved.</a:t>
+              <a:t>Turning points say when · the Kaya split says through which door · placebo tests say whether the date is special</a:t>
             </a:r>
           </a:p>
         </p:txBody>
@@ -7075,7 +4870,7 @@
                 </a:solidFill>
                 <a:latin typeface="Calibri"/>
               </a:rPr>
-              <a:t>THE SETUP</a:t>
+              <a:t>THE QUESTION</a:t>
             </a:r>
           </a:p>
           <a:p>
@@ -7091,7 +4886,7 @@
                 </a:solidFill>
                 <a:latin typeface="Calibri"/>
               </a:rPr>
-              <a:t>Emissions growth has nearly stopped. Can we say Paris is why?</a:t>
+              <a:t>Something changed after Paris. Was it Paris?</a:t>
             </a:r>
           </a:p>
         </p:txBody>
@@ -7104,8 +4899,8 @@
         </p:nvSpPr>
         <p:spPr>
           <a:xfrm>
-            <a:off x="502920" y="1417320"/>
-            <a:ext cx="6720840" cy="5029200"/>
+            <a:off x="502920" y="1463040"/>
+            <a:ext cx="6766560" cy="4937760"/>
           </a:xfrm>
           <a:prstGeom prst="rect">
             <a:avLst/>
@@ -7120,33 +4915,33 @@
           <a:p>
             <a:pPr algn="l">
               <a:spcAft>
-                <a:spcPts val="1200"/>
+                <a:spcPts val="1400"/>
               </a:spcAft>
             </a:pPr>
             <a:r>
-              <a:rPr sz="1400" b="0" i="0">
+              <a:rPr sz="1500" b="0" i="0">
                 <a:solidFill>
                   <a:srgbClr val="555555"/>
                 </a:solidFill>
                 <a:latin typeface="Calibri"/>
               </a:rPr>
-              <a:t>The good news is real. Worst-case scenarios have moved off the table, and CO2 growth across the countries we can track consistently fell from +2.5% per year over the Rio-to-Paris quarter century to +0.7% per year since 2015. On a constant country set, carbon intensity is now falling at -2.2% a year: the fastest sustained decarbonization anywhere in the record.</a:t>
+              <a:t>The good news is real. Across essentially every country that reports, CO2 growth fell from +2.1% a year over the Rio-to-Paris quarter century to +0.7% a year since. Worst-case scenarios have moved off the table.</a:t>
             </a:r>
           </a:p>
           <a:p>
             <a:pPr algn="l">
               <a:spcAft>
-                <a:spcPts val="1200"/>
+                <a:spcPts val="1400"/>
               </a:spcAft>
             </a:pPr>
             <a:r>
-              <a:rPr sz="1400" b="0" i="0">
+              <a:rPr sz="1500" b="0" i="0">
                 <a:solidFill>
                   <a:srgbClr val="555555"/>
                 </a:solidFill>
                 <a:latin typeface="Calibri"/>
               </a:rPr>
-              <a:t>But there is an obvious way to over-read that success — to attribute it to the agreement whose anniversary it coincides with. Carbon intensity has been falling for fifty years, in episodes with their own causes. So the question is narrow and awkward: can the global record distinguish a Paris effect from an acceleration already under way when the treaty was signed?</a:t>
+              <a:t>But the obvious reading — that the agreement did it — is exactly the reading the data is worst at supporting. Carbon intensity has been falling for fifty years. Renewable costs collapsed on almost the same schedule as the treaty. And a slowdown in emissions can come simply from a slowdown in the economy.</a:t>
             </a:r>
           </a:p>
           <a:p>
@@ -7156,13 +4951,13 @@
               </a:spcAft>
             </a:pPr>
             <a:r>
-              <a:rPr sz="1400" b="0" i="0">
+              <a:rPr sz="1500" b="1" i="0">
                 <a:solidFill>
                   <a:srgbClr val="212121"/>
                 </a:solidFill>
                 <a:latin typeface="Calibri"/>
               </a:rPr>
-              <a:t>We do not assume treaty years are turning points. We let the data choose the year, then ask how much better that year is than its neighbours — and hold Paris to the standard we would hold any other date.</a:t>
+              <a:t>So we ask a narrow question: what actually changed after 2015, and is 2015 a special year in the record — or just a year that happens to sit near one?</a:t>
             </a:r>
           </a:p>
         </p:txBody>
@@ -7175,8 +4970,8 @@
         </p:nvSpPr>
         <p:spPr>
           <a:xfrm>
-            <a:off x="7543800" y="1417320"/>
-            <a:ext cx="4160520" cy="5029200"/>
+            <a:off x="7635240" y="1463040"/>
+            <a:ext cx="4069080" cy="4937760"/>
           </a:xfrm>
           <a:prstGeom prst="rect">
             <a:avLst/>
@@ -7201,23 +4996,39 @@
                 </a:solidFill>
                 <a:latin typeface="Calibri"/>
               </a:rPr>
-              <a:t>Why intensity, not emissions</a:t>
+              <a:t>Why we look at intensity</a:t>
             </a:r>
           </a:p>
           <a:p>
             <a:pPr algn="l">
               <a:spcAft>
-                <a:spcPts val="1000"/>
+                <a:spcPts val="600"/>
               </a:spcAft>
             </a:pPr>
             <a:r>
-              <a:rPr sz="1300" b="0" i="0">
+              <a:rPr sz="1350" b="0" i="0">
                 <a:solidFill>
                   <a:srgbClr val="555555"/>
                 </a:solidFill>
                 <a:latin typeface="Calibri"/>
               </a:rPr>
-              <a:t>Emissions arithmetic has three moving parts: economic growth, the fuel mix, and energy per unit of output. Growth pushes emissions up; the two intensity terms are the only levers that push them down.</a:t>
+              <a:t>Emissions have three moving parts:</a:t>
+            </a:r>
+          </a:p>
+          <a:p>
+            <a:pPr algn="l">
+              <a:spcAft>
+                <a:spcPts val="800"/>
+              </a:spcAft>
+            </a:pPr>
+            <a:r>
+              <a:rPr sz="1350" b="1" i="0">
+                <a:solidFill>
+                  <a:srgbClr val="212121"/>
+                </a:solidFill>
+                <a:latin typeface="Calibri"/>
+              </a:rPr>
+              <a:t>economic growth  +  fuel mix  +  energy efficiency</a:t>
             </a:r>
           </a:p>
           <a:p>
@@ -7227,249 +5038,13 @@
               </a:spcAft>
             </a:pPr>
             <a:r>
-              <a:rPr sz="1300" b="0" i="0">
-                <a:solidFill>
-                  <a:srgbClr val="212121"/>
-                </a:solidFill>
-                <a:latin typeface="Calibri"/>
-              </a:rPr>
-              <a:t>So intensity is the leading indicator. A policy signal must appear in the intensity slopes before it can appear in emissions at all — and unless intensity improves faster than the economy grows, emissions cannot stabilize.</a:t>
-            </a:r>
-          </a:p>
-        </p:txBody>
-      </p:sp>
-    </p:spTree>
-  </p:cSld>
-  <p:clrMapOvr>
-    <a:masterClrMapping/>
-  </p:clrMapOvr>
-</p:sld>
-</file>
-
-<file path=ppt/slides/slide20.xml><?xml version="1.0" encoding="utf-8"?>
-<p:sld xmlns:a="http://schemas.openxmlformats.org/drawingml/2006/main" xmlns:p="http://schemas.openxmlformats.org/presentationml/2006/main" xmlns:r="http://schemas.openxmlformats.org/officeDocument/2006/relationships">
-  <p:cSld>
-    <p:spTree>
-      <p:nvGrpSpPr>
-        <p:cNvPr id="1" name=""/>
-        <p:cNvGrpSpPr/>
-        <p:nvPr/>
-      </p:nvGrpSpPr>
-      <p:grpSpPr/>
-      <p:sp>
-        <p:nvSpPr>
-          <p:cNvPr id="2" name="TextBox 1"/>
-          <p:cNvSpPr txBox="1"/>
-          <p:nvPr/>
-        </p:nvSpPr>
-        <p:spPr>
-          <a:xfrm>
-            <a:off x="822960" y="1371600"/>
-            <a:ext cx="10515600" cy="1828800"/>
-          </a:xfrm>
-          <a:prstGeom prst="rect">
-            <a:avLst/>
-          </a:prstGeom>
-          <a:noFill/>
-        </p:spPr>
-        <p:txBody>
-          <a:bodyPr wrap="square">
-            <a:spAutoFit/>
-          </a:bodyPr>
-          <a:lstStyle/>
-          <a:p>
-            <a:pPr algn="l">
-              <a:spcAft>
-                <a:spcPts val="200"/>
-              </a:spcAft>
-            </a:pPr>
-            <a:r>
-              <a:rPr sz="2700" b="1" i="0">
-                <a:solidFill>
-                  <a:srgbClr val="212121"/>
-                </a:solidFill>
-                <a:latin typeface="Calibri"/>
-              </a:rPr>
-              <a:t>The curve is bending faster than ever.</a:t>
-            </a:r>
-          </a:p>
-          <a:p>
-            <a:pPr algn="l">
-              <a:spcAft>
-                <a:spcPts val="0"/>
-              </a:spcAft>
-            </a:pPr>
-            <a:r>
-              <a:rPr sz="2700" b="1" i="0">
-                <a:solidFill>
-                  <a:srgbClr val="1B7837"/>
-                </a:solidFill>
-                <a:latin typeface="Calibri"/>
-              </a:rPr>
-              <a:t>Paris is the first treaty the record cannot dismiss — or confirm.</a:t>
-            </a:r>
-          </a:p>
-        </p:txBody>
-      </p:sp>
-      <p:sp>
-        <p:nvSpPr>
-          <p:cNvPr id="3" name="TextBox 2"/>
-          <p:cNvSpPr txBox="1"/>
-          <p:nvPr/>
-        </p:nvSpPr>
-        <p:spPr>
-          <a:xfrm>
-            <a:off x="822960" y="3291840"/>
-            <a:ext cx="10515600" cy="2651760"/>
-          </a:xfrm>
-          <a:prstGeom prst="rect">
-            <a:avLst/>
-          </a:prstGeom>
-          <a:noFill/>
-        </p:spPr>
-        <p:txBody>
-          <a:bodyPr wrap="square">
-            <a:spAutoFit/>
-          </a:bodyPr>
-          <a:lstStyle/>
-          <a:p/>
-          <a:p>
-            <a:pPr>
-              <a:spcAft>
-                <a:spcPts val="900"/>
-              </a:spcAft>
-            </a:pPr>
-            <a:r>
-              <a:rPr sz="1400" b="1" i="0">
-                <a:solidFill>
-                  <a:srgbClr val="1B7837"/>
-                </a:solidFill>
-                <a:latin typeface="Calibri"/>
-              </a:rPr>
-              <a:t>—  </a:t>
-            </a:r>
-            <a:r>
-              <a:rPr sz="1400" b="0" i="0">
+              <a:rPr sz="1350" b="0" i="0">
                 <a:solidFill>
                   <a:srgbClr val="555555"/>
                 </a:solidFill>
                 <a:latin typeface="Calibri"/>
               </a:rPr>
-              <a:t>Decarbonization stalled through 2002-2012 and then resumed at -2.2% a year, the fastest sustained improvement in the record.</a:t>
-            </a:r>
-          </a:p>
-          <a:p>
-            <a:pPr>
-              <a:spcAft>
-                <a:spcPts val="900"/>
-              </a:spcAft>
-            </a:pPr>
-            <a:r>
-              <a:rPr sz="1400" b="1" i="0">
-                <a:solidFill>
-                  <a:srgbClr val="1B7837"/>
-                </a:solidFill>
-                <a:latin typeface="Calibri"/>
-              </a:rPr>
-              <a:t>—  </a:t>
-            </a:r>
-            <a:r>
-              <a:rPr sz="1400" b="0" i="0">
-                <a:solidFill>
-                  <a:srgbClr val="555555"/>
-                </a:solidFill>
-                <a:latin typeface="Calibri"/>
-              </a:rPr>
-              <a:t>Since 2015 the world has run significantly ahead of its own trend, through both the fuel mix and energy intensity.</a:t>
-            </a:r>
-          </a:p>
-          <a:p>
-            <a:pPr>
-              <a:spcAft>
-                <a:spcPts val="900"/>
-              </a:spcAft>
-            </a:pPr>
-            <a:r>
-              <a:rPr sz="1400" b="1" i="0">
-                <a:solidFill>
-                  <a:srgbClr val="1B7837"/>
-                </a:solidFill>
-                <a:latin typeface="Calibri"/>
-              </a:rPr>
-              <a:t>—  </a:t>
-            </a:r>
-            <a:r>
-              <a:rPr sz="1400" b="0" i="0">
-                <a:solidFill>
-                  <a:srgbClr val="555555"/>
-                </a:solidFill>
-                <a:latin typeface="Calibri"/>
-              </a:rPr>
-              <a:t>Rio sits at the 7th percentile of candidate onset years; Paris sits at the 97th — but the best fit is 2012-2014, and ten years of data cannot resolve two.</a:t>
-            </a:r>
-          </a:p>
-          <a:p>
-            <a:pPr>
-              <a:spcAft>
-                <a:spcPts val="900"/>
-              </a:spcAft>
-            </a:pPr>
-            <a:r>
-              <a:rPr sz="1400" b="1" i="0">
-                <a:solidFill>
-                  <a:srgbClr val="1B7837"/>
-                </a:solidFill>
-                <a:latin typeface="Calibri"/>
-              </a:rPr>
-              <a:t>—  </a:t>
-            </a:r>
-            <a:r>
-              <a:rPr sz="1400" b="0" i="0">
-                <a:solidFill>
-                  <a:srgbClr val="555555"/>
-                </a:solidFill>
-                <a:latin typeface="Calibri"/>
-              </a:rPr>
-              <a:t>Consistent with, and not separable from, the technology shift it helped consolidate — which is why the next test is national.</a:t>
-            </a:r>
-          </a:p>
-        </p:txBody>
-      </p:sp>
-      <p:sp>
-        <p:nvSpPr>
-          <p:cNvPr id="4" name="TextBox 3"/>
-          <p:cNvSpPr txBox="1"/>
-          <p:nvPr/>
-        </p:nvSpPr>
-        <p:spPr>
-          <a:xfrm>
-            <a:off x="822960" y="5989320"/>
-            <a:ext cx="10515600" cy="640080"/>
-          </a:xfrm>
-          <a:prstGeom prst="rect">
-            <a:avLst/>
-          </a:prstGeom>
-          <a:noFill/>
-        </p:spPr>
-        <p:txBody>
-          <a:bodyPr wrap="square">
-            <a:spAutoFit/>
-          </a:bodyPr>
-          <a:lstStyle/>
-          <a:p>
-            <a:pPr algn="ctr">
-              <a:spcAft>
-                <a:spcPts val="600"/>
-              </a:spcAft>
-            </a:pPr>
-            <a:r>
-              <a:rPr sz="1300" b="0" i="1">
-                <a:solidFill>
-                  <a:srgbClr val="8A8A8A"/>
-                </a:solidFill>
-                <a:latin typeface="Calibri"/>
-              </a:rPr>
-              <a:t>Structural breaks say when · Kaya says through which door · placebo discipline says whether the date is special · power says what we could have seen</a:t>
+              <a:t>Growth pushes emissions up. The fuel mix and efficiency are the only two things that push them down — so a policy effect has to show up in one of them before it can show up in emissions at all.</a:t>
             </a:r>
           </a:p>
         </p:txBody>
@@ -7522,11 +5097,11 @@
             <a:r>
               <a:rPr sz="1200" b="1" i="0">
                 <a:solidFill>
-                  <a:srgbClr val="1B7837"/>
-                </a:solidFill>
-                <a:latin typeface="Calibri"/>
-              </a:rPr>
-              <a:t>THE ARGUMENT</a:t>
+                  <a:srgbClr val="3A66A5"/>
+                </a:solidFill>
+                <a:latin typeface="Calibri"/>
+              </a:rPr>
+              <a:t>WHAT WE DID</a:t>
             </a:r>
           </a:p>
           <a:p>
@@ -7542,7 +5117,7 @@
                 </a:solidFill>
                 <a:latin typeface="Calibri"/>
               </a:rPr>
-              <a:t>Four acts</a:t>
+              <a:t>Three steps</a:t>
             </a:r>
           </a:p>
         </p:txBody>
@@ -7556,7 +5131,7 @@
         <p:spPr>
           <a:xfrm>
             <a:off x="502920" y="1554480"/>
-            <a:ext cx="2697480" cy="4389120"/>
+            <a:ext cx="3611880" cy="4480560"/>
           </a:xfrm>
           <a:prstGeom prst="rect">
             <a:avLst/>
@@ -7575,13 +5150,13 @@
               </a:spcAft>
             </a:pPr>
             <a:r>
-              <a:rPr sz="3800" b="1" i="0">
-                <a:solidFill>
-                  <a:srgbClr val="1B7837"/>
-                </a:solidFill>
-                <a:latin typeface="Calibri"/>
-              </a:rPr>
-              <a:t>I</a:t>
+              <a:rPr sz="3400" b="1" i="0">
+                <a:solidFill>
+                  <a:srgbClr val="3A66A5"/>
+                </a:solidFill>
+                <a:latin typeface="Calibri"/>
+              </a:rPr>
+              <a:t>1</a:t>
             </a:r>
           </a:p>
           <a:p>
@@ -7597,7 +5172,7 @@
                 </a:solidFill>
                 <a:latin typeface="Calibri"/>
               </a:rPr>
-              <a:t>What the record looks like</a:t>
+              <a:t>Build a consistent world series</a:t>
             </a:r>
           </a:p>
           <a:p>
@@ -7607,13 +5182,13 @@
               </a:spcAft>
             </a:pPr>
             <a:r>
-              <a:rPr sz="1250" b="0" i="0">
+              <a:rPr sz="1300" b="0" i="0">
                 <a:solidFill>
                   <a:srgbClr val="555555"/>
                 </a:solidFill>
                 <a:latin typeface="Calibri"/>
               </a:rPr>
-              <a:t>Four episodes, not one turning point — and the current one is the fastest. But the world series has to be built carefully before any of it means anything.</a:t>
+              <a:t>Take every country still reporting in 2021 with almost complete data, fill the handful of gaps, and add them up. That is 182 countries and 99.8% of global CO2. We stop at 2021 because most countries have not reported 2022-23 yet.</a:t>
             </a:r>
           </a:p>
         </p:txBody>
@@ -7626,8 +5201,8 @@
         </p:nvSpPr>
         <p:spPr>
           <a:xfrm>
-            <a:off x="3355848" y="1554480"/>
-            <a:ext cx="2697480" cy="4389120"/>
+            <a:off x="4251959" y="1554480"/>
+            <a:ext cx="3611880" cy="4480560"/>
           </a:xfrm>
           <a:prstGeom prst="rect">
             <a:avLst/>
@@ -7646,13 +5221,13 @@
               </a:spcAft>
             </a:pPr>
             <a:r>
-              <a:rPr sz="3800" b="1" i="0">
-                <a:solidFill>
-                  <a:srgbClr val="1B7837"/>
-                </a:solidFill>
-                <a:latin typeface="Calibri"/>
-              </a:rPr>
-              <a:t>II</a:t>
+              <a:rPr sz="3400" b="1" i="0">
+                <a:solidFill>
+                  <a:srgbClr val="3A66A5"/>
+                </a:solidFill>
+                <a:latin typeface="Calibri"/>
+              </a:rPr>
+              <a:t>2</a:t>
             </a:r>
           </a:p>
           <a:p>
@@ -7668,7 +5243,7 @@
                 </a:solidFill>
                 <a:latin typeface="Calibri"/>
               </a:rPr>
-              <a:t>The anniversary test</a:t>
+              <a:t>Let the data pick the turning point</a:t>
             </a:r>
           </a:p>
           <a:p>
@@ -7678,13 +5253,13 @@
               </a:spcAft>
             </a:pPr>
             <a:r>
-              <a:rPr sz="1250" b="0" i="0">
+              <a:rPr sz="1300" b="0" i="0">
                 <a:solidFill>
                   <a:srgbClr val="555555"/>
                 </a:solidFill>
                 <a:latin typeface="Calibri"/>
               </a:rPr>
-              <a:t>Since 2015 intensity has run below its own extrapolated trend, significantly, through both Kaya doors.</a:t>
+              <a:t>Plot each series so a straight line means a steady percentage change per year, then fit two lines meeting at a kink. Try every possible kink year and keep the one that fits best. Nothing about a treaty enters this step.</a:t>
             </a:r>
           </a:p>
         </p:txBody>
@@ -7697,8 +5272,8 @@
         </p:nvSpPr>
         <p:spPr>
           <a:xfrm>
-            <a:off x="6208776" y="1554480"/>
-            <a:ext cx="2697480" cy="4389120"/>
+            <a:off x="8001000" y="1554480"/>
+            <a:ext cx="3611880" cy="4480560"/>
           </a:xfrm>
           <a:prstGeom prst="rect">
             <a:avLst/>
@@ -7717,13 +5292,13 @@
               </a:spcAft>
             </a:pPr>
             <a:r>
-              <a:rPr sz="3800" b="1" i="0">
-                <a:solidFill>
-                  <a:srgbClr val="1B7837"/>
-                </a:solidFill>
-                <a:latin typeface="Calibri"/>
-              </a:rPr>
-              <a:t>III</a:t>
+              <a:rPr sz="3400" b="1" i="0">
+                <a:solidFill>
+                  <a:srgbClr val="3A66A5"/>
+                </a:solidFill>
+                <a:latin typeface="Calibri"/>
+              </a:rPr>
+              <a:t>3</a:t>
             </a:r>
           </a:p>
           <a:p>
@@ -7739,7 +5314,7 @@
                 </a:solidFill>
                 <a:latin typeface="Calibri"/>
               </a:rPr>
-              <a:t>Can the record name the author?</a:t>
+              <a:t>Ask whether the treaty year is special</a:t>
             </a:r>
           </a:p>
           <a:p>
@@ -7749,13 +5324,13 @@
               </a:spcAft>
             </a:pPr>
             <a:r>
-              <a:rPr sz="1250" b="0" i="0">
+              <a:rPr sz="1300" b="0" i="0">
                 <a:solidFill>
                   <a:srgbClr val="555555"/>
                 </a:solidFill>
                 <a:latin typeface="Calibri"/>
               </a:rPr>
-              <a:t>Rio the record dismisses. Paris it cannot — yet the best-fitting onset is still two years early, and the test cannot resolve two years.</a:t>
+              <a:t>A gently curving trend makes almost any year look significant, so significance alone proves nothing. We rank 2015 against every other candidate year. A treaty earns credit only if its year beats the years around it.</a:t>
             </a:r>
           </a:p>
         </p:txBody>
@@ -7768,8 +5343,8 @@
         </p:nvSpPr>
         <p:spPr>
           <a:xfrm>
-            <a:off x="9061704" y="1554480"/>
-            <a:ext cx="2697480" cy="4389120"/>
+            <a:off x="502920" y="5989320"/>
+            <a:ext cx="11201400" cy="548640"/>
           </a:xfrm>
           <a:prstGeom prst="rect">
             <a:avLst/>
@@ -7782,51 +5357,28 @@
           </a:bodyPr>
           <a:lstStyle/>
           <a:p>
-            <a:pPr algn="l">
+            <a:pPr>
               <a:spcAft>
                 <a:spcPts val="600"/>
               </a:spcAft>
             </a:pPr>
             <a:r>
-              <a:rPr sz="3800" b="1" i="0">
-                <a:solidFill>
-                  <a:srgbClr val="1B7837"/>
-                </a:solidFill>
-                <a:latin typeface="Calibri"/>
-              </a:rPr>
-              <a:t>IV</a:t>
-            </a:r>
-          </a:p>
-          <a:p>
-            <a:pPr algn="l">
-              <a:spcAft>
-                <a:spcPts val="800"/>
-              </a:spcAft>
-            </a:pPr>
-            <a:r>
-              <a:rPr sz="1550" b="1" i="0">
+              <a:rPr sz="1350" b="1" i="0">
                 <a:solidFill>
                   <a:srgbClr val="212121"/>
                 </a:solidFill>
                 <a:latin typeface="Calibri"/>
               </a:rPr>
-              <a:t>What would settle it</a:t>
-            </a:r>
-          </a:p>
-          <a:p>
-            <a:pPr algn="l">
-              <a:spcAft>
-                <a:spcPts val="0"/>
-              </a:spcAft>
-            </a:pPr>
-            <a:r>
-              <a:rPr sz="1250" b="0" i="0">
+              <a:t>A turning point tells us when a trend changed — never, by itself, why. </a:t>
+            </a:r>
+            <a:r>
+              <a:rPr sz="1350" b="0" i="0">
                 <a:solidFill>
                   <a:srgbClr val="555555"/>
                 </a:solidFill>
                 <a:latin typeface="Calibri"/>
               </a:rPr>
-              <a:t>The evidence that would decide this by Paris+20 — and why it has to be gathered country by country.</a:t>
+              <a:t>That is the whole method.</a:t>
             </a:r>
           </a:p>
         </p:txBody>
@@ -7883,7 +5435,7 @@
                 </a:solidFill>
                 <a:latin typeface="Calibri"/>
               </a:rPr>
-              <a:t>THE INSTRUMENT</a:t>
+              <a:t>WHAT WE DID · THE DATA</a:t>
             </a:r>
           </a:p>
           <a:p>
@@ -7899,7 +5451,7 @@
                 </a:solidFill>
                 <a:latin typeface="Calibri"/>
               </a:rPr>
-              <a:t>Two straight lines and a kink</a:t>
+              <a:t>We use every country that reports, for as long as it reports</a:t>
             </a:r>
           </a:p>
         </p:txBody>
@@ -7912,8 +5464,8 @@
         </p:nvSpPr>
         <p:spPr>
           <a:xfrm>
-            <a:off x="502920" y="1417320"/>
-            <a:ext cx="5577840" cy="5029200"/>
+            <a:off x="502920" y="1188720"/>
+            <a:ext cx="11201400" cy="457200"/>
           </a:xfrm>
           <a:prstGeom prst="rect">
             <a:avLst/>
@@ -7926,126 +5478,56 @@
           </a:bodyPr>
           <a:lstStyle/>
           <a:p>
-            <a:pPr algn="l">
-              <a:spcAft>
-                <a:spcPts val="1200"/>
-              </a:spcAft>
-            </a:pPr>
-            <a:r>
-              <a:rPr sz="1350" b="0" i="0">
-                <a:solidFill>
-                  <a:srgbClr val="555555"/>
-                </a:solidFill>
-                <a:latin typeface="Calibri"/>
-              </a:rPr>
-              <a:t>Every series is plotted in logs, so a straight line means a steady percentage change per year. We fit two straight lines that meet at a kink, trying every admissible year and keeping the one that fits best. That year is the data's own estimate of when the trend changed, chosen with no reference to any treaty.</a:t>
-            </a:r>
-          </a:p>
-          <a:p>
-            <a:pPr algn="l">
-              <a:spcAft>
-                <a:spcPts val="1200"/>
-              </a:spcAft>
-            </a:pPr>
-            <a:r>
-              <a:rPr sz="1350" b="0" i="0">
-                <a:solidFill>
-                  <a:srgbClr val="555555"/>
-                </a:solidFill>
-                <a:latin typeface="Calibri"/>
-              </a:rPr>
-              <a:t>The date is then stress-tested — re-estimated on reshuffled versions of the series — and, crucially, compared against every nearby year. A break whose year barely moves and clearly beats its neighbours is credible; one that sits on a plateau of equally good years is not, however significant it looks.</a:t>
-            </a:r>
-          </a:p>
-          <a:p>
-            <a:pPr algn="l">
+            <a:pPr>
               <a:spcAft>
                 <a:spcPts val="0"/>
               </a:spcAft>
             </a:pPr>
             <a:r>
-              <a:rPr sz="1050" b="0" i="1">
-                <a:solidFill>
-                  <a:srgbClr val="8A8A8A"/>
-                </a:solidFill>
-                <a:latin typeface="Calibri"/>
-              </a:rPr>
-              <a:t>(Formally: y(t) = a + b·t + d·max(t−k, 0). Autocorrelation-robust standard errors; BIC for model evidence and for how many breaks the record supports.)</a:t>
-            </a:r>
-          </a:p>
-        </p:txBody>
-      </p:sp>
-      <p:sp>
-        <p:nvSpPr>
-          <p:cNvPr id="4" name="TextBox 3"/>
-          <p:cNvSpPr txBox="1"/>
+              <a:rPr sz="1400" b="1" i="0">
+                <a:solidFill>
+                  <a:srgbClr val="3A66A5"/>
+                </a:solidFill>
+                <a:latin typeface="Calibri"/>
+              </a:rPr>
+              <a:t>Takeaway:  </a:t>
+            </a:r>
+            <a:r>
+              <a:rPr sz="1400" b="1" i="0">
+                <a:solidFill>
+                  <a:srgbClr val="212121"/>
+                </a:solidFill>
+                <a:latin typeface="Calibri"/>
+              </a:rPr>
+              <a:t>Near-complete coverage — and the last two years are dropped because most countries have not reported them.</a:t>
+            </a:r>
+          </a:p>
+        </p:txBody>
+      </p:sp>
+      <p:pic>
+        <p:nvPicPr>
+          <p:cNvPr id="4" name="Picture 3" descr="w2_fig5_panel_construction.png"/>
+          <p:cNvPicPr>
+            <a:picLocks noChangeAspect="1"/>
+          </p:cNvPicPr>
           <p:nvPr/>
-        </p:nvSpPr>
+        </p:nvPicPr>
+        <p:blipFill>
+          <a:blip r:embed="rId2"/>
+          <a:stretch>
+            <a:fillRect/>
+          </a:stretch>
+        </p:blipFill>
         <p:spPr>
           <a:xfrm>
-            <a:off x="6400800" y="1417320"/>
-            <a:ext cx="5303520" cy="5029200"/>
+            <a:off x="832734" y="1700784"/>
+            <a:ext cx="10523482" cy="4882896"/>
           </a:xfrm>
           <a:prstGeom prst="rect">
             <a:avLst/>
           </a:prstGeom>
-          <a:noFill/>
         </p:spPr>
-        <p:txBody>
-          <a:bodyPr wrap="square">
-            <a:spAutoFit/>
-          </a:bodyPr>
-          <a:lstStyle/>
-          <a:p>
-            <a:pPr algn="l">
-              <a:spcAft>
-                <a:spcPts val="600"/>
-              </a:spcAft>
-            </a:pPr>
-            <a:r>
-              <a:rPr sz="1500" b="1" i="0">
-                <a:solidFill>
-                  <a:srgbClr val="212121"/>
-                </a:solidFill>
-                <a:latin typeface="Calibri"/>
-              </a:rPr>
-              <a:t>Two doors for any improvement</a:t>
-            </a:r>
-          </a:p>
-          <a:p>
-            <a:pPr algn="l">
-              <a:spcAft>
-                <a:spcPts val="1000"/>
-              </a:spcAft>
-            </a:pPr>
-            <a:r>
-              <a:rPr sz="1350" b="0" i="0">
-                <a:solidFill>
-                  <a:srgbClr val="555555"/>
-                </a:solidFill>
-                <a:latin typeface="Calibri"/>
-              </a:rPr>
-              <a:t>Carbon intensity — CO2 per unit of output — can only improve through one of two doors: cleaner energy (less CO2 per unit of energy: fuel switching, nuclear, renewables, the power system), or less energy per unit of output (efficiency, and changes in what the economy makes).</a:t>
-            </a:r>
-          </a:p>
-          <a:p>
-            <a:pPr algn="l">
-              <a:spcAft>
-                <a:spcPts val="0"/>
-              </a:spcAft>
-            </a:pPr>
-            <a:r>
-              <a:rPr sz="1350" b="0" i="0">
-                <a:solidFill>
-                  <a:srgbClr val="212121"/>
-                </a:solidFill>
-                <a:latin typeface="Calibri"/>
-              </a:rPr>
-              <a:t>We estimate the bend in the overall series and behind both doors. Which door moves is diagnostic: a fuel-mix bend points to energy policy and technology; an efficiency bend points as often to economic structure. A treaty effect should show up in the supply door first.</a:t>
-            </a:r>
-          </a:p>
-        </p:txBody>
-      </p:sp>
+      </p:pic>
     </p:spTree>
   </p:cSld>
   <p:clrMapOvr>
@@ -8094,11 +5576,11 @@
             <a:r>
               <a:rPr sz="1200" b="1" i="0">
                 <a:solidFill>
-                  <a:srgbClr val="3A66A5"/>
-                </a:solidFill>
-                <a:latin typeface="Calibri"/>
-              </a:rPr>
-              <a:t>THE RULES OF EVIDENCE</a:t>
+                  <a:srgbClr val="1B7837"/>
+                </a:solidFill>
+                <a:latin typeface="Calibri"/>
+              </a:rPr>
+              <a:t>WHAT WE FIND · 1 OF 3</a:t>
             </a:r>
           </a:p>
           <a:p>
@@ -8114,7 +5596,7 @@
                 </a:solidFill>
                 <a:latin typeface="Calibri"/>
               </a:rPr>
-              <a:t>What it takes to credit a treaty — and to trust a world series</a:t>
+              <a:t>Emissions growth fell — but mostly because growth fell</a:t>
             </a:r>
           </a:p>
         </p:txBody>
@@ -8127,8 +5609,8 @@
         </p:nvSpPr>
         <p:spPr>
           <a:xfrm>
-            <a:off x="502920" y="1417320"/>
-            <a:ext cx="5394960" cy="5029200"/>
+            <a:off x="502920" y="1188720"/>
+            <a:ext cx="11201400" cy="457200"/>
           </a:xfrm>
           <a:prstGeom prst="rect">
             <a:avLst/>
@@ -8141,126 +5623,56 @@
           </a:bodyPr>
           <a:lstStyle/>
           <a:p>
-            <a:pPr algn="l">
-              <a:spcAft>
-                <a:spcPts val="600"/>
-              </a:spcAft>
-            </a:pPr>
-            <a:r>
-              <a:rPr sz="1500" b="1" i="0">
-                <a:solidFill>
-                  <a:srgbClr val="212121"/>
-                </a:solidFill>
-                <a:latin typeface="Calibri"/>
-              </a:rPr>
-              <a:t>When a treaty year earns credit</a:t>
-            </a:r>
-          </a:p>
-          <a:p>
-            <a:pPr algn="l">
-              <a:spcAft>
-                <a:spcPts val="1000"/>
-              </a:spcAft>
-            </a:pPr>
-            <a:r>
-              <a:rPr sz="1300" b="0" i="0">
-                <a:solidFill>
-                  <a:srgbClr val="555555"/>
-                </a:solidFill>
-                <a:latin typeface="Calibri"/>
-              </a:rPr>
-              <a:t>The catch with treaty-year tests is that a gently curving trend makes almost any year look significant. So a treaty year earns credit only if the slope genuinely changes there by a robust test, the treaty year beats nearly all nearby placebo years, the best-fitting date lands within a few years of it, and there is a plausible mechanism.</a:t>
-            </a:r>
-          </a:p>
-          <a:p>
-            <a:pPr algn="l">
+            <a:pPr>
               <a:spcAft>
                 <a:spcPts val="0"/>
               </a:spcAft>
             </a:pPr>
             <a:r>
-              <a:rPr sz="1300" b="1" i="0">
+              <a:rPr sz="1400" b="1" i="0">
+                <a:solidFill>
+                  <a:srgbClr val="1B7837"/>
+                </a:solidFill>
+                <a:latin typeface="Calibri"/>
+              </a:rPr>
+              <a:t>Takeaway:  </a:t>
+            </a:r>
+            <a:r>
+              <a:rPr sz="1400" b="1" i="0">
                 <a:solidFill>
                   <a:srgbClr val="212121"/>
                 </a:solidFill>
                 <a:latin typeface="Calibri"/>
               </a:rPr>
-              <a:t>Rio fails the second test badly. Paris passes it. That difference is the paper.</a:t>
-            </a:r>
-          </a:p>
-        </p:txBody>
-      </p:sp>
-      <p:sp>
-        <p:nvSpPr>
-          <p:cNvPr id="4" name="TextBox 3"/>
-          <p:cNvSpPr txBox="1"/>
+              <a:t>Two thirds of the slowdown is slower economic growth. The fuel mix improved. Energy efficiency did not change at all.</a:t>
+            </a:r>
+          </a:p>
+        </p:txBody>
+      </p:sp>
+      <p:pic>
+        <p:nvPicPr>
+          <p:cNvPr id="4" name="Picture 3" descr="w2_fig1_what_changed.png"/>
+          <p:cNvPicPr>
+            <a:picLocks noChangeAspect="1"/>
+          </p:cNvPicPr>
           <p:nvPr/>
-        </p:nvSpPr>
+        </p:nvPicPr>
+        <p:blipFill>
+          <a:blip r:embed="rId2"/>
+          <a:stretch>
+            <a:fillRect/>
+          </a:stretch>
+        </p:blipFill>
         <p:spPr>
           <a:xfrm>
-            <a:off x="6263640" y="1417320"/>
-            <a:ext cx="5440680" cy="5029200"/>
+            <a:off x="1326022" y="1700784"/>
+            <a:ext cx="9536906" cy="4882896"/>
           </a:xfrm>
           <a:prstGeom prst="rect">
             <a:avLst/>
           </a:prstGeom>
-          <a:noFill/>
         </p:spPr>
-        <p:txBody>
-          <a:bodyPr wrap="square">
-            <a:spAutoFit/>
-          </a:bodyPr>
-          <a:lstStyle/>
-          <a:p>
-            <a:pPr algn="l">
-              <a:spcAft>
-                <a:spcPts val="600"/>
-              </a:spcAft>
-            </a:pPr>
-            <a:r>
-              <a:rPr sz="1500" b="1" i="0">
-                <a:solidFill>
-                  <a:srgbClr val="212121"/>
-                </a:solidFill>
-                <a:latin typeface="Calibri"/>
-              </a:rPr>
-              <a:t>And what counts as 'the world'</a:t>
-            </a:r>
-          </a:p>
-          <a:p>
-            <a:pPr algn="l">
-              <a:spcAft>
-                <a:spcPts val="1000"/>
-              </a:spcAft>
-            </a:pPr>
-            <a:r>
-              <a:rPr sz="1300" b="0" i="0">
-                <a:solidFill>
-                  <a:srgbClr val="555555"/>
-                </a:solidFill>
-                <a:latin typeface="Calibri"/>
-              </a:rPr>
-              <a:t>A world series summed over whichever countries reported that year is not a world series — it mixes trend with coverage. In this database coverage jumps from 59 to 149 countries in 1980 and collapses from 191 to 78 in 2022 as reporting lags.</a:t>
-            </a:r>
-          </a:p>
-          <a:p>
-            <a:pPr algn="l">
-              <a:spcAft>
-                <a:spcPts val="0"/>
-              </a:spcAft>
-            </a:pPr>
-            <a:r>
-              <a:rPr sz="1300" b="0" i="0">
-                <a:solidFill>
-                  <a:srgbClr val="212121"/>
-                </a:solidFill>
-                <a:latin typeface="Calibri"/>
-              </a:rPr>
-              <a:t>Everything here therefore uses a composition-constant panel: the 58 countries with complete data every year from 1971 to 2021, 87% of global CO2. This is not a technicality — it doubles the estimated post-Paris acceleration and turns the demand side from insignificant to significant.</a:t>
-            </a:r>
-          </a:p>
-        </p:txBody>
-      </p:sp>
+      </p:pic>
     </p:spTree>
   </p:cSld>
   <p:clrMapOvr>
@@ -8287,8 +5699,8 @@
         </p:nvSpPr>
         <p:spPr>
           <a:xfrm>
-            <a:off x="822960" y="777240"/>
-            <a:ext cx="10515600" cy="2377440"/>
+            <a:off x="502920" y="274320"/>
+            <a:ext cx="11201400" cy="914400"/>
           </a:xfrm>
           <a:prstGeom prst="rect">
             <a:avLst/>
@@ -8303,49 +5715,17 @@
           <a:p>
             <a:pPr algn="l">
               <a:spcAft>
-                <a:spcPts val="0"/>
+                <a:spcPts val="200"/>
               </a:spcAft>
             </a:pPr>
             <a:r>
-              <a:rPr sz="4400" b="1" i="0">
+              <a:rPr sz="1200" b="1" i="0">
                 <a:solidFill>
                   <a:srgbClr val="1B7837"/>
                 </a:solidFill>
                 <a:latin typeface="Calibri"/>
               </a:rPr>
-              <a:t>I</a:t>
-            </a:r>
-          </a:p>
-          <a:p>
-            <a:pPr algn="l">
-              <a:spcAft>
-                <a:spcPts val="600"/>
-              </a:spcAft>
-            </a:pPr>
-            <a:r>
-              <a:rPr sz="1200" b="1" i="0">
-                <a:solidFill>
-                  <a:srgbClr val="8A8A8A"/>
-                </a:solidFill>
-                <a:latin typeface="Calibri"/>
-              </a:rPr>
-              <a:t>ACT I</a:t>
-            </a:r>
-          </a:p>
-          <a:p>
-            <a:pPr algn="l">
-              <a:spcAft>
-                <a:spcPts val="800"/>
-              </a:spcAft>
-            </a:pPr>
-            <a:r>
-              <a:rPr sz="2800" b="1" i="0">
-                <a:solidFill>
-                  <a:srgbClr val="212121"/>
-                </a:solidFill>
-                <a:latin typeface="Calibri"/>
-              </a:rPr>
-              <a:t>What the record actually looks like</a:t>
+              <a:t>WHAT WE FIND · 2 OF 3</a:t>
             </a:r>
           </a:p>
           <a:p>
@@ -8355,13 +5735,13 @@
               </a:spcAft>
             </a:pPr>
             <a:r>
-              <a:rPr sz="1400" b="0" i="0">
-                <a:solidFill>
-                  <a:srgbClr val="555555"/>
-                </a:solidFill>
-                <a:latin typeface="Calibri"/>
-              </a:rPr>
-              <a:t>Before asking whether Paris bent the curve, establish what the curve has been doing — on a country set that does not change underneath the question.</a:t>
+              <a:rPr sz="2400" b="1" i="0">
+                <a:solidFill>
+                  <a:srgbClr val="212121"/>
+                </a:solidFill>
+                <a:latin typeface="Calibri"/>
+              </a:rPr>
+              <a:t>The fuel mix broke away from its trend. Efficiency stayed on it.</a:t>
             </a:r>
           </a:p>
         </p:txBody>
@@ -8374,8 +5754,8 @@
         </p:nvSpPr>
         <p:spPr>
           <a:xfrm>
-            <a:off x="822960" y="4297680"/>
-            <a:ext cx="3474720" cy="1828800"/>
+            <a:off x="502920" y="1188720"/>
+            <a:ext cx="11201400" cy="457200"/>
           </a:xfrm>
           <a:prstGeom prst="rect">
             <a:avLst/>
@@ -8388,149 +5768,56 @@
           </a:bodyPr>
           <a:lstStyle/>
           <a:p>
-            <a:pPr algn="l">
-              <a:spcAft>
-                <a:spcPts val="200"/>
-              </a:spcAft>
-            </a:pPr>
-            <a:r>
-              <a:rPr sz="2800" b="1" i="0">
-                <a:solidFill>
-                  <a:srgbClr val="1B7837"/>
-                </a:solidFill>
-                <a:latin typeface="Calibri"/>
-              </a:rPr>
-              <a:t>4 episodes</a:t>
-            </a:r>
-          </a:p>
-          <a:p>
-            <a:pPr algn="l">
+            <a:pPr>
               <a:spcAft>
                 <a:spcPts val="0"/>
               </a:spcAft>
             </a:pPr>
             <a:r>
-              <a:rPr sz="1250" b="0" i="0">
-                <a:solidFill>
-                  <a:srgbClr val="555555"/>
-                </a:solidFill>
-                <a:latin typeface="Calibri"/>
-              </a:rPr>
-              <a:t>the record prefers three breaks (1984, 2002, 2012) over one</a:t>
-            </a:r>
-          </a:p>
-        </p:txBody>
-      </p:sp>
-      <p:sp>
-        <p:nvSpPr>
-          <p:cNvPr id="4" name="TextBox 3"/>
-          <p:cNvSpPr txBox="1"/>
+              <a:rPr sz="1400" b="1" i="0">
+                <a:solidFill>
+                  <a:srgbClr val="1B7837"/>
+                </a:solidFill>
+                <a:latin typeface="Calibri"/>
+              </a:rPr>
+              <a:t>Takeaway:  </a:t>
+            </a:r>
+            <a:r>
+              <a:rPr sz="1400" b="1" i="0">
+                <a:solidFill>
+                  <a:srgbClr val="212121"/>
+                </a:solidFill>
+                <a:latin typeface="Calibri"/>
+              </a:rPr>
+              <a:t>Cleaner energy is the one place the world is now beating its own long-run trend — and it is where climate policy would show up first.</a:t>
+            </a:r>
+          </a:p>
+        </p:txBody>
+      </p:sp>
+      <p:pic>
+        <p:nvPicPr>
+          <p:cNvPr id="4" name="Picture 3" descr="w2_fig2_anniversary_test.png"/>
+          <p:cNvPicPr>
+            <a:picLocks noChangeAspect="1"/>
+          </p:cNvPicPr>
           <p:nvPr/>
-        </p:nvSpPr>
+        </p:nvPicPr>
+        <p:blipFill>
+          <a:blip r:embed="rId2"/>
+          <a:stretch>
+            <a:fillRect/>
+          </a:stretch>
+        </p:blipFill>
         <p:spPr>
           <a:xfrm>
-            <a:off x="4434840" y="4297680"/>
-            <a:ext cx="3474720" cy="1828800"/>
+            <a:off x="804672" y="1700784"/>
+            <a:ext cx="10579607" cy="4882896"/>
           </a:xfrm>
           <a:prstGeom prst="rect">
             <a:avLst/>
           </a:prstGeom>
-          <a:noFill/>
         </p:spPr>
-        <p:txBody>
-          <a:bodyPr wrap="square">
-            <a:spAutoFit/>
-          </a:bodyPr>
-          <a:lstStyle/>
-          <a:p>
-            <a:pPr algn="l">
-              <a:spcAft>
-                <a:spcPts val="200"/>
-              </a:spcAft>
-            </a:pPr>
-            <a:r>
-              <a:rPr sz="2800" b="1" i="0">
-                <a:solidFill>
-                  <a:srgbClr val="1B7837"/>
-                </a:solidFill>
-                <a:latin typeface="Calibri"/>
-              </a:rPr>
-              <a:t>-0.07%/yr</a:t>
-            </a:r>
-          </a:p>
-          <a:p>
-            <a:pPr algn="l">
-              <a:spcAft>
-                <a:spcPts val="0"/>
-              </a:spcAft>
-            </a:pPr>
-            <a:r>
-              <a:rPr sz="1250" b="0" i="0">
-                <a:solidFill>
-                  <a:srgbClr val="555555"/>
-                </a:solidFill>
-                <a:latin typeface="Calibri"/>
-              </a:rPr>
-              <a:t>carbon intensity through the 2002-2012 plateau — decarbonization stalled</a:t>
-            </a:r>
-          </a:p>
-        </p:txBody>
-      </p:sp>
-      <p:sp>
-        <p:nvSpPr>
-          <p:cNvPr id="5" name="TextBox 4"/>
-          <p:cNvSpPr txBox="1"/>
-          <p:nvPr/>
-        </p:nvSpPr>
-        <p:spPr>
-          <a:xfrm>
-            <a:off x="8046720" y="4297680"/>
-            <a:ext cx="3474720" cy="1828800"/>
-          </a:xfrm>
-          <a:prstGeom prst="rect">
-            <a:avLst/>
-          </a:prstGeom>
-          <a:noFill/>
-        </p:spPr>
-        <p:txBody>
-          <a:bodyPr wrap="square">
-            <a:spAutoFit/>
-          </a:bodyPr>
-          <a:lstStyle/>
-          <a:p>
-            <a:pPr algn="l">
-              <a:spcAft>
-                <a:spcPts val="200"/>
-              </a:spcAft>
-            </a:pPr>
-            <a:r>
-              <a:rPr sz="2800" b="1" i="0">
-                <a:solidFill>
-                  <a:srgbClr val="1B7837"/>
-                </a:solidFill>
-                <a:latin typeface="Calibri"/>
-              </a:rPr>
-              <a:t>-2.20%/yr</a:t>
-            </a:r>
-          </a:p>
-          <a:p>
-            <a:pPr algn="l">
-              <a:spcAft>
-                <a:spcPts val="0"/>
-              </a:spcAft>
-            </a:pPr>
-            <a:r>
-              <a:rPr sz="1250" b="0" i="0">
-                <a:solidFill>
-                  <a:srgbClr val="555555"/>
-                </a:solidFill>
-                <a:latin typeface="Calibri"/>
-              </a:rPr>
-              <a:t>since 2012: the fastest sustained improvement in the record</a:t>
-            </a:r>
-          </a:p>
-        </p:txBody>
-      </p:sp>
+      </p:pic>
     </p:spTree>
   </p:cSld>
   <p:clrMapOvr>
@@ -8579,11 +5866,11 @@
             <a:r>
               <a:rPr sz="1200" b="1" i="0">
                 <a:solidFill>
-                  <a:srgbClr val="1B7837"/>
-                </a:solidFill>
-                <a:latin typeface="Calibri"/>
-              </a:rPr>
-              <a:t>ACT I · THE EPISODES</a:t>
+                  <a:srgbClr val="C77F00"/>
+                </a:solidFill>
+                <a:latin typeface="Calibri"/>
+              </a:rPr>
+              <a:t>WHAT WE FIND · 3 OF 3</a:t>
             </a:r>
           </a:p>
           <a:p>
@@ -8599,7 +5886,7 @@
                 </a:solidFill>
                 <a:latin typeface="Calibri"/>
               </a:rPr>
-              <a:t>Decarbonization stalled for a decade, then resumed faster than ever</a:t>
+              <a:t>Rio fails the placebo test. Paris passes it.</a:t>
             </a:r>
           </a:p>
         </p:txBody>
@@ -8613,45 +5900,6 @@
         <p:spPr>
           <a:xfrm>
             <a:off x="502920" y="1188720"/>
-            <a:ext cx="11201400" cy="731520"/>
-          </a:xfrm>
-          <a:prstGeom prst="rect">
-            <a:avLst/>
-          </a:prstGeom>
-          <a:noFill/>
-        </p:spPr>
-        <p:txBody>
-          <a:bodyPr wrap="square">
-            <a:spAutoFit/>
-          </a:bodyPr>
-          <a:lstStyle/>
-          <a:p>
-            <a:pPr algn="l">
-              <a:spcAft>
-                <a:spcPts val="0"/>
-              </a:spcAft>
-            </a:pPr>
-            <a:r>
-              <a:rPr sz="1300" b="0" i="0">
-                <a:solidFill>
-                  <a:srgbClr val="555555"/>
-                </a:solidFill>
-                <a:latin typeface="Calibri"/>
-              </a:rPr>
-              <a:t>The record is not one turning point but a sequence: steady improvement to 1984, slower improvement to 2002, a decade-long plateau while coal-fired industrial growth offset efficiency gains everywhere else, and then the sharpest sustained decarbonization in the series. Paris arrives three years into that fourth episode.</a:t>
-            </a:r>
-          </a:p>
-        </p:txBody>
-      </p:sp>
-      <p:sp>
-        <p:nvSpPr>
-          <p:cNvPr id="4" name="TextBox 3"/>
-          <p:cNvSpPr txBox="1"/>
-          <p:nvPr/>
-        </p:nvSpPr>
-        <p:spPr>
-          <a:xfrm>
-            <a:off x="502920" y="1956816"/>
             <a:ext cx="11201400" cy="457200"/>
           </a:xfrm>
           <a:prstGeom prst="rect">
@@ -8671,29 +5919,77 @@
               </a:spcAft>
             </a:pPr>
             <a:r>
-              <a:rPr sz="1150" b="1" i="1">
-                <a:solidFill>
-                  <a:srgbClr val="3A66A5"/>
-                </a:solidFill>
-                <a:latin typeface="Calibri"/>
-              </a:rPr>
-              <a:t>How to read it: </a:t>
-            </a:r>
-            <a:r>
-              <a:rPr sz="1150" b="0" i="1">
-                <a:solidFill>
-                  <a:srgbClr val="8A8A8A"/>
-                </a:solidFill>
-                <a:latin typeface="Calibri"/>
-              </a:rPr>
-              <a:t>Grey dots are the composition-constant panel's carbon intensity (1971 = 100, log scale); the red line is the best multiple-break fit, with each segment's average annual change labelled.</a:t>
+              <a:rPr sz="1400" b="1" i="0">
+                <a:solidFill>
+                  <a:srgbClr val="C77F00"/>
+                </a:solidFill>
+                <a:latin typeface="Calibri"/>
+              </a:rPr>
+              <a:t>Takeaway:  </a:t>
+            </a:r>
+            <a:r>
+              <a:rPr sz="1400" b="1" i="0">
+                <a:solidFill>
+                  <a:srgbClr val="212121"/>
+                </a:solidFill>
+                <a:latin typeface="Calibri"/>
+              </a:rPr>
+              <a:t>Paris is the first treaty date the global record does not reject — it ranks in the top tenth of all candidate years.</a:t>
+            </a:r>
+          </a:p>
+        </p:txBody>
+      </p:sp>
+      <p:sp>
+        <p:nvSpPr>
+          <p:cNvPr id="4" name="TextBox 3"/>
+          <p:cNvSpPr txBox="1"/>
+          <p:nvPr/>
+        </p:nvSpPr>
+        <p:spPr>
+          <a:xfrm>
+            <a:off x="502920" y="1700784"/>
+            <a:ext cx="11201400" cy="384048"/>
+          </a:xfrm>
+          <a:prstGeom prst="rect">
+            <a:avLst/>
+          </a:prstGeom>
+          <a:noFill/>
+        </p:spPr>
+        <p:txBody>
+          <a:bodyPr wrap="square">
+            <a:spAutoFit/>
+          </a:bodyPr>
+          <a:lstStyle/>
+          <a:p>
+            <a:pPr>
+              <a:spcAft>
+                <a:spcPts val="0"/>
+              </a:spcAft>
+            </a:pPr>
+            <a:r>
+              <a:rPr sz="1200" b="1" i="0">
+                <a:solidFill>
+                  <a:srgbClr val="B33A3A"/>
+                </a:solidFill>
+                <a:latin typeface="Calibri"/>
+              </a:rPr>
+              <a:t>But:  </a:t>
+            </a:r>
+            <a:r>
+              <a:rPr sz="1200" b="0" i="0">
+                <a:solidFill>
+                  <a:srgbClr val="555555"/>
+                </a:solidFill>
+                <a:latin typeface="Calibri"/>
+              </a:rPr>
+              <a:t>the evidence is a plateau across 2012-2016, not a spike at 2015 — and that window coincides exactly with the collapse in clean-energy costs.</a:t>
             </a:r>
           </a:p>
         </p:txBody>
       </p:sp>
       <p:pic>
         <p:nvPicPr>
-          <p:cNvPr id="5" name="Picture 4" descr="world_fig01_episodes.png"/>
+          <p:cNvPr id="5" name="Picture 4" descr="w2_fig3_rio_vs_paris.png"/>
           <p:cNvPicPr>
             <a:picLocks noChangeAspect="1"/>
           </p:cNvPicPr>
@@ -8707,8 +6003,8 @@
         </p:blipFill>
         <p:spPr>
           <a:xfrm>
-            <a:off x="2102768" y="2468880"/>
-            <a:ext cx="7983415" cy="4151376"/>
+            <a:off x="1260348" y="2121408"/>
+            <a:ext cx="9668256" cy="4462272"/>
           </a:xfrm>
           <a:prstGeom prst="rect">
             <a:avLst/>
@@ -8763,11 +6059,11 @@
             <a:r>
               <a:rPr sz="1200" b="1" i="0">
                 <a:solidFill>
-                  <a:srgbClr val="3A66A5"/>
-                </a:solidFill>
-                <a:latin typeface="Calibri"/>
-              </a:rPr>
-              <a:t>ACT I · THE AGGREGATION TRAP</a:t>
+                  <a:srgbClr val="1B7837"/>
+                </a:solidFill>
+                <a:latin typeface="Calibri"/>
+              </a:rPr>
+              <a:t>WHAT IT ADDS UP TO</a:t>
             </a:r>
           </a:p>
           <a:p>
@@ -8783,7 +6079,7 @@
                 </a:solidFill>
                 <a:latin typeface="Calibri"/>
               </a:rPr>
-              <a:t>A world series summed over changing countries is not a world series</a:t>
+              <a:t>Consistent with Paris. Not attributable to it.</a:t>
             </a:r>
           </a:p>
         </p:txBody>
@@ -8796,8 +6092,8 @@
         </p:nvSpPr>
         <p:spPr>
           <a:xfrm>
-            <a:off x="502920" y="1188720"/>
-            <a:ext cx="11201400" cy="731520"/>
+            <a:off x="502920" y="1463040"/>
+            <a:ext cx="5532120" cy="4937760"/>
           </a:xfrm>
           <a:prstGeom prst="rect">
             <a:avLst/>
@@ -8812,17 +6108,33 @@
           <a:p>
             <a:pPr algn="l">
               <a:spcAft>
+                <a:spcPts val="600"/>
+              </a:spcAft>
+            </a:pPr>
+            <a:r>
+              <a:rPr sz="1500" b="1" i="0">
+                <a:solidFill>
+                  <a:srgbClr val="1B7837"/>
+                </a:solidFill>
+                <a:latin typeface="Calibri"/>
+              </a:rPr>
+              <a:t>What we can say</a:t>
+            </a:r>
+          </a:p>
+          <a:p>
+            <a:pPr algn="l">
+              <a:spcAft>
                 <a:spcPts val="0"/>
               </a:spcAft>
             </a:pPr>
             <a:r>
-              <a:rPr sz="1300" b="0" i="0">
+              <a:rPr sz="1350" b="0" i="0">
                 <a:solidFill>
                   <a:srgbClr val="555555"/>
                 </a:solidFill>
                 <a:latin typeface="Calibri"/>
               </a:rPr>
-              <a:t>Coverage in this database is not constant — it jumps by ninety countries in 1980 and collapses by more than half in 2022 as reporting lags. Summing whatever is available each year mixes real trend with bookkeeping. And even on a fixed panel, the world average conceals its largest member: China's coal-era growth held the global fuel mix flat for two decades while everyone else slowly improved.</a:t>
+              <a:t>Emissions growth has fallen by two thirds, and part of that is a genuine improvement in the world's fuel mix that beats fifty years of trend. That improvement sits in the supply side, exactly where climate policy and clean technology operate. And 2015 ranks near the top of all candidate turning-point years — a test the 1992 Rio agreement fails badly.</a:t>
             </a:r>
           </a:p>
         </p:txBody>
@@ -8835,8 +6147,8 @@
         </p:nvSpPr>
         <p:spPr>
           <a:xfrm>
-            <a:off x="502920" y="1956816"/>
-            <a:ext cx="11201400" cy="457200"/>
+            <a:off x="6400800" y="1463040"/>
+            <a:ext cx="5303520" cy="4937760"/>
           </a:xfrm>
           <a:prstGeom prst="rect">
             <a:avLst/>
@@ -8849,56 +6161,55 @@
           </a:bodyPr>
           <a:lstStyle/>
           <a:p>
-            <a:pPr>
+            <a:pPr algn="l">
+              <a:spcAft>
+                <a:spcPts val="600"/>
+              </a:spcAft>
+            </a:pPr>
+            <a:r>
+              <a:rPr sz="1500" b="1" i="0">
+                <a:solidFill>
+                  <a:srgbClr val="B33A3A"/>
+                </a:solidFill>
+                <a:latin typeface="Calibri"/>
+              </a:rPr>
+              <a:t>What we cannot</a:t>
+            </a:r>
+          </a:p>
+          <a:p>
+            <a:pPr algn="l">
+              <a:spcAft>
+                <a:spcPts val="1000"/>
+              </a:spcAft>
+            </a:pPr>
+            <a:r>
+              <a:rPr sz="1350" b="0" i="0">
+                <a:solidFill>
+                  <a:srgbClr val="555555"/>
+                </a:solidFill>
+                <a:latin typeface="Calibri"/>
+              </a:rPr>
+              <a:t>Most of the emissions slowdown is slower economic growth, not decarbonization. Energy efficiency did not respond at all. And the evidence for a turn is spread across 2012 to 2016 rather than concentrated on the treaty year — a window the test cannot resolve, and one that coincides exactly with the collapse in clean-energy costs.</a:t>
+            </a:r>
+          </a:p>
+          <a:p>
+            <a:pPr algn="l">
               <a:spcAft>
                 <a:spcPts val="0"/>
               </a:spcAft>
             </a:pPr>
             <a:r>
-              <a:rPr sz="1150" b="1" i="1">
-                <a:solidFill>
-                  <a:srgbClr val="3A66A5"/>
-                </a:solidFill>
-                <a:latin typeface="Calibri"/>
-              </a:rPr>
-              <a:t>How to read it: </a:t>
-            </a:r>
-            <a:r>
-              <a:rPr sz="1150" b="0" i="1">
-                <a:solidFill>
-                  <a:srgbClr val="8A8A8A"/>
-                </a:solidFill>
-                <a:latin typeface="Calibri"/>
-              </a:rPr>
-              <a:t>Left: countries with complete Kaya data each year. Right: carbon intensity of energy for the fixed panel, with and without China.</a:t>
-            </a:r>
-          </a:p>
-        </p:txBody>
-      </p:sp>
-      <p:pic>
-        <p:nvPicPr>
-          <p:cNvPr id="5" name="Picture 4" descr="world_fig05_aggregation.png"/>
-          <p:cNvPicPr>
-            <a:picLocks noChangeAspect="1"/>
-          </p:cNvPicPr>
-          <p:nvPr/>
-        </p:nvPicPr>
-        <p:blipFill>
-          <a:blip r:embed="rId2"/>
-          <a:stretch>
-            <a:fillRect/>
-          </a:stretch>
-        </p:blipFill>
-        <p:spPr>
-          <a:xfrm>
-            <a:off x="1275914" y="2468880"/>
-            <a:ext cx="9637122" cy="4151376"/>
-          </a:xfrm>
-          <a:prstGeom prst="rect">
-            <a:avLst/>
-          </a:prstGeom>
-        </p:spPr>
-      </p:pic>
+              <a:rPr sz="1350" b="1" i="0">
+                <a:solidFill>
+                  <a:srgbClr val="212121"/>
+                </a:solidFill>
+                <a:latin typeface="Calibri"/>
+              </a:rPr>
+              <a:t>The one thing that changed after Paris is the one thing cheap clean energy would also have changed.</a:t>
+            </a:r>
+          </a:p>
+        </p:txBody>
+      </p:sp>
     </p:spTree>
   </p:cSld>
   <p:clrMapOvr>
@@ -8925,8 +6236,8 @@
         </p:nvSpPr>
         <p:spPr>
           <a:xfrm>
-            <a:off x="822960" y="777240"/>
-            <a:ext cx="10515600" cy="2377440"/>
+            <a:off x="502920" y="274320"/>
+            <a:ext cx="11201400" cy="914400"/>
           </a:xfrm>
           <a:prstGeom prst="rect">
             <a:avLst/>
@@ -8941,49 +6252,17 @@
           <a:p>
             <a:pPr algn="l">
               <a:spcAft>
-                <a:spcPts val="0"/>
+                <a:spcPts val="200"/>
               </a:spcAft>
             </a:pPr>
             <a:r>
-              <a:rPr sz="4400" b="1" i="0">
+              <a:rPr sz="1200" b="1" i="0">
                 <a:solidFill>
                   <a:srgbClr val="1B7837"/>
                 </a:solidFill>
                 <a:latin typeface="Calibri"/>
               </a:rPr>
-              <a:t>II</a:t>
-            </a:r>
-          </a:p>
-          <a:p>
-            <a:pPr algn="l">
-              <a:spcAft>
-                <a:spcPts val="600"/>
-              </a:spcAft>
-            </a:pPr>
-            <a:r>
-              <a:rPr sz="1200" b="1" i="0">
-                <a:solidFill>
-                  <a:srgbClr val="8A8A8A"/>
-                </a:solidFill>
-                <a:latin typeface="Calibri"/>
-              </a:rPr>
-              <a:t>ACT II</a:t>
-            </a:r>
-          </a:p>
-          <a:p>
-            <a:pPr algn="l">
-              <a:spcAft>
-                <a:spcPts val="800"/>
-              </a:spcAft>
-            </a:pPr>
-            <a:r>
-              <a:rPr sz="2800" b="1" i="0">
-                <a:solidFill>
-                  <a:srgbClr val="212121"/>
-                </a:solidFill>
-                <a:latin typeface="Calibri"/>
-              </a:rPr>
-              <a:t>The anniversary test</a:t>
+              <a:t>WHAT WOULD SETTLE IT</a:t>
             </a:r>
           </a:p>
           <a:p>
@@ -8993,13 +6272,13 @@
               </a:spcAft>
             </a:pPr>
             <a:r>
-              <a:rPr sz="1400" b="0" i="0">
-                <a:solidFill>
-                  <a:srgbClr val="555555"/>
-                </a:solidFill>
-                <a:latin typeface="Calibri"/>
-              </a:rPr>
-              <a:t>Extend the Rio-to-Paris trend past 2015 and ask whether the world has beaten it.</a:t>
+              <a:rPr sz="2400" b="1" i="0">
+                <a:solidFill>
+                  <a:srgbClr val="212121"/>
+                </a:solidFill>
+                <a:latin typeface="Calibri"/>
+              </a:rPr>
+              <a:t>Three things — and two of them are not at the world level</a:t>
             </a:r>
           </a:p>
         </p:txBody>
@@ -9012,8 +6291,8 @@
         </p:nvSpPr>
         <p:spPr>
           <a:xfrm>
-            <a:off x="822960" y="4297680"/>
-            <a:ext cx="3474720" cy="1828800"/>
+            <a:off x="502920" y="1508760"/>
+            <a:ext cx="10881360" cy="4572000"/>
           </a:xfrm>
           <a:prstGeom prst="rect">
             <a:avLst/>
@@ -9028,17 +6307,49 @@
           <a:p>
             <a:pPr algn="l">
               <a:spcAft>
-                <a:spcPts val="200"/>
+                <a:spcPts val="1200"/>
               </a:spcAft>
             </a:pPr>
             <a:r>
-              <a:rPr sz="2800" b="1" i="0">
-                <a:solidFill>
-                  <a:srgbClr val="1B7837"/>
-                </a:solidFill>
-                <a:latin typeface="Calibri"/>
-              </a:rPr>
-              <a:t>-1.86 pp/yr</a:t>
+              <a:rPr sz="1500" b="0" i="0">
+                <a:solidFill>
+                  <a:srgbClr val="555555"/>
+                </a:solidFill>
+                <a:latin typeface="Calibri"/>
+              </a:rPr>
+              <a:t>Persistence. The size of the change is already detectable — the test could pick up an effect half this large within a couple more years of data. What it cannot yet tell us is whether the new fuel-mix trend holds. If it survives to Paris+20, a one-off technology shock becomes a much weaker explanation.</a:t>
+            </a:r>
+          </a:p>
+          <a:p>
+            <a:pPr algn="l">
+              <a:spcAft>
+                <a:spcPts val="1200"/>
+              </a:spcAft>
+            </a:pPr>
+            <a:r>
+              <a:rPr sz="1500" b="0" i="0">
+                <a:solidFill>
+                  <a:srgbClr val="555555"/>
+                </a:solidFill>
+                <a:latin typeface="Calibri"/>
+              </a:rPr>
+              <a:t>The demand side. Efficiency is the more informative half precisely because it has not moved: cheap solar explains a cleaner fuel mix, but it does not explain how much energy the world uses per unit of output. If efficiency accelerates over the next decade, that is much harder to attribute to technology alone.</a:t>
+            </a:r>
+          </a:p>
+          <a:p>
+            <a:pPr algn="l">
+              <a:spcAft>
+                <a:spcPts val="1400"/>
+              </a:spcAft>
+            </a:pPr>
+            <a:r>
+              <a:rPr sz="1500" b="0" i="0">
+                <a:solidFill>
+                  <a:srgbClr val="555555"/>
+                </a:solidFill>
+                <a:latin typeface="Calibri"/>
+              </a:rPr>
+              <a:t>Disaggregation. Paris works through national pledges, so its signature should appear country by country — where series are longer, placebo tests are independent, and a documentary record exists to say what accompanied each turn. That is the companion paper.</a:t>
             </a:r>
           </a:p>
           <a:p>
@@ -9048,123 +6359,13 @@
               </a:spcAft>
             </a:pPr>
             <a:r>
-              <a:rPr sz="1250" b="0" i="0">
-                <a:solidFill>
-                  <a:srgbClr val="555555"/>
-                </a:solidFill>
-                <a:latin typeface="Calibri"/>
-              </a:rPr>
-              <a:t>faster than trend since Paris, overall carbon intensity (t = 4.9)</a:t>
-            </a:r>
-          </a:p>
-        </p:txBody>
-      </p:sp>
-      <p:sp>
-        <p:nvSpPr>
-          <p:cNvPr id="4" name="TextBox 3"/>
-          <p:cNvSpPr txBox="1"/>
-          <p:nvPr/>
-        </p:nvSpPr>
-        <p:spPr>
-          <a:xfrm>
-            <a:off x="4434840" y="4297680"/>
-            <a:ext cx="3474720" cy="1828800"/>
-          </a:xfrm>
-          <a:prstGeom prst="rect">
-            <a:avLst/>
-          </a:prstGeom>
-          <a:noFill/>
-        </p:spPr>
-        <p:txBody>
-          <a:bodyPr wrap="square">
-            <a:spAutoFit/>
-          </a:bodyPr>
-          <a:lstStyle/>
-          <a:p>
-            <a:pPr algn="l">
-              <a:spcAft>
-                <a:spcPts val="200"/>
-              </a:spcAft>
-            </a:pPr>
-            <a:r>
-              <a:rPr sz="2800" b="1" i="0">
-                <a:solidFill>
-                  <a:srgbClr val="1B7837"/>
-                </a:solidFill>
-                <a:latin typeface="Calibri"/>
-              </a:rPr>
-              <a:t>both doors</a:t>
-            </a:r>
-          </a:p>
-          <a:p>
-            <a:pPr algn="l">
-              <a:spcAft>
-                <a:spcPts val="0"/>
-              </a:spcAft>
-            </a:pPr>
-            <a:r>
-              <a:rPr sz="1250" b="0" i="0">
-                <a:solidFill>
-                  <a:srgbClr val="555555"/>
-                </a:solidFill>
-                <a:latin typeface="Calibri"/>
-              </a:rPr>
-              <a:t>fuel mix and energy intensity now accelerate significantly</a:t>
-            </a:r>
-          </a:p>
-        </p:txBody>
-      </p:sp>
-      <p:sp>
-        <p:nvSpPr>
-          <p:cNvPr id="5" name="TextBox 4"/>
-          <p:cNvSpPr txBox="1"/>
-          <p:nvPr/>
-        </p:nvSpPr>
-        <p:spPr>
-          <a:xfrm>
-            <a:off x="8046720" y="4297680"/>
-            <a:ext cx="3474720" cy="1828800"/>
-          </a:xfrm>
-          <a:prstGeom prst="rect">
-            <a:avLst/>
-          </a:prstGeom>
-          <a:noFill/>
-        </p:spPr>
-        <p:txBody>
-          <a:bodyPr wrap="square">
-            <a:spAutoFit/>
-          </a:bodyPr>
-          <a:lstStyle/>
-          <a:p>
-            <a:pPr algn="l">
-              <a:spcAft>
-                <a:spcPts val="200"/>
-              </a:spcAft>
-            </a:pPr>
-            <a:r>
-              <a:rPr sz="2800" b="1" i="0">
-                <a:solidFill>
-                  <a:srgbClr val="1B7837"/>
-                </a:solidFill>
-                <a:latin typeface="Calibri"/>
-              </a:rPr>
-              <a:t>about half</a:t>
-            </a:r>
-          </a:p>
-          <a:p>
-            <a:pPr algn="l">
-              <a:spcAft>
-                <a:spcPts val="0"/>
-              </a:spcAft>
-            </a:pPr>
-            <a:r>
-              <a:rPr sz="1250" b="0" i="0">
-                <a:solidFill>
-                  <a:srgbClr val="555555"/>
-                </a:solidFill>
-                <a:latin typeface="Calibri"/>
-              </a:rPr>
-              <a:t>of the emissions slowdown is intensity, not slower growth</a:t>
+              <a:rPr sz="1500" b="1" i="0">
+                <a:solidFill>
+                  <a:srgbClr val="212121"/>
+                </a:solidFill>
+                <a:latin typeface="Calibri"/>
+              </a:rPr>
+              <a:t>The question we would put to the field: should treaty assessment be built on intensity turning points and placebo discipline, rather than on emissions levels and anniversaries?</a:t>
             </a:r>
           </a:p>
         </p:txBody>

--- a/carbon_breakpoints_takeaway_figures/paris_at_ten_world_deck.pptx
+++ b/carbon_breakpoints_takeaway_figures/paris_at_ten_world_deck.pptx
@@ -16,6 +16,7 @@
     <p:sldId id="264" r:id="rId16"/>
     <p:sldId id="265" r:id="rId17"/>
     <p:sldId id="266" r:id="rId18"/>
+    <p:sldId id="267" r:id="rId19"/>
   </p:sldIdLst>
   <p:sldSz cx="12191695" cy="6858000" type="screen4x3"/>
   <p:notesSz cx="6858000" cy="9144000"/>
@@ -582,7 +583,7 @@
           <a:lstStyle/>
           <a:p>
             <a:r>
-              <a:t>Volunteer the window sensitivity — a referee will look for it.</a:t>
+              <a:t>Forward-looking. Hands off to the national paper without previewing its results.</a:t>
             </a:r>
           </a:p>
         </p:txBody>
@@ -652,6 +653,76 @@
           <a:lstStyle/>
           <a:p>
             <a:r>
+              <a:t>Volunteer the window sensitivity — a referee will look for it.</a:t>
+            </a:r>
+          </a:p>
+        </p:txBody>
+      </p:sp>
+      <p:sp>
+        <p:nvSpPr>
+          <p:cNvPr id="4" name="Slide Number Placeholder 3"/>
+          <p:cNvSpPr>
+            <a:spLocks noGrp="1"/>
+          </p:cNvSpPr>
+          <p:nvPr>
+            <p:ph type="sldNum" idx="5" sz="quarter"/>
+          </p:nvPr>
+        </p:nvSpPr>
+        <p:spPr/>
+      </p:sp>
+    </p:spTree>
+  </p:cSld>
+  <p:clrMapOvr>
+    <a:masterClrMapping/>
+  </p:clrMapOvr>
+</p:notes>
+</file>
+
+<file path=ppt/notesSlides/notesSlide12.xml><?xml version="1.0" encoding="utf-8"?>
+<p:notes xmlns:a="http://schemas.openxmlformats.org/drawingml/2006/main" xmlns:p="http://schemas.openxmlformats.org/presentationml/2006/main" xmlns:r="http://schemas.openxmlformats.org/officeDocument/2006/relationships">
+  <p:cSld>
+    <p:spTree>
+      <p:nvGrpSpPr>
+        <p:cNvPr id="1" name=""/>
+        <p:cNvGrpSpPr/>
+        <p:nvPr/>
+      </p:nvGrpSpPr>
+      <p:grpSpPr>
+        <a:xfrm>
+          <a:off x="0" y="0"/>
+          <a:ext cx="0" cy="0"/>
+          <a:chOff x="0" y="0"/>
+          <a:chExt cx="0" cy="0"/>
+        </a:xfrm>
+      </p:grpSpPr>
+      <p:sp>
+        <p:nvSpPr>
+          <p:cNvPr id="2" name="Slide Image Placeholder 1"/>
+          <p:cNvSpPr>
+            <a:spLocks noGrp="1"/>
+          </p:cNvSpPr>
+          <p:nvPr>
+            <p:ph type="sldImg" idx="2"/>
+          </p:nvPr>
+        </p:nvSpPr>
+        <p:spPr/>
+      </p:sp>
+      <p:sp>
+        <p:nvSpPr>
+          <p:cNvPr id="3" name="Notes Placeholder 2"/>
+          <p:cNvSpPr>
+            <a:spLocks noGrp="1"/>
+          </p:cNvSpPr>
+          <p:nvPr>
+            <p:ph type="body" idx="3" sz="quarter"/>
+          </p:nvPr>
+        </p:nvSpPr>
+        <p:spPr/>
+        <p:txBody>
+          <a:bodyPr/>
+          <a:lstStyle/>
+          <a:p>
+            <a:r>
               <a:t>Close on the reframed headline.</a:t>
             </a:r>
           </a:p>
@@ -862,7 +933,7 @@
           <a:lstStyle/>
           <a:p>
             <a:r>
-              <a:t>182 countries, 99.8% of 2015 global CO2, 13 interpolated cells out of 5,824. The 2022-23 cliff is a reporting lag, not a real change, and including it would badly distort the post-Paris window.</a:t>
+              <a:t>155 countries, 90.6% of 2015 global CO2, 14 interpolated cells. The missing 9% is almost entirely post-Soviet and Eastern-bloc states, which did not exist as separate series in 1980 - the robustness slide adds them back. The 2022-23 cliff is a reporting lag, not a real change.</a:t>
             </a:r>
           </a:p>
         </p:txBody>
@@ -932,7 +1003,7 @@
           <a:lstStyle/>
           <a:p>
             <a:r>
-              <a:t>Before → after: GDP +3.1 → +2.1; fuel mix -0.0 → -0.4; efficiency -1.0 → -1.0; CO2 +2.1 → +0.7. The efficiency result is the surprise: fifty years of steady improvement, entirely unaffected by the treaty era.</a:t>
+              <a:t>Before → after: GDP +3.1 → +2.1; fuel mix +0.0 → -0.4; efficiency -0.6 → -0.9; CO2 +2.5 → +0.8. Roughly 56% of the slowdown is the economy, 44% is decarbonization.</a:t>
             </a:r>
           </a:p>
         </p:txBody>
@@ -1002,7 +1073,7 @@
           <a:lstStyle/>
           <a:p>
             <a:r>
-              <a:t>Fuel mix -0.7 pp/yr faster than trend (t = 3.4); overall intensity -1.0 (t = 2.3); efficiency -0.3 (t = 1.3, not significant). Supply-side change, not demand-side.</a:t>
+              <a:t>Against the 1980-2015 trend: overall intensity -1.5 pp/yr (t = 4.5); efficiency -1.0 (t = 5.5); fuel mix -0.6 (t = 2.7). All three significant on this panel - but see the robustness slide, where efficiency does not survive adding the post-Soviet states.</a:t>
             </a:r>
           </a:p>
         </p:txBody>
@@ -1072,7 +1143,7 @@
           <a:lstStyle/>
           <a:p>
             <a:r>
-              <a:t>Rio: 14th percentile for overall intensity, 66th for fuel mix. Paris: 97th and 93rd. This is the contrast that makes the paper — the same test that dismisses Rio does not dismiss Paris.</a:t>
+              <a:t>Rio: 7th percentile for overall intensity, 34th for efficiency, 69th for fuel mix. Paris: 97th, 86th, 90th. Same panel and same window as every other result now - no window-switching to make the comparison.</a:t>
             </a:r>
           </a:p>
         </p:txBody>
@@ -1142,7 +1213,7 @@
           <a:lstStyle/>
           <a:p>
             <a:r>
-              <a:t>If one sentence survives, it is the bolded one. Neither vindication nor indictment.</a:t>
+              <a:t>Starting in 1990 adds 27 countries and 9% of global CO2, almost all post-Soviet and Eastern-bloc. Their post-1990 efficiency catch-up raises the pre-Paris baseline and absorbs the efficiency gain. We report both panels rather than choose.</a:t>
             </a:r>
           </a:p>
         </p:txBody>
@@ -1212,7 +1283,7 @@
           <a:lstStyle/>
           <a:p>
             <a:r>
-              <a:t>Forward-looking. Hands off to the national paper without previewing its results.</a:t>
+              <a:t>If one sentence survives, it is the bolded one. Neither vindication nor indictment.</a:t>
             </a:r>
           </a:p>
         </p:txBody>
@@ -4284,7 +4355,7 @@
                 </a:solidFill>
                 <a:latin typeface="Calibri"/>
               </a:rPr>
-              <a:t>182 countries · 99.8% of global CO2 · 1990-2021</a:t>
+              <a:t>155 countries · 90.6% of global CO2 · 1980-2021</a:t>
             </a:r>
           </a:p>
         </p:txBody>
@@ -4337,11 +4408,11 @@
             <a:r>
               <a:rPr sz="1200" b="1" i="0">
                 <a:solidFill>
-                  <a:srgbClr val="B33A3A"/>
-                </a:solidFill>
-                <a:latin typeface="Calibri"/>
-              </a:rPr>
-              <a:t>LIMITS</a:t>
+                  <a:srgbClr val="1B7837"/>
+                </a:solidFill>
+                <a:latin typeface="Calibri"/>
+              </a:rPr>
+              <a:t>WHAT WOULD SETTLE IT</a:t>
             </a:r>
           </a:p>
           <a:p>
@@ -4357,7 +4428,7 @@
                 </a:solidFill>
                 <a:latin typeface="Calibri"/>
               </a:rPr>
-              <a:t>What we are not claiming</a:t>
+              <a:t>Three things — and two of them are not at the world level</a:t>
             </a:r>
           </a:p>
         </p:txBody>
@@ -4370,8 +4441,8 @@
         </p:nvSpPr>
         <p:spPr>
           <a:xfrm>
-            <a:off x="502920" y="1463040"/>
-            <a:ext cx="5394960" cy="2377440"/>
+            <a:off x="502920" y="1508760"/>
+            <a:ext cx="10881360" cy="4572000"/>
           </a:xfrm>
           <a:prstGeom prst="rect">
             <a:avLst/>
@@ -4386,17 +4457,49 @@
           <a:p>
             <a:pPr algn="l">
               <a:spcAft>
-                <a:spcPts val="400"/>
+                <a:spcPts val="1200"/>
               </a:spcAft>
             </a:pPr>
             <a:r>
-              <a:rPr sz="1450" b="1" i="0">
-                <a:solidFill>
-                  <a:srgbClr val="212121"/>
-                </a:solidFill>
-                <a:latin typeface="Calibri"/>
-              </a:rPr>
-              <a:t>This is not causal</a:t>
+              <a:rPr sz="1500" b="0" i="0">
+                <a:solidFill>
+                  <a:srgbClr val="555555"/>
+                </a:solidFill>
+                <a:latin typeface="Calibri"/>
+              </a:rPr>
+              <a:t>Persistence. The size of the change is already detectable — the test could pick up an effect half this large within a couple more years of data. What it cannot yet tell us is whether the new fuel-mix trend holds. If it survives to Paris+20, a one-off technology shock becomes a much weaker explanation.</a:t>
+            </a:r>
+          </a:p>
+          <a:p>
+            <a:pPr algn="l">
+              <a:spcAft>
+                <a:spcPts val="1200"/>
+              </a:spcAft>
+            </a:pPr>
+            <a:r>
+              <a:rPr sz="1500" b="0" i="0">
+                <a:solidFill>
+                  <a:srgbClr val="555555"/>
+                </a:solidFill>
+                <a:latin typeface="Calibri"/>
+              </a:rPr>
+              <a:t>The demand side. Efficiency is the more informative half precisely because it has not moved: cheap solar explains a cleaner fuel mix, but it does not explain how much energy the world uses per unit of output. If efficiency accelerates over the next decade, that is much harder to attribute to technology alone.</a:t>
+            </a:r>
+          </a:p>
+          <a:p>
+            <a:pPr algn="l">
+              <a:spcAft>
+                <a:spcPts val="1400"/>
+              </a:spcAft>
+            </a:pPr>
+            <a:r>
+              <a:rPr sz="1500" b="0" i="0">
+                <a:solidFill>
+                  <a:srgbClr val="555555"/>
+                </a:solidFill>
+                <a:latin typeface="Calibri"/>
+              </a:rPr>
+              <a:t>Disaggregation. Paris works through national pledges, so its signature should appear country by country — where series are longer, placebo tests are independent, and a documentary record exists to say what accompanied each turn. That is the companion paper.</a:t>
             </a:r>
           </a:p>
           <a:p>
@@ -4406,178 +4509,13 @@
               </a:spcAft>
             </a:pPr>
             <a:r>
-              <a:rPr sz="1200" b="0" i="0">
-                <a:solidFill>
-                  <a:srgbClr val="555555"/>
-                </a:solidFill>
-                <a:latin typeface="Calibri"/>
-              </a:rPr>
-              <a:t>A turning point identifies when a trend changed, never why. Even a perfect fit at 2015 would be a coincidence of timing. And an agreement that prevented backsliding would leave no turning point at all — so the absence of one is not the absence of an effect.</a:t>
-            </a:r>
-          </a:p>
-        </p:txBody>
-      </p:sp>
-      <p:sp>
-        <p:nvSpPr>
-          <p:cNvPr id="4" name="TextBox 3"/>
-          <p:cNvSpPr txBox="1"/>
-          <p:nvPr/>
-        </p:nvSpPr>
-        <p:spPr>
-          <a:xfrm>
-            <a:off x="6400800" y="1463040"/>
-            <a:ext cx="5394960" cy="2377440"/>
-          </a:xfrm>
-          <a:prstGeom prst="rect">
-            <a:avLst/>
-          </a:prstGeom>
-          <a:noFill/>
-        </p:spPr>
-        <p:txBody>
-          <a:bodyPr wrap="square">
-            <a:spAutoFit/>
-          </a:bodyPr>
-          <a:lstStyle/>
-          <a:p>
-            <a:pPr algn="l">
-              <a:spcAft>
-                <a:spcPts val="400"/>
-              </a:spcAft>
-            </a:pPr>
-            <a:r>
-              <a:rPr sz="1450" b="1" i="0">
+              <a:rPr sz="1500" b="1" i="0">
                 <a:solidFill>
                   <a:srgbClr val="212121"/>
                 </a:solidFill>
                 <a:latin typeface="Calibri"/>
               </a:rPr>
-              <a:t>The window matters</a:t>
-            </a:r>
-          </a:p>
-          <a:p>
-            <a:pPr algn="l">
-              <a:spcAft>
-                <a:spcPts val="0"/>
-              </a:spcAft>
-            </a:pPr>
-            <a:r>
-              <a:rPr sz="1200" b="0" i="0">
-                <a:solidFill>
-                  <a:srgbClr val="555555"/>
-                </a:solidFill>
-                <a:latin typeface="Calibri"/>
-              </a:rPr>
-              <a:t>Paris ranks 97th percentile against candidate years on a 1980-start series and lower on a 1990-start one; the fuel-mix result holds above the 90th in both. We report both rather than the flattering one.</a:t>
-            </a:r>
-          </a:p>
-        </p:txBody>
-      </p:sp>
-      <p:sp>
-        <p:nvSpPr>
-          <p:cNvPr id="5" name="TextBox 4"/>
-          <p:cNvSpPr txBox="1"/>
-          <p:nvPr/>
-        </p:nvSpPr>
-        <p:spPr>
-          <a:xfrm>
-            <a:off x="502920" y="3977639"/>
-            <a:ext cx="5394960" cy="2377440"/>
-          </a:xfrm>
-          <a:prstGeom prst="rect">
-            <a:avLst/>
-          </a:prstGeom>
-          <a:noFill/>
-        </p:spPr>
-        <p:txBody>
-          <a:bodyPr wrap="square">
-            <a:spAutoFit/>
-          </a:bodyPr>
-          <a:lstStyle/>
-          <a:p>
-            <a:pPr algn="l">
-              <a:spcAft>
-                <a:spcPts val="400"/>
-              </a:spcAft>
-            </a:pPr>
-            <a:r>
-              <a:rPr sz="1450" b="1" i="0">
-                <a:solidFill>
-                  <a:srgbClr val="212121"/>
-                </a:solidFill>
-                <a:latin typeface="Calibri"/>
-              </a:rPr>
-              <a:t>Coverage and vintage</a:t>
-            </a:r>
-          </a:p>
-          <a:p>
-            <a:pPr algn="l">
-              <a:spcAft>
-                <a:spcPts val="0"/>
-              </a:spcAft>
-            </a:pPr>
-            <a:r>
-              <a:rPr sz="1200" b="0" i="0">
-                <a:solidFill>
-                  <a:srgbClr val="555555"/>
-                </a:solidFill>
-                <a:latin typeface="Calibri"/>
-              </a:rPr>
-              <a:t>182 countries and 99.8% of CO2, but only 13 gaps interpolated and the series stops in 2021 because 2022-23 reporting is incomplete. Adding those two years on partial coverage would overstate the acceleration.</a:t>
-            </a:r>
-          </a:p>
-        </p:txBody>
-      </p:sp>
-      <p:sp>
-        <p:nvSpPr>
-          <p:cNvPr id="6" name="TextBox 5"/>
-          <p:cNvSpPr txBox="1"/>
-          <p:nvPr/>
-        </p:nvSpPr>
-        <p:spPr>
-          <a:xfrm>
-            <a:off x="6400800" y="3977639"/>
-            <a:ext cx="5394960" cy="2377440"/>
-          </a:xfrm>
-          <a:prstGeom prst="rect">
-            <a:avLst/>
-          </a:prstGeom>
-          <a:noFill/>
-        </p:spPr>
-        <p:txBody>
-          <a:bodyPr wrap="square">
-            <a:spAutoFit/>
-          </a:bodyPr>
-          <a:lstStyle/>
-          <a:p>
-            <a:pPr algn="l">
-              <a:spcAft>
-                <a:spcPts val="400"/>
-              </a:spcAft>
-            </a:pPr>
-            <a:r>
-              <a:rPr sz="1450" b="1" i="0">
-                <a:solidFill>
-                  <a:srgbClr val="212121"/>
-                </a:solidFill>
-                <a:latin typeface="Calibri"/>
-              </a:rPr>
-              <a:t>Production-based accounting</a:t>
-            </a:r>
-          </a:p>
-          <a:p>
-            <a:pPr algn="l">
-              <a:spcAft>
-                <a:spcPts val="0"/>
-              </a:spcAft>
-            </a:pPr>
-            <a:r>
-              <a:rPr sz="1200" b="0" i="0">
-                <a:solidFill>
-                  <a:srgbClr val="555555"/>
-                </a:solidFill>
-                <a:latin typeface="Calibri"/>
-              </a:rPr>
-              <a:t>Emissions are counted where they are produced. At the world level that is the right frame — global production equals global consumption — but it matters for the national work that follows.</a:t>
+              <a:t>The question we would put to the field: should treaty assessment be built on intensity turning points and placebo discipline, rather than on emissions levels and anniversaries?</a:t>
             </a:r>
           </a:p>
         </p:txBody>
@@ -4608,6 +4546,299 @@
         </p:nvSpPr>
         <p:spPr>
           <a:xfrm>
+            <a:off x="502920" y="274320"/>
+            <a:ext cx="11201400" cy="914400"/>
+          </a:xfrm>
+          <a:prstGeom prst="rect">
+            <a:avLst/>
+          </a:prstGeom>
+          <a:noFill/>
+        </p:spPr>
+        <p:txBody>
+          <a:bodyPr wrap="square">
+            <a:spAutoFit/>
+          </a:bodyPr>
+          <a:lstStyle/>
+          <a:p>
+            <a:pPr algn="l">
+              <a:spcAft>
+                <a:spcPts val="200"/>
+              </a:spcAft>
+            </a:pPr>
+            <a:r>
+              <a:rPr sz="1200" b="1" i="0">
+                <a:solidFill>
+                  <a:srgbClr val="B33A3A"/>
+                </a:solidFill>
+                <a:latin typeface="Calibri"/>
+              </a:rPr>
+              <a:t>LIMITS</a:t>
+            </a:r>
+          </a:p>
+          <a:p>
+            <a:pPr algn="l">
+              <a:spcAft>
+                <a:spcPts val="0"/>
+              </a:spcAft>
+            </a:pPr>
+            <a:r>
+              <a:rPr sz="2400" b="1" i="0">
+                <a:solidFill>
+                  <a:srgbClr val="212121"/>
+                </a:solidFill>
+                <a:latin typeface="Calibri"/>
+              </a:rPr>
+              <a:t>What we are not claiming</a:t>
+            </a:r>
+          </a:p>
+        </p:txBody>
+      </p:sp>
+      <p:sp>
+        <p:nvSpPr>
+          <p:cNvPr id="3" name="TextBox 2"/>
+          <p:cNvSpPr txBox="1"/>
+          <p:nvPr/>
+        </p:nvSpPr>
+        <p:spPr>
+          <a:xfrm>
+            <a:off x="502920" y="1463040"/>
+            <a:ext cx="5394960" cy="2377440"/>
+          </a:xfrm>
+          <a:prstGeom prst="rect">
+            <a:avLst/>
+          </a:prstGeom>
+          <a:noFill/>
+        </p:spPr>
+        <p:txBody>
+          <a:bodyPr wrap="square">
+            <a:spAutoFit/>
+          </a:bodyPr>
+          <a:lstStyle/>
+          <a:p>
+            <a:pPr algn="l">
+              <a:spcAft>
+                <a:spcPts val="400"/>
+              </a:spcAft>
+            </a:pPr>
+            <a:r>
+              <a:rPr sz="1450" b="1" i="0">
+                <a:solidFill>
+                  <a:srgbClr val="212121"/>
+                </a:solidFill>
+                <a:latin typeface="Calibri"/>
+              </a:rPr>
+              <a:t>This is not causal</a:t>
+            </a:r>
+          </a:p>
+          <a:p>
+            <a:pPr algn="l">
+              <a:spcAft>
+                <a:spcPts val="0"/>
+              </a:spcAft>
+            </a:pPr>
+            <a:r>
+              <a:rPr sz="1200" b="0" i="0">
+                <a:solidFill>
+                  <a:srgbClr val="555555"/>
+                </a:solidFill>
+                <a:latin typeface="Calibri"/>
+              </a:rPr>
+              <a:t>A turning point identifies when a trend changed, never why. Even a perfect fit at 2015 would be a coincidence of timing. And an agreement that prevented backsliding would leave no turning point at all — so the absence of one is not the absence of an effect.</a:t>
+            </a:r>
+          </a:p>
+        </p:txBody>
+      </p:sp>
+      <p:sp>
+        <p:nvSpPr>
+          <p:cNvPr id="4" name="TextBox 3"/>
+          <p:cNvSpPr txBox="1"/>
+          <p:nvPr/>
+        </p:nvSpPr>
+        <p:spPr>
+          <a:xfrm>
+            <a:off x="6400800" y="1463040"/>
+            <a:ext cx="5394960" cy="2377440"/>
+          </a:xfrm>
+          <a:prstGeom prst="rect">
+            <a:avLst/>
+          </a:prstGeom>
+          <a:noFill/>
+        </p:spPr>
+        <p:txBody>
+          <a:bodyPr wrap="square">
+            <a:spAutoFit/>
+          </a:bodyPr>
+          <a:lstStyle/>
+          <a:p>
+            <a:pPr algn="l">
+              <a:spcAft>
+                <a:spcPts val="400"/>
+              </a:spcAft>
+            </a:pPr>
+            <a:r>
+              <a:rPr sz="1450" b="1" i="0">
+                <a:solidFill>
+                  <a:srgbClr val="212121"/>
+                </a:solidFill>
+                <a:latin typeface="Calibri"/>
+              </a:rPr>
+              <a:t>Which countries, and how far back</a:t>
+            </a:r>
+          </a:p>
+          <a:p>
+            <a:pPr algn="l">
+              <a:spcAft>
+                <a:spcPts val="0"/>
+              </a:spcAft>
+            </a:pPr>
+            <a:r>
+              <a:rPr sz="1200" b="0" i="0">
+                <a:solidFill>
+                  <a:srgbClr val="555555"/>
+                </a:solidFill>
+                <a:latin typeface="Calibri"/>
+              </a:rPr>
+              <a:t>Starting in 1980 buys 35 years of pre-treaty history but drops 27 countries and 9% of global CO2 — nearly all post-Soviet states, which have no separate 1980 series. Starting in 1990 recovers them and removes the efficiency result. Both are reported.</a:t>
+            </a:r>
+          </a:p>
+        </p:txBody>
+      </p:sp>
+      <p:sp>
+        <p:nvSpPr>
+          <p:cNvPr id="5" name="TextBox 4"/>
+          <p:cNvSpPr txBox="1"/>
+          <p:nvPr/>
+        </p:nvSpPr>
+        <p:spPr>
+          <a:xfrm>
+            <a:off x="502920" y="3977639"/>
+            <a:ext cx="5394960" cy="2377440"/>
+          </a:xfrm>
+          <a:prstGeom prst="rect">
+            <a:avLst/>
+          </a:prstGeom>
+          <a:noFill/>
+        </p:spPr>
+        <p:txBody>
+          <a:bodyPr wrap="square">
+            <a:spAutoFit/>
+          </a:bodyPr>
+          <a:lstStyle/>
+          <a:p>
+            <a:pPr algn="l">
+              <a:spcAft>
+                <a:spcPts val="400"/>
+              </a:spcAft>
+            </a:pPr>
+            <a:r>
+              <a:rPr sz="1450" b="1" i="0">
+                <a:solidFill>
+                  <a:srgbClr val="212121"/>
+                </a:solidFill>
+                <a:latin typeface="Calibri"/>
+              </a:rPr>
+              <a:t>Coverage and vintage</a:t>
+            </a:r>
+          </a:p>
+          <a:p>
+            <a:pPr algn="l">
+              <a:spcAft>
+                <a:spcPts val="0"/>
+              </a:spcAft>
+            </a:pPr>
+            <a:r>
+              <a:rPr sz="1200" b="0" i="0">
+                <a:solidFill>
+                  <a:srgbClr val="555555"/>
+                </a:solidFill>
+                <a:latin typeface="Calibri"/>
+              </a:rPr>
+              <a:t>155 countries and 91% of CO2, with only 14 gaps interpolated. The series stops in 2021 because 2022-23 reporting is incomplete — adding those years on partial coverage would overstate the acceleration.</a:t>
+            </a:r>
+          </a:p>
+        </p:txBody>
+      </p:sp>
+      <p:sp>
+        <p:nvSpPr>
+          <p:cNvPr id="6" name="TextBox 5"/>
+          <p:cNvSpPr txBox="1"/>
+          <p:nvPr/>
+        </p:nvSpPr>
+        <p:spPr>
+          <a:xfrm>
+            <a:off x="6400800" y="3977639"/>
+            <a:ext cx="5394960" cy="2377440"/>
+          </a:xfrm>
+          <a:prstGeom prst="rect">
+            <a:avLst/>
+          </a:prstGeom>
+          <a:noFill/>
+        </p:spPr>
+        <p:txBody>
+          <a:bodyPr wrap="square">
+            <a:spAutoFit/>
+          </a:bodyPr>
+          <a:lstStyle/>
+          <a:p>
+            <a:pPr algn="l">
+              <a:spcAft>
+                <a:spcPts val="400"/>
+              </a:spcAft>
+            </a:pPr>
+            <a:r>
+              <a:rPr sz="1450" b="1" i="0">
+                <a:solidFill>
+                  <a:srgbClr val="212121"/>
+                </a:solidFill>
+                <a:latin typeface="Calibri"/>
+              </a:rPr>
+              <a:t>Production-based accounting</a:t>
+            </a:r>
+          </a:p>
+          <a:p>
+            <a:pPr algn="l">
+              <a:spcAft>
+                <a:spcPts val="0"/>
+              </a:spcAft>
+            </a:pPr>
+            <a:r>
+              <a:rPr sz="1200" b="0" i="0">
+                <a:solidFill>
+                  <a:srgbClr val="555555"/>
+                </a:solidFill>
+                <a:latin typeface="Calibri"/>
+              </a:rPr>
+              <a:t>Emissions are counted where they are produced. At the world level that is the right frame — global production equals global consumption — but it matters for the national work that follows.</a:t>
+            </a:r>
+          </a:p>
+        </p:txBody>
+      </p:sp>
+    </p:spTree>
+  </p:cSld>
+  <p:clrMapOvr>
+    <a:masterClrMapping/>
+  </p:clrMapOvr>
+</p:sld>
+</file>
+
+<file path=ppt/slides/slide12.xml><?xml version="1.0" encoding="utf-8"?>
+<p:sld xmlns:a="http://schemas.openxmlformats.org/drawingml/2006/main" xmlns:p="http://schemas.openxmlformats.org/presentationml/2006/main" xmlns:r="http://schemas.openxmlformats.org/officeDocument/2006/relationships">
+  <p:cSld>
+    <p:spTree>
+      <p:nvGrpSpPr>
+        <p:cNvPr id="1" name=""/>
+        <p:cNvGrpSpPr/>
+        <p:nvPr/>
+      </p:nvGrpSpPr>
+      <p:grpSpPr/>
+      <p:sp>
+        <p:nvSpPr>
+          <p:cNvPr id="2" name="TextBox 1"/>
+          <p:cNvSpPr txBox="1"/>
+          <p:nvPr/>
+        </p:nvSpPr>
+        <p:spPr>
+          <a:xfrm>
             <a:off x="822960" y="1463040"/>
             <a:ext cx="10515600" cy="1828800"/>
           </a:xfrm>
@@ -4699,7 +4930,7 @@
                 </a:solidFill>
                 <a:latin typeface="Calibri"/>
               </a:rPr>
-              <a:t>Emissions growth fell by two thirds after Paris — but two thirds of that is slower economic growth.</a:t>
+              <a:t>Emissions growth fell by two thirds after Paris — but over half of that is a slower economy.</a:t>
             </a:r>
           </a:p>
           <a:p>
@@ -4724,7 +4955,7 @@
                 </a:solidFill>
                 <a:latin typeface="Calibri"/>
               </a:rPr>
-              <a:t>The fuel mix is the one component beating its long-run trend. Energy efficiency has not changed at all.</a:t>
+              <a:t>Carbon intensity is beating 35 years of trend, significantly, on every panel we build.</a:t>
             </a:r>
           </a:p>
           <a:p>
@@ -4774,7 +5005,7 @@
                 </a:solidFill>
                 <a:latin typeface="Calibri"/>
               </a:rPr>
-              <a:t>And the change coincides with the clean-energy cost collapse, which six years of data cannot separate from it.</a:t>
+              <a:t>But the best fit is 2014, not 2015, and the turn coincides with the clean-energy cost collapse.</a:t>
             </a:r>
           </a:p>
         </p:txBody>
@@ -4925,7 +5156,7 @@
                 </a:solidFill>
                 <a:latin typeface="Calibri"/>
               </a:rPr>
-              <a:t>The good news is real. Across essentially every country that reports, CO2 growth fell from +2.1% a year over the Rio-to-Paris quarter century to +0.7% a year since. Worst-case scenarios have moved off the table.</a:t>
+              <a:t>The good news is real. Across the countries we can track consistently since 1980, CO2 growth fell from +2.5% a year over the Rio-to-Paris quarter century to +0.8% a year since. Worst-case scenarios have moved off the table.</a:t>
             </a:r>
           </a:p>
           <a:p>
@@ -5188,7 +5419,7 @@
                 </a:solidFill>
                 <a:latin typeface="Calibri"/>
               </a:rPr>
-              <a:t>Take every country still reporting in 2021 with almost complete data, fill the handful of gaps, and add them up. That is 182 countries and 99.8% of global CO2. We stop at 2021 because most countries have not reported 2022-23 yet.</a:t>
+              <a:t>Take every country still reporting in 2021 with almost complete data back to 1980, fill the handful of gaps, and add them up. That is 155 countries and 91% of global CO2. We stop at 2021 because most countries have not reported 2022-23 yet.</a:t>
             </a:r>
           </a:p>
         </p:txBody>
@@ -5580,7 +5811,7 @@
                 </a:solidFill>
                 <a:latin typeface="Calibri"/>
               </a:rPr>
-              <a:t>WHAT WE FIND · 1 OF 3</a:t>
+              <a:t>WHAT WE FIND · 1 OF 4</a:t>
             </a:r>
           </a:p>
           <a:p>
@@ -5596,7 +5827,7 @@
                 </a:solidFill>
                 <a:latin typeface="Calibri"/>
               </a:rPr>
-              <a:t>Emissions growth fell — but mostly because growth fell</a:t>
+              <a:t>Emissions growth fell — and over half of that is slower growth</a:t>
             </a:r>
           </a:p>
         </p:txBody>
@@ -5644,7 +5875,7 @@
                 </a:solidFill>
                 <a:latin typeface="Calibri"/>
               </a:rPr>
-              <a:t>Two thirds of the slowdown is slower economic growth. The fuel mix improved. Energy efficiency did not change at all.</a:t>
+              <a:t>Of the 1.8-point slowdown, 1.0 point is a slower economy. The remaining 0.7 is real decarbonization, split between cleaner fuel and efficiency.</a:t>
             </a:r>
           </a:p>
         </p:txBody>
@@ -5725,7 +5956,7 @@
                 </a:solidFill>
                 <a:latin typeface="Calibri"/>
               </a:rPr>
-              <a:t>WHAT WE FIND · 2 OF 3</a:t>
+              <a:t>WHAT WE FIND · 2 OF 4</a:t>
             </a:r>
           </a:p>
           <a:p>
@@ -5741,7 +5972,7 @@
                 </a:solidFill>
                 <a:latin typeface="Calibri"/>
               </a:rPr>
-              <a:t>The fuel mix broke away from its trend. Efficiency stayed on it.</a:t>
+              <a:t>Since Paris the world has beaten its own long-run trend</a:t>
             </a:r>
           </a:p>
         </p:txBody>
@@ -5789,7 +6020,7 @@
                 </a:solidFill>
                 <a:latin typeface="Calibri"/>
               </a:rPr>
-              <a:t>Cleaner energy is the one place the world is now beating its own long-run trend — and it is where climate policy would show up first.</a:t>
+              <a:t>All three measures are improving faster than 35 years of trend predicted — and the effect is largest on overall carbon intensity.</a:t>
             </a:r>
           </a:p>
         </p:txBody>
@@ -5870,7 +6101,7 @@
                 </a:solidFill>
                 <a:latin typeface="Calibri"/>
               </a:rPr>
-              <a:t>WHAT WE FIND · 3 OF 3</a:t>
+              <a:t>WHAT WE FIND · 3 OF 4</a:t>
             </a:r>
           </a:p>
           <a:p>
@@ -5982,7 +6213,7 @@
                 </a:solidFill>
                 <a:latin typeface="Calibri"/>
               </a:rPr>
-              <a:t>the evidence is a plateau across 2012-2016, not a spike at 2015 — and that window coincides exactly with the collapse in clean-energy costs.</a:t>
+              <a:t>the best-fitting year is 2014, not 2015, and the fuel mix prefers an older shift in the late 1980s — so the evidence is a plateau, not a spike, and it coincides with the clean-energy cost collapse.</a:t>
             </a:r>
           </a:p>
         </p:txBody>
@@ -6059,11 +6290,11 @@
             <a:r>
               <a:rPr sz="1200" b="1" i="0">
                 <a:solidFill>
-                  <a:srgbClr val="1B7837"/>
-                </a:solidFill>
-                <a:latin typeface="Calibri"/>
-              </a:rPr>
-              <a:t>WHAT IT ADDS UP TO</a:t>
+                  <a:srgbClr val="C77F00"/>
+                </a:solidFill>
+                <a:latin typeface="Calibri"/>
+              </a:rPr>
+              <a:t>WHAT WE FIND · 4 OF 4</a:t>
             </a:r>
           </a:p>
           <a:p>
@@ -6079,7 +6310,7 @@
                 </a:solidFill>
                 <a:latin typeface="Calibri"/>
               </a:rPr>
-              <a:t>Consistent with Paris. Not attributable to it.</a:t>
+              <a:t>One result depends on which countries you include</a:t>
             </a:r>
           </a:p>
         </p:txBody>
@@ -6092,8 +6323,8 @@
         </p:nvSpPr>
         <p:spPr>
           <a:xfrm>
-            <a:off x="502920" y="1463040"/>
-            <a:ext cx="5532120" cy="4937760"/>
+            <a:off x="502920" y="1188720"/>
+            <a:ext cx="11201400" cy="457200"/>
           </a:xfrm>
           <a:prstGeom prst="rect">
             <a:avLst/>
@@ -6106,35 +6337,28 @@
           </a:bodyPr>
           <a:lstStyle/>
           <a:p>
-            <a:pPr algn="l">
-              <a:spcAft>
-                <a:spcPts val="600"/>
-              </a:spcAft>
-            </a:pPr>
-            <a:r>
-              <a:rPr sz="1500" b="1" i="0">
-                <a:solidFill>
-                  <a:srgbClr val="1B7837"/>
-                </a:solidFill>
-                <a:latin typeface="Calibri"/>
-              </a:rPr>
-              <a:t>What we can say</a:t>
-            </a:r>
-          </a:p>
-          <a:p>
-            <a:pPr algn="l">
+            <a:pPr>
               <a:spcAft>
                 <a:spcPts val="0"/>
               </a:spcAft>
             </a:pPr>
             <a:r>
-              <a:rPr sz="1350" b="0" i="0">
-                <a:solidFill>
-                  <a:srgbClr val="555555"/>
-                </a:solidFill>
-                <a:latin typeface="Calibri"/>
-              </a:rPr>
-              <a:t>Emissions growth has fallen by two thirds, and part of that is a genuine improvement in the world's fuel mix that beats fifty years of trend. That improvement sits in the supply side, exactly where climate policy and clean technology operate. And 2015 ranks near the top of all candidate turning-point years — a test the 1992 Rio agreement fails badly.</a:t>
+              <a:rPr sz="1400" b="1" i="0">
+                <a:solidFill>
+                  <a:srgbClr val="C77F00"/>
+                </a:solidFill>
+                <a:latin typeface="Calibri"/>
+              </a:rPr>
+              <a:t>Takeaway:  </a:t>
+            </a:r>
+            <a:r>
+              <a:rPr sz="1400" b="1" i="0">
+                <a:solidFill>
+                  <a:srgbClr val="212121"/>
+                </a:solidFill>
+                <a:latin typeface="Calibri"/>
+              </a:rPr>
+              <a:t>The overall acceleration holds on every panel. Whether efficiency contributed depends on whether post-Soviet economies are in the sample.</a:t>
             </a:r>
           </a:p>
         </p:txBody>
@@ -6147,8 +6371,8 @@
         </p:nvSpPr>
         <p:spPr>
           <a:xfrm>
-            <a:off x="6400800" y="1463040"/>
-            <a:ext cx="5303520" cy="4937760"/>
+            <a:off x="502920" y="1700784"/>
+            <a:ext cx="11201400" cy="384048"/>
           </a:xfrm>
           <a:prstGeom prst="rect">
             <a:avLst/>
@@ -6161,55 +6385,56 @@
           </a:bodyPr>
           <a:lstStyle/>
           <a:p>
-            <a:pPr algn="l">
-              <a:spcAft>
-                <a:spcPts val="600"/>
-              </a:spcAft>
-            </a:pPr>
-            <a:r>
-              <a:rPr sz="1500" b="1" i="0">
-                <a:solidFill>
-                  <a:srgbClr val="B33A3A"/>
-                </a:solidFill>
-                <a:latin typeface="Calibri"/>
-              </a:rPr>
-              <a:t>What we cannot</a:t>
-            </a:r>
-          </a:p>
-          <a:p>
-            <a:pPr algn="l">
-              <a:spcAft>
-                <a:spcPts val="1000"/>
-              </a:spcAft>
-            </a:pPr>
-            <a:r>
-              <a:rPr sz="1350" b="0" i="0">
-                <a:solidFill>
-                  <a:srgbClr val="555555"/>
-                </a:solidFill>
-                <a:latin typeface="Calibri"/>
-              </a:rPr>
-              <a:t>Most of the emissions slowdown is slower economic growth, not decarbonization. Energy efficiency did not respond at all. And the evidence for a turn is spread across 2012 to 2016 rather than concentrated on the treaty year — a window the test cannot resolve, and one that coincides exactly with the collapse in clean-energy costs.</a:t>
-            </a:r>
-          </a:p>
-          <a:p>
-            <a:pPr algn="l">
+            <a:pPr>
               <a:spcAft>
                 <a:spcPts val="0"/>
               </a:spcAft>
             </a:pPr>
             <a:r>
-              <a:rPr sz="1350" b="1" i="0">
-                <a:solidFill>
-                  <a:srgbClr val="212121"/>
-                </a:solidFill>
-                <a:latin typeface="Calibri"/>
-              </a:rPr>
-              <a:t>The one thing that changed after Paris is the one thing cheap clean energy would also have changed.</a:t>
-            </a:r>
-          </a:p>
-        </p:txBody>
-      </p:sp>
+              <a:rPr sz="1200" b="1" i="0">
+                <a:solidFill>
+                  <a:srgbClr val="B33A3A"/>
+                </a:solidFill>
+                <a:latin typeface="Calibri"/>
+              </a:rPr>
+              <a:t>But:  </a:t>
+            </a:r>
+            <a:r>
+              <a:rPr sz="1200" b="0" i="0">
+                <a:solidFill>
+                  <a:srgbClr val="555555"/>
+                </a:solidFill>
+                <a:latin typeface="Calibri"/>
+              </a:rPr>
+              <a:t>those economies cannot be carried back to 1980 — they did not exist as separate series — so this is a genuine trade-off between history and coverage, not a modelling choice.</a:t>
+            </a:r>
+          </a:p>
+        </p:txBody>
+      </p:sp>
+      <p:pic>
+        <p:nvPicPr>
+          <p:cNvPr id="5" name="Picture 4" descr="w2_fig6_panel_robustness.png"/>
+          <p:cNvPicPr>
+            <a:picLocks noChangeAspect="1"/>
+          </p:cNvPicPr>
+          <p:nvPr/>
+        </p:nvPicPr>
+        <p:blipFill>
+          <a:blip r:embed="rId2"/>
+          <a:stretch>
+            <a:fillRect/>
+          </a:stretch>
+        </p:blipFill>
+        <p:spPr>
+          <a:xfrm>
+            <a:off x="1285993" y="2121408"/>
+            <a:ext cx="9616965" cy="4462272"/>
+          </a:xfrm>
+          <a:prstGeom prst="rect">
+            <a:avLst/>
+          </a:prstGeom>
+        </p:spPr>
+      </p:pic>
     </p:spTree>
   </p:cSld>
   <p:clrMapOvr>
@@ -6262,7 +6487,7 @@
                 </a:solidFill>
                 <a:latin typeface="Calibri"/>
               </a:rPr>
-              <a:t>WHAT WOULD SETTLE IT</a:t>
+              <a:t>WHAT IT ADDS UP TO</a:t>
             </a:r>
           </a:p>
           <a:p>
@@ -6278,7 +6503,7 @@
                 </a:solidFill>
                 <a:latin typeface="Calibri"/>
               </a:rPr>
-              <a:t>Three things — and two of them are not at the world level</a:t>
+              <a:t>Consistent with Paris. Not attributable to it.</a:t>
             </a:r>
           </a:p>
         </p:txBody>
@@ -6291,8 +6516,8 @@
         </p:nvSpPr>
         <p:spPr>
           <a:xfrm>
-            <a:off x="502920" y="1508760"/>
-            <a:ext cx="10881360" cy="4572000"/>
+            <a:off x="502920" y="1463040"/>
+            <a:ext cx="5532120" cy="4937760"/>
           </a:xfrm>
           <a:prstGeom prst="rect">
             <a:avLst/>
@@ -6307,49 +6532,17 @@
           <a:p>
             <a:pPr algn="l">
               <a:spcAft>
-                <a:spcPts val="1200"/>
+                <a:spcPts val="600"/>
               </a:spcAft>
             </a:pPr>
             <a:r>
-              <a:rPr sz="1500" b="0" i="0">
-                <a:solidFill>
-                  <a:srgbClr val="555555"/>
-                </a:solidFill>
-                <a:latin typeface="Calibri"/>
-              </a:rPr>
-              <a:t>Persistence. The size of the change is already detectable — the test could pick up an effect half this large within a couple more years of data. What it cannot yet tell us is whether the new fuel-mix trend holds. If it survives to Paris+20, a one-off technology shock becomes a much weaker explanation.</a:t>
-            </a:r>
-          </a:p>
-          <a:p>
-            <a:pPr algn="l">
-              <a:spcAft>
-                <a:spcPts val="1200"/>
-              </a:spcAft>
-            </a:pPr>
-            <a:r>
-              <a:rPr sz="1500" b="0" i="0">
-                <a:solidFill>
-                  <a:srgbClr val="555555"/>
-                </a:solidFill>
-                <a:latin typeface="Calibri"/>
-              </a:rPr>
-              <a:t>The demand side. Efficiency is the more informative half precisely because it has not moved: cheap solar explains a cleaner fuel mix, but it does not explain how much energy the world uses per unit of output. If efficiency accelerates over the next decade, that is much harder to attribute to technology alone.</a:t>
-            </a:r>
-          </a:p>
-          <a:p>
-            <a:pPr algn="l">
-              <a:spcAft>
-                <a:spcPts val="1400"/>
-              </a:spcAft>
-            </a:pPr>
-            <a:r>
-              <a:rPr sz="1500" b="0" i="0">
-                <a:solidFill>
-                  <a:srgbClr val="555555"/>
-                </a:solidFill>
-                <a:latin typeface="Calibri"/>
-              </a:rPr>
-              <a:t>Disaggregation. Paris works through national pledges, so its signature should appear country by country — where series are longer, placebo tests are independent, and a documentary record exists to say what accompanied each turn. That is the companion paper.</a:t>
+              <a:rPr sz="1500" b="1" i="0">
+                <a:solidFill>
+                  <a:srgbClr val="1B7837"/>
+                </a:solidFill>
+                <a:latin typeface="Calibri"/>
+              </a:rPr>
+              <a:t>What we can say</a:t>
             </a:r>
           </a:p>
           <a:p>
@@ -6359,13 +6552,84 @@
               </a:spcAft>
             </a:pPr>
             <a:r>
+              <a:rPr sz="1350" b="0" i="0">
+                <a:solidFill>
+                  <a:srgbClr val="555555"/>
+                </a:solidFill>
+                <a:latin typeface="Calibri"/>
+              </a:rPr>
+              <a:t>Emissions growth has fallen by two thirds, and roughly 0.7 points of that is genuine decarbonization rather than a slower economy. Carbon intensity is improving significantly faster than 35 years of trend predicted, on every panel we build. And 2015 ranks near the top of all candidate turning-point years — a test the 1992 Rio agreement fails badly.</a:t>
+            </a:r>
+          </a:p>
+        </p:txBody>
+      </p:sp>
+      <p:sp>
+        <p:nvSpPr>
+          <p:cNvPr id="4" name="TextBox 3"/>
+          <p:cNvSpPr txBox="1"/>
+          <p:nvPr/>
+        </p:nvSpPr>
+        <p:spPr>
+          <a:xfrm>
+            <a:off x="6400800" y="1463040"/>
+            <a:ext cx="5303520" cy="4937760"/>
+          </a:xfrm>
+          <a:prstGeom prst="rect">
+            <a:avLst/>
+          </a:prstGeom>
+          <a:noFill/>
+        </p:spPr>
+        <p:txBody>
+          <a:bodyPr wrap="square">
+            <a:spAutoFit/>
+          </a:bodyPr>
+          <a:lstStyle/>
+          <a:p>
+            <a:pPr algn="l">
+              <a:spcAft>
+                <a:spcPts val="600"/>
+              </a:spcAft>
+            </a:pPr>
+            <a:r>
               <a:rPr sz="1500" b="1" i="0">
                 <a:solidFill>
+                  <a:srgbClr val="B33A3A"/>
+                </a:solidFill>
+                <a:latin typeface="Calibri"/>
+              </a:rPr>
+              <a:t>What we cannot</a:t>
+            </a:r>
+          </a:p>
+          <a:p>
+            <a:pPr algn="l">
+              <a:spcAft>
+                <a:spcPts val="1000"/>
+              </a:spcAft>
+            </a:pPr>
+            <a:r>
+              <a:rPr sz="1350" b="0" i="0">
+                <a:solidFill>
+                  <a:srgbClr val="555555"/>
+                </a:solidFill>
+                <a:latin typeface="Calibri"/>
+              </a:rPr>
+              <a:t>Over half the emissions slowdown is slower economic growth, not decarbonization. The best-fitting turning point is 2014 rather than 2015, and the evidence is a plateau the test cannot resolve. That plateau coincides exactly with the collapse in clean-energy costs. And the efficiency contribution disappears once post-Soviet economies are added back.</a:t>
+            </a:r>
+          </a:p>
+          <a:p>
+            <a:pPr algn="l">
+              <a:spcAft>
+                <a:spcPts val="0"/>
+              </a:spcAft>
+            </a:pPr>
+            <a:r>
+              <a:rPr sz="1350" b="1" i="0">
+                <a:solidFill>
                   <a:srgbClr val="212121"/>
                 </a:solidFill>
                 <a:latin typeface="Calibri"/>
               </a:rPr>
-              <a:t>The question we would put to the field: should treaty assessment be built on intensity turning points and placebo discipline, rather than on emissions levels and anniversaries?</a:t>
+              <a:t>The change is real, and it arrives exactly when cheap clean energy did. The record cannot tell those two apart.</a:t>
             </a:r>
           </a:p>
         </p:txBody>

--- a/carbon_breakpoints_takeaway_figures/paris_at_ten_world_deck.pptx
+++ b/carbon_breakpoints_takeaway_figures/paris_at_ten_world_deck.pptx
@@ -16,7 +16,6 @@
     <p:sldId id="264" r:id="rId16"/>
     <p:sldId id="265" r:id="rId17"/>
     <p:sldId id="266" r:id="rId18"/>
-    <p:sldId id="267" r:id="rId19"/>
   </p:sldIdLst>
   <p:sldSz cx="12191695" cy="6858000" type="screen4x3"/>
   <p:notesSz cx="6858000" cy="9144000"/>
@@ -513,7 +512,7 @@
           <a:lstStyle/>
           <a:p>
             <a:r>
-              <a:t>World-level paper. Country-level mechanism analysis is the follow-on paper, referenced once at the end.</a:t>
+              <a:t>World-level paper. The country analysis is the follow-on. Every number here is from the true world aggregate unless stated; the specification grid is the robustness spine.</a:t>
             </a:r>
           </a:p>
         </p:txBody>
@@ -583,7 +582,7 @@
           <a:lstStyle/>
           <a:p>
             <a:r>
-              <a:t>Forward-looking. Hands off to the national paper without previewing its results.</a:t>
+              <a:t>Volunteer the GDP-concept issue; a referee will find it.</a:t>
             </a:r>
           </a:p>
         </p:txBody>
@@ -653,77 +652,7 @@
           <a:lstStyle/>
           <a:p>
             <a:r>
-              <a:t>Volunteer the window sensitivity — a referee will look for it.</a:t>
-            </a:r>
-          </a:p>
-        </p:txBody>
-      </p:sp>
-      <p:sp>
-        <p:nvSpPr>
-          <p:cNvPr id="4" name="Slide Number Placeholder 3"/>
-          <p:cNvSpPr>
-            <a:spLocks noGrp="1"/>
-          </p:cNvSpPr>
-          <p:nvPr>
-            <p:ph type="sldNum" idx="5" sz="quarter"/>
-          </p:nvPr>
-        </p:nvSpPr>
-        <p:spPr/>
-      </p:sp>
-    </p:spTree>
-  </p:cSld>
-  <p:clrMapOvr>
-    <a:masterClrMapping/>
-  </p:clrMapOvr>
-</p:notes>
-</file>
-
-<file path=ppt/notesSlides/notesSlide12.xml><?xml version="1.0" encoding="utf-8"?>
-<p:notes xmlns:a="http://schemas.openxmlformats.org/drawingml/2006/main" xmlns:p="http://schemas.openxmlformats.org/presentationml/2006/main" xmlns:r="http://schemas.openxmlformats.org/officeDocument/2006/relationships">
-  <p:cSld>
-    <p:spTree>
-      <p:nvGrpSpPr>
-        <p:cNvPr id="1" name=""/>
-        <p:cNvGrpSpPr/>
-        <p:nvPr/>
-      </p:nvGrpSpPr>
-      <p:grpSpPr>
-        <a:xfrm>
-          <a:off x="0" y="0"/>
-          <a:ext cx="0" cy="0"/>
-          <a:chOff x="0" y="0"/>
-          <a:chExt cx="0" cy="0"/>
-        </a:xfrm>
-      </p:grpSpPr>
-      <p:sp>
-        <p:nvSpPr>
-          <p:cNvPr id="2" name="Slide Image Placeholder 1"/>
-          <p:cNvSpPr>
-            <a:spLocks noGrp="1"/>
-          </p:cNvSpPr>
-          <p:nvPr>
-            <p:ph type="sldImg" idx="2"/>
-          </p:nvPr>
-        </p:nvSpPr>
-        <p:spPr/>
-      </p:sp>
-      <p:sp>
-        <p:nvSpPr>
-          <p:cNvPr id="3" name="Notes Placeholder 2"/>
-          <p:cNvSpPr>
-            <a:spLocks noGrp="1"/>
-          </p:cNvSpPr>
-          <p:nvPr>
-            <p:ph type="body" idx="3" sz="quarter"/>
-          </p:nvPr>
-        </p:nvSpPr>
-        <p:spPr/>
-        <p:txBody>
-          <a:bodyPr/>
-          <a:lstStyle/>
-          <a:p>
-            <a:r>
-              <a:t>Close on the reframed headline.</a:t>
+              <a:t>Close on the dating result, which is the robust one.</a:t>
             </a:r>
           </a:p>
         </p:txBody>
@@ -793,7 +722,7 @@
           <a:lstStyle/>
           <a:p>
             <a:r>
-              <a:t>Frame sympathetically, then set up the decomposition that structures the whole talk.</a:t>
+              <a:t>Sympathetic frame, then the decomposition that structures everything.</a:t>
             </a:r>
           </a:p>
         </p:txBody>
@@ -863,7 +792,7 @@
           <a:lstStyle/>
           <a:p>
             <a:r>
-              <a:t>One methodology slide. If asked for detail: two-segment regression with an autocorrelation-robust test, BIC for model choice, and a placebo sweep over candidate years.</a:t>
+              <a:t>Step 4 is the addition that matters: it caught an earlier overclaim of ours, which is exactly what it is for.</a:t>
             </a:r>
           </a:p>
         </p:txBody>
@@ -933,7 +862,7 @@
           <a:lstStyle/>
           <a:p>
             <a:r>
-              <a:t>155 countries, 90.6% of 2015 global CO2, 14 interpolated cells. The missing 9% is almost entirely post-Soviet and Eastern-bloc states, which did not exist as separate series in 1980 - the robustness slide adds them back. The 2022-23 cliff is a reporting lag, not a real change.</a:t>
+              <a:t>Unknown-break test: dominant break 1972 for carbon intensity (p = 0.002) and 1974 for efficiency (p &lt; 0.001); the fuel mix has no statistically significant single break at all (p = 0.14). BIC selects three breaks: 1973, 2001, 2012. Note this reproduces the frozen 1973 result on an independently built series.</a:t>
             </a:r>
           </a:p>
         </p:txBody>
@@ -1003,7 +932,7 @@
           <a:lstStyle/>
           <a:p>
             <a:r>
-              <a:t>Before → after: GDP +3.1 → +2.1; fuel mix +0.0 → -0.4; efficiency -0.6 → -0.9; CO2 +2.5 → +0.8. Roughly 56% of the slowdown is the economy, 44% is decarbonization.</a:t>
+              <a:t>Fuel mix: -0.52%/yr after the oil shocks, +0.02 from Rio to Paris, -0.70 since. Efficiency: -0.95, -1.02, -1.08. The 1990-2015 fuel-mix stall is the anomaly, not the recent improvement.</a:t>
             </a:r>
           </a:p>
         </p:txBody>
@@ -1073,7 +1002,7 @@
           <a:lstStyle/>
           <a:p>
             <a:r>
-              <a:t>Against the 1980-2015 trend: overall intensity -1.5 pp/yr (t = 4.5); efficiency -1.0 (t = 5.5); fuel mix -0.6 (t = 2.7). All three significant on this panel - but see the robustness slide, where efficiency does not survive adding the post-Soviet states.</a:t>
+              <a:t>89% of specifications for overall intensity, 93% for the fuel mix, 64% for efficiency. This is the single most robust finding in the paper and it does not depend on any construction choice.</a:t>
             </a:r>
           </a:p>
         </p:txBody>
@@ -1143,7 +1072,7 @@
           <a:lstStyle/>
           <a:p>
             <a:r>
-              <a:t>Rio: 7th percentile for overall intensity, 34th for efficiency, 69th for fuel mix. Paris: 97th, 86th, 90th. Same panel and same window as every other result now - no window-switching to make the comparison.</a:t>
+              <a:t>This corrects an earlier draft that reported Paris at the 97th percentile — that figure came from one constructed panel and does not survive the grid. Neither treaty year robustly outperforms its neighbours.</a:t>
             </a:r>
           </a:p>
         </p:txBody>
@@ -1213,7 +1142,7 @@
           <a:lstStyle/>
           <a:p>
             <a:r>
-              <a:t>Starting in 1990 adds 27 countries and 9% of global CO2, almost all post-Soviet and Eastern-bloc. Their post-1990 efficiency catch-up raises the pre-Paris baseline and absorbs the efficiency gain. We report both panels rather than choose.</a:t>
+              <a:t>The honest verdict. Neither vindication nor indictment — a dating result that happens to be inconvenient for attribution.</a:t>
             </a:r>
           </a:p>
         </p:txBody>
@@ -1283,7 +1212,7 @@
           <a:lstStyle/>
           <a:p>
             <a:r>
-              <a:t>If one sentence survives, it is the bolded one. Neither vindication nor indictment.</a:t>
+              <a:t>Forward-looking, and hands off to the national paper.</a:t>
             </a:r>
           </a:p>
         </p:txBody>
@@ -4333,13 +4262,13 @@
               </a:spcAft>
             </a:pPr>
             <a:r>
-              <a:rPr sz="1900" b="0" i="0">
+              <a:rPr sz="1800" b="0" i="0">
                 <a:solidFill>
                   <a:srgbClr val="555555"/>
                 </a:solidFill>
                 <a:latin typeface="Calibri"/>
               </a:rPr>
-              <a:t>Emissions growth has fallen by two thirds since the Paris Agreement. We ask what the global record can, and cannot, credit the treaty for.</a:t>
+              <a:t>The world's carbon intensity is falling faster than ever. We ask whether the record can credit the Paris Agreement — and find that it cannot, for a specific and instructive reason.</a:t>
             </a:r>
           </a:p>
           <a:p>
@@ -4355,7 +4284,7 @@
                 </a:solidFill>
                 <a:latin typeface="Calibri"/>
               </a:rPr>
-              <a:t>155 countries · 90.6% of global CO2 · 1980-2021</a:t>
+              <a:t>True world aggregate, 1965-2023 · 44 specifications · unknown-break-date tests</a:t>
             </a:r>
           </a:p>
         </p:txBody>
@@ -4408,11 +4337,11 @@
             <a:r>
               <a:rPr sz="1200" b="1" i="0">
                 <a:solidFill>
-                  <a:srgbClr val="1B7837"/>
-                </a:solidFill>
-                <a:latin typeface="Calibri"/>
-              </a:rPr>
-              <a:t>WHAT WOULD SETTLE IT</a:t>
+                  <a:srgbClr val="B33A3A"/>
+                </a:solidFill>
+                <a:latin typeface="Calibri"/>
+              </a:rPr>
+              <a:t>LIMITS</a:t>
             </a:r>
           </a:p>
           <a:p>
@@ -4428,7 +4357,7 @@
                 </a:solidFill>
                 <a:latin typeface="Calibri"/>
               </a:rPr>
-              <a:t>Three things — and two of them are not at the world level</a:t>
+              <a:t>What we are not claiming</a:t>
             </a:r>
           </a:p>
         </p:txBody>
@@ -4441,8 +4370,8 @@
         </p:nvSpPr>
         <p:spPr>
           <a:xfrm>
-            <a:off x="502920" y="1508760"/>
-            <a:ext cx="10881360" cy="4572000"/>
+            <a:off x="502920" y="1463040"/>
+            <a:ext cx="5394960" cy="2377440"/>
           </a:xfrm>
           <a:prstGeom prst="rect">
             <a:avLst/>
@@ -4457,49 +4386,17 @@
           <a:p>
             <a:pPr algn="l">
               <a:spcAft>
-                <a:spcPts val="1200"/>
+                <a:spcPts val="400"/>
               </a:spcAft>
             </a:pPr>
             <a:r>
-              <a:rPr sz="1500" b="0" i="0">
-                <a:solidFill>
-                  <a:srgbClr val="555555"/>
-                </a:solidFill>
-                <a:latin typeface="Calibri"/>
-              </a:rPr>
-              <a:t>Persistence. The size of the change is already detectable — the test could pick up an effect half this large within a couple more years of data. What it cannot yet tell us is whether the new fuel-mix trend holds. If it survives to Paris+20, a one-off technology shock becomes a much weaker explanation.</a:t>
-            </a:r>
-          </a:p>
-          <a:p>
-            <a:pPr algn="l">
-              <a:spcAft>
-                <a:spcPts val="1200"/>
-              </a:spcAft>
-            </a:pPr>
-            <a:r>
-              <a:rPr sz="1500" b="0" i="0">
-                <a:solidFill>
-                  <a:srgbClr val="555555"/>
-                </a:solidFill>
-                <a:latin typeface="Calibri"/>
-              </a:rPr>
-              <a:t>The demand side. Efficiency is the more informative half precisely because it has not moved: cheap solar explains a cleaner fuel mix, but it does not explain how much energy the world uses per unit of output. If efficiency accelerates over the next decade, that is much harder to attribute to technology alone.</a:t>
-            </a:r>
-          </a:p>
-          <a:p>
-            <a:pPr algn="l">
-              <a:spcAft>
-                <a:spcPts val="1400"/>
-              </a:spcAft>
-            </a:pPr>
-            <a:r>
-              <a:rPr sz="1500" b="0" i="0">
-                <a:solidFill>
-                  <a:srgbClr val="555555"/>
-                </a:solidFill>
-                <a:latin typeface="Calibri"/>
-              </a:rPr>
-              <a:t>Disaggregation. Paris works through national pledges, so its signature should appear country by country — where series are longer, placebo tests are independent, and a documentary record exists to say what accompanied each turn. That is the companion paper.</a:t>
+              <a:rPr sz="1450" b="1" i="0">
+                <a:solidFill>
+                  <a:srgbClr val="212121"/>
+                </a:solidFill>
+                <a:latin typeface="Calibri"/>
+              </a:rPr>
+              <a:t>This is not causal</a:t>
             </a:r>
           </a:p>
           <a:p>
@@ -4509,13 +4406,178 @@
               </a:spcAft>
             </a:pPr>
             <a:r>
-              <a:rPr sz="1500" b="1" i="0">
+              <a:rPr sz="1200" b="0" i="0">
+                <a:solidFill>
+                  <a:srgbClr val="555555"/>
+                </a:solidFill>
+                <a:latin typeface="Calibri"/>
+              </a:rPr>
+              <a:t>A turning point identifies when a trend changed, never why. Even a perfect fit at 2015 would be a coincidence of timing. And an agreement that prevented backsliding would leave no turning point at all — absence of one is not absence of an effect.</a:t>
+            </a:r>
+          </a:p>
+        </p:txBody>
+      </p:sp>
+      <p:sp>
+        <p:nvSpPr>
+          <p:cNvPr id="4" name="TextBox 3"/>
+          <p:cNvSpPr txBox="1"/>
+          <p:nvPr/>
+        </p:nvSpPr>
+        <p:spPr>
+          <a:xfrm>
+            <a:off x="6400800" y="1463040"/>
+            <a:ext cx="5394960" cy="2377440"/>
+          </a:xfrm>
+          <a:prstGeom prst="rect">
+            <a:avLst/>
+          </a:prstGeom>
+          <a:noFill/>
+        </p:spPr>
+        <p:txBody>
+          <a:bodyPr wrap="square">
+            <a:spAutoFit/>
+          </a:bodyPr>
+          <a:lstStyle/>
+          <a:p>
+            <a:pPr algn="l">
+              <a:spcAft>
+                <a:spcPts val="400"/>
+              </a:spcAft>
+            </a:pPr>
+            <a:r>
+              <a:rPr sz="1450" b="1" i="0">
                 <a:solidFill>
                   <a:srgbClr val="212121"/>
                 </a:solidFill>
                 <a:latin typeface="Calibri"/>
               </a:rPr>
-              <a:t>The question we would put to the field: should treaty assessment be built on intensity turning points and placebo discipline, rather than on emissions levels and anniversaries?</a:t>
+              <a:t>Two GDP concepts</a:t>
+            </a:r>
+          </a:p>
+          <a:p>
+            <a:pPr algn="l">
+              <a:spcAft>
+                <a:spcPts val="0"/>
+              </a:spcAft>
+            </a:pPr>
+            <a:r>
+              <a:rPr sz="1200" b="0" i="0">
+                <a:solidFill>
+                  <a:srgbClr val="555555"/>
+                </a:solidFill>
+                <a:latin typeface="Calibri"/>
+              </a:rPr>
+              <a:t>Overall intensity and efficiency use World Bank world GDP in constant 2015 dollars; the country panels use purchasing-power GDP. The fuel-mix result — the one most relevant to policy — uses a single source and no GDP at all.</a:t>
+            </a:r>
+          </a:p>
+        </p:txBody>
+      </p:sp>
+      <p:sp>
+        <p:nvSpPr>
+          <p:cNvPr id="5" name="TextBox 4"/>
+          <p:cNvSpPr txBox="1"/>
+          <p:nvPr/>
+        </p:nvSpPr>
+        <p:spPr>
+          <a:xfrm>
+            <a:off x="502920" y="3977639"/>
+            <a:ext cx="5394960" cy="2377440"/>
+          </a:xfrm>
+          <a:prstGeom prst="rect">
+            <a:avLst/>
+          </a:prstGeom>
+          <a:noFill/>
+        </p:spPr>
+        <p:txBody>
+          <a:bodyPr wrap="square">
+            <a:spAutoFit/>
+          </a:bodyPr>
+          <a:lstStyle/>
+          <a:p>
+            <a:pPr algn="l">
+              <a:spcAft>
+                <a:spcPts val="400"/>
+              </a:spcAft>
+            </a:pPr>
+            <a:r>
+              <a:rPr sz="1450" b="1" i="0">
+                <a:solidFill>
+                  <a:srgbClr val="212121"/>
+                </a:solidFill>
+                <a:latin typeface="Calibri"/>
+              </a:rPr>
+              <a:t>Eight post-Paris years</a:t>
+            </a:r>
+          </a:p>
+          <a:p>
+            <a:pPr algn="l">
+              <a:spcAft>
+                <a:spcPts val="0"/>
+              </a:spcAft>
+            </a:pPr>
+            <a:r>
+              <a:rPr sz="1200" b="0" i="0">
+                <a:solidFill>
+                  <a:srgbClr val="555555"/>
+                </a:solidFill>
+                <a:latin typeface="Calibri"/>
+              </a:rPr>
+              <a:t>The series ends in 2023 for CO2 and energy and 2022 for GDP. Country-level work stops in 2021 because GDP reporting, not emissions reporting, runs out. Adding partial years would overstate the recent trend.</a:t>
+            </a:r>
+          </a:p>
+        </p:txBody>
+      </p:sp>
+      <p:sp>
+        <p:nvSpPr>
+          <p:cNvPr id="6" name="TextBox 5"/>
+          <p:cNvSpPr txBox="1"/>
+          <p:nvPr/>
+        </p:nvSpPr>
+        <p:spPr>
+          <a:xfrm>
+            <a:off x="6400800" y="3977639"/>
+            <a:ext cx="5394960" cy="2377440"/>
+          </a:xfrm>
+          <a:prstGeom prst="rect">
+            <a:avLst/>
+          </a:prstGeom>
+          <a:noFill/>
+        </p:spPr>
+        <p:txBody>
+          <a:bodyPr wrap="square">
+            <a:spAutoFit/>
+          </a:bodyPr>
+          <a:lstStyle/>
+          <a:p>
+            <a:pPr algn="l">
+              <a:spcAft>
+                <a:spcPts val="400"/>
+              </a:spcAft>
+            </a:pPr>
+            <a:r>
+              <a:rPr sz="1450" b="1" i="0">
+                <a:solidFill>
+                  <a:srgbClr val="212121"/>
+                </a:solidFill>
+                <a:latin typeface="Calibri"/>
+              </a:rPr>
+              <a:t>Production-based accounting</a:t>
+            </a:r>
+          </a:p>
+          <a:p>
+            <a:pPr algn="l">
+              <a:spcAft>
+                <a:spcPts val="0"/>
+              </a:spcAft>
+            </a:pPr>
+            <a:r>
+              <a:rPr sz="1200" b="0" i="0">
+                <a:solidFill>
+                  <a:srgbClr val="555555"/>
+                </a:solidFill>
+                <a:latin typeface="Calibri"/>
+              </a:rPr>
+              <a:t>Emissions are counted where they are produced. At the world level that is the right frame, since global production equals global consumption — but it matters for the national work that follows.</a:t>
             </a:r>
           </a:p>
         </p:txBody>
@@ -4546,299 +4608,6 @@
         </p:nvSpPr>
         <p:spPr>
           <a:xfrm>
-            <a:off x="502920" y="274320"/>
-            <a:ext cx="11201400" cy="914400"/>
-          </a:xfrm>
-          <a:prstGeom prst="rect">
-            <a:avLst/>
-          </a:prstGeom>
-          <a:noFill/>
-        </p:spPr>
-        <p:txBody>
-          <a:bodyPr wrap="square">
-            <a:spAutoFit/>
-          </a:bodyPr>
-          <a:lstStyle/>
-          <a:p>
-            <a:pPr algn="l">
-              <a:spcAft>
-                <a:spcPts val="200"/>
-              </a:spcAft>
-            </a:pPr>
-            <a:r>
-              <a:rPr sz="1200" b="1" i="0">
-                <a:solidFill>
-                  <a:srgbClr val="B33A3A"/>
-                </a:solidFill>
-                <a:latin typeface="Calibri"/>
-              </a:rPr>
-              <a:t>LIMITS</a:t>
-            </a:r>
-          </a:p>
-          <a:p>
-            <a:pPr algn="l">
-              <a:spcAft>
-                <a:spcPts val="0"/>
-              </a:spcAft>
-            </a:pPr>
-            <a:r>
-              <a:rPr sz="2400" b="1" i="0">
-                <a:solidFill>
-                  <a:srgbClr val="212121"/>
-                </a:solidFill>
-                <a:latin typeface="Calibri"/>
-              </a:rPr>
-              <a:t>What we are not claiming</a:t>
-            </a:r>
-          </a:p>
-        </p:txBody>
-      </p:sp>
-      <p:sp>
-        <p:nvSpPr>
-          <p:cNvPr id="3" name="TextBox 2"/>
-          <p:cNvSpPr txBox="1"/>
-          <p:nvPr/>
-        </p:nvSpPr>
-        <p:spPr>
-          <a:xfrm>
-            <a:off x="502920" y="1463040"/>
-            <a:ext cx="5394960" cy="2377440"/>
-          </a:xfrm>
-          <a:prstGeom prst="rect">
-            <a:avLst/>
-          </a:prstGeom>
-          <a:noFill/>
-        </p:spPr>
-        <p:txBody>
-          <a:bodyPr wrap="square">
-            <a:spAutoFit/>
-          </a:bodyPr>
-          <a:lstStyle/>
-          <a:p>
-            <a:pPr algn="l">
-              <a:spcAft>
-                <a:spcPts val="400"/>
-              </a:spcAft>
-            </a:pPr>
-            <a:r>
-              <a:rPr sz="1450" b="1" i="0">
-                <a:solidFill>
-                  <a:srgbClr val="212121"/>
-                </a:solidFill>
-                <a:latin typeface="Calibri"/>
-              </a:rPr>
-              <a:t>This is not causal</a:t>
-            </a:r>
-          </a:p>
-          <a:p>
-            <a:pPr algn="l">
-              <a:spcAft>
-                <a:spcPts val="0"/>
-              </a:spcAft>
-            </a:pPr>
-            <a:r>
-              <a:rPr sz="1200" b="0" i="0">
-                <a:solidFill>
-                  <a:srgbClr val="555555"/>
-                </a:solidFill>
-                <a:latin typeface="Calibri"/>
-              </a:rPr>
-              <a:t>A turning point identifies when a trend changed, never why. Even a perfect fit at 2015 would be a coincidence of timing. And an agreement that prevented backsliding would leave no turning point at all — so the absence of one is not the absence of an effect.</a:t>
-            </a:r>
-          </a:p>
-        </p:txBody>
-      </p:sp>
-      <p:sp>
-        <p:nvSpPr>
-          <p:cNvPr id="4" name="TextBox 3"/>
-          <p:cNvSpPr txBox="1"/>
-          <p:nvPr/>
-        </p:nvSpPr>
-        <p:spPr>
-          <a:xfrm>
-            <a:off x="6400800" y="1463040"/>
-            <a:ext cx="5394960" cy="2377440"/>
-          </a:xfrm>
-          <a:prstGeom prst="rect">
-            <a:avLst/>
-          </a:prstGeom>
-          <a:noFill/>
-        </p:spPr>
-        <p:txBody>
-          <a:bodyPr wrap="square">
-            <a:spAutoFit/>
-          </a:bodyPr>
-          <a:lstStyle/>
-          <a:p>
-            <a:pPr algn="l">
-              <a:spcAft>
-                <a:spcPts val="400"/>
-              </a:spcAft>
-            </a:pPr>
-            <a:r>
-              <a:rPr sz="1450" b="1" i="0">
-                <a:solidFill>
-                  <a:srgbClr val="212121"/>
-                </a:solidFill>
-                <a:latin typeface="Calibri"/>
-              </a:rPr>
-              <a:t>Which countries, and how far back</a:t>
-            </a:r>
-          </a:p>
-          <a:p>
-            <a:pPr algn="l">
-              <a:spcAft>
-                <a:spcPts val="0"/>
-              </a:spcAft>
-            </a:pPr>
-            <a:r>
-              <a:rPr sz="1200" b="0" i="0">
-                <a:solidFill>
-                  <a:srgbClr val="555555"/>
-                </a:solidFill>
-                <a:latin typeface="Calibri"/>
-              </a:rPr>
-              <a:t>Starting in 1980 buys 35 years of pre-treaty history but drops 27 countries and 9% of global CO2 — nearly all post-Soviet states, which have no separate 1980 series. Starting in 1990 recovers them and removes the efficiency result. Both are reported.</a:t>
-            </a:r>
-          </a:p>
-        </p:txBody>
-      </p:sp>
-      <p:sp>
-        <p:nvSpPr>
-          <p:cNvPr id="5" name="TextBox 4"/>
-          <p:cNvSpPr txBox="1"/>
-          <p:nvPr/>
-        </p:nvSpPr>
-        <p:spPr>
-          <a:xfrm>
-            <a:off x="502920" y="3977639"/>
-            <a:ext cx="5394960" cy="2377440"/>
-          </a:xfrm>
-          <a:prstGeom prst="rect">
-            <a:avLst/>
-          </a:prstGeom>
-          <a:noFill/>
-        </p:spPr>
-        <p:txBody>
-          <a:bodyPr wrap="square">
-            <a:spAutoFit/>
-          </a:bodyPr>
-          <a:lstStyle/>
-          <a:p>
-            <a:pPr algn="l">
-              <a:spcAft>
-                <a:spcPts val="400"/>
-              </a:spcAft>
-            </a:pPr>
-            <a:r>
-              <a:rPr sz="1450" b="1" i="0">
-                <a:solidFill>
-                  <a:srgbClr val="212121"/>
-                </a:solidFill>
-                <a:latin typeface="Calibri"/>
-              </a:rPr>
-              <a:t>Coverage and vintage</a:t>
-            </a:r>
-          </a:p>
-          <a:p>
-            <a:pPr algn="l">
-              <a:spcAft>
-                <a:spcPts val="0"/>
-              </a:spcAft>
-            </a:pPr>
-            <a:r>
-              <a:rPr sz="1200" b="0" i="0">
-                <a:solidFill>
-                  <a:srgbClr val="555555"/>
-                </a:solidFill>
-                <a:latin typeface="Calibri"/>
-              </a:rPr>
-              <a:t>155 countries and 91% of CO2, with only 14 gaps interpolated. The series stops in 2021 because 2022-23 reporting is incomplete — adding those years on partial coverage would overstate the acceleration.</a:t>
-            </a:r>
-          </a:p>
-        </p:txBody>
-      </p:sp>
-      <p:sp>
-        <p:nvSpPr>
-          <p:cNvPr id="6" name="TextBox 5"/>
-          <p:cNvSpPr txBox="1"/>
-          <p:nvPr/>
-        </p:nvSpPr>
-        <p:spPr>
-          <a:xfrm>
-            <a:off x="6400800" y="3977639"/>
-            <a:ext cx="5394960" cy="2377440"/>
-          </a:xfrm>
-          <a:prstGeom prst="rect">
-            <a:avLst/>
-          </a:prstGeom>
-          <a:noFill/>
-        </p:spPr>
-        <p:txBody>
-          <a:bodyPr wrap="square">
-            <a:spAutoFit/>
-          </a:bodyPr>
-          <a:lstStyle/>
-          <a:p>
-            <a:pPr algn="l">
-              <a:spcAft>
-                <a:spcPts val="400"/>
-              </a:spcAft>
-            </a:pPr>
-            <a:r>
-              <a:rPr sz="1450" b="1" i="0">
-                <a:solidFill>
-                  <a:srgbClr val="212121"/>
-                </a:solidFill>
-                <a:latin typeface="Calibri"/>
-              </a:rPr>
-              <a:t>Production-based accounting</a:t>
-            </a:r>
-          </a:p>
-          <a:p>
-            <a:pPr algn="l">
-              <a:spcAft>
-                <a:spcPts val="0"/>
-              </a:spcAft>
-            </a:pPr>
-            <a:r>
-              <a:rPr sz="1200" b="0" i="0">
-                <a:solidFill>
-                  <a:srgbClr val="555555"/>
-                </a:solidFill>
-                <a:latin typeface="Calibri"/>
-              </a:rPr>
-              <a:t>Emissions are counted where they are produced. At the world level that is the right frame — global production equals global consumption — but it matters for the national work that follows.</a:t>
-            </a:r>
-          </a:p>
-        </p:txBody>
-      </p:sp>
-    </p:spTree>
-  </p:cSld>
-  <p:clrMapOvr>
-    <a:masterClrMapping/>
-  </p:clrMapOvr>
-</p:sld>
-</file>
-
-<file path=ppt/slides/slide12.xml><?xml version="1.0" encoding="utf-8"?>
-<p:sld xmlns:a="http://schemas.openxmlformats.org/drawingml/2006/main" xmlns:p="http://schemas.openxmlformats.org/presentationml/2006/main" xmlns:r="http://schemas.openxmlformats.org/officeDocument/2006/relationships">
-  <p:cSld>
-    <p:spTree>
-      <p:nvGrpSpPr>
-        <p:cNvPr id="1" name=""/>
-        <p:cNvGrpSpPr/>
-        <p:nvPr/>
-      </p:nvGrpSpPr>
-      <p:grpSpPr/>
-      <p:sp>
-        <p:nvSpPr>
-          <p:cNvPr id="2" name="TextBox 1"/>
-          <p:cNvSpPr txBox="1"/>
-          <p:nvPr/>
-        </p:nvSpPr>
-        <p:spPr>
-          <a:xfrm>
             <a:off x="822960" y="1463040"/>
             <a:ext cx="10515600" cy="1828800"/>
           </a:xfrm>
@@ -4865,7 +4634,7 @@
                 </a:solidFill>
                 <a:latin typeface="Calibri"/>
               </a:rPr>
-              <a:t>The curve is bending.</a:t>
+              <a:t>The curve is bending faster than ever.</a:t>
             </a:r>
           </a:p>
           <a:p>
@@ -4881,7 +4650,7 @@
                 </a:solidFill>
                 <a:latin typeface="Calibri"/>
               </a:rPr>
-              <a:t>The record cannot yet tell us who bent it.</a:t>
+              <a:t>It started bending in 2012.</a:t>
             </a:r>
           </a:p>
         </p:txBody>
@@ -4930,7 +4699,7 @@
                 </a:solidFill>
                 <a:latin typeface="Calibri"/>
               </a:rPr>
-              <a:t>Emissions growth fell by two thirds after Paris — but over half of that is a slower economy.</a:t>
+              <a:t>The largest break in the world's carbon-intensity record is still the 1970s oil shocks.</a:t>
             </a:r>
           </a:p>
           <a:p>
@@ -4955,7 +4724,7 @@
                 </a:solidFill>
                 <a:latin typeface="Calibri"/>
               </a:rPr>
-              <a:t>Carbon intensity is beating 35 years of trend, significantly, on every panel we build.</a:t>
+              <a:t>The current fast episode begins in 2012 — in nine specifications out of ten, before Paris.</a:t>
             </a:r>
           </a:p>
           <a:p>
@@ -4980,7 +4749,7 @@
                 </a:solidFill>
                 <a:latin typeface="Calibri"/>
               </a:rPr>
-              <a:t>Rio fails the placebo test; Paris passes it — the first treaty date the record does not reject.</a:t>
+              <a:t>Energy efficiency has improved at about 1% a year for fifty years and did not respond to the treaty era.</a:t>
             </a:r>
           </a:p>
           <a:p>
@@ -5005,7 +4774,7 @@
                 </a:solidFill>
                 <a:latin typeface="Calibri"/>
               </a:rPr>
-              <a:t>But the best fit is 2014, not 2015, and the turn coincides with the clean-energy cost collapse.</a:t>
+              <a:t>The fuel mix stalled from Rio to Paris and has since resumed — which is what cheap clean energy would produce.</a:t>
             </a:r>
           </a:p>
         </p:txBody>
@@ -5038,13 +4807,13 @@
               </a:spcAft>
             </a:pPr>
             <a:r>
-              <a:rPr sz="1300" b="0" i="1">
+              <a:rPr sz="1250" b="0" i="1">
                 <a:solidFill>
                   <a:srgbClr val="8A8A8A"/>
                 </a:solidFill>
                 <a:latin typeface="Calibri"/>
               </a:rPr>
-              <a:t>Turning points say when · the Kaya split says through which door · placebo tests say whether the date is special</a:t>
+              <a:t>Turning points say when · the Kaya split says through which door · placebo tests say whether the date is special · the specification grid says whether any of it holds</a:t>
             </a:r>
           </a:p>
         </p:txBody>
@@ -5117,7 +4886,7 @@
                 </a:solidFill>
                 <a:latin typeface="Calibri"/>
               </a:rPr>
-              <a:t>Something changed after Paris. Was it Paris?</a:t>
+              <a:t>Something changed. Was it Paris?</a:t>
             </a:r>
           </a:p>
         </p:txBody>
@@ -5156,7 +4925,7 @@
                 </a:solidFill>
                 <a:latin typeface="Calibri"/>
               </a:rPr>
-              <a:t>The good news is real. Across the countries we can track consistently since 1980, CO2 growth fell from +2.5% a year over the Rio-to-Paris quarter century to +0.8% a year since. Worst-case scenarios have moved off the table.</a:t>
+              <a:t>The good news is real. Global CO2 growth fell from +2.1% a year over the Rio-to-Paris quarter century to +0.7% a year since, and carbon intensity is now improving at -2.1% a year: the fastest sustained rate in the observed record.</a:t>
             </a:r>
           </a:p>
           <a:p>
@@ -5172,7 +4941,7 @@
                 </a:solidFill>
                 <a:latin typeface="Calibri"/>
               </a:rPr>
-              <a:t>But the obvious reading — that the agreement did it — is exactly the reading the data is worst at supporting. Carbon intensity has been falling for fifty years. Renewable costs collapsed on almost the same schedule as the treaty. And a slowdown in emissions can come simply from a slowdown in the economy.</a:t>
+              <a:t>But the obvious reading — that the agreement did it — is the reading the data is worst at supporting. Carbon intensity has been falling for fifty years, in episodes with their own causes. Clean-energy costs collapsed on almost the same schedule as the treaty. And emissions growth slows when the economy slows.</a:t>
             </a:r>
           </a:p>
           <a:p>
@@ -5188,7 +4957,7 @@
                 </a:solidFill>
                 <a:latin typeface="Calibri"/>
               </a:rPr>
-              <a:t>So we ask a narrow question: what actually changed after 2015, and is 2015 a special year in the record — or just a year that happens to sit near one?</a:t>
+              <a:t>So we ask a narrow question: when did the trend actually turn, and is 2015 a special year in the record — or a year that happens to sit near one?</a:t>
             </a:r>
           </a:p>
         </p:txBody>
@@ -5275,7 +5044,7 @@
                 </a:solidFill>
                 <a:latin typeface="Calibri"/>
               </a:rPr>
-              <a:t>Growth pushes emissions up. The fuel mix and efficiency are the only two things that push them down — so a policy effect has to show up in one of them before it can show up in emissions at all.</a:t>
+              <a:t>Growth pushes emissions up; the fuel mix and efficiency are the only two things that push them down. A policy effect has to show up in one of them before it can show up in emissions at all.</a:t>
             </a:r>
           </a:p>
         </p:txBody>
@@ -5348,7 +5117,7 @@
                 </a:solidFill>
                 <a:latin typeface="Calibri"/>
               </a:rPr>
-              <a:t>Three steps</a:t>
+              <a:t>Four steps</a:t>
             </a:r>
           </a:p>
         </p:txBody>
@@ -5362,7 +5131,7 @@
         <p:spPr>
           <a:xfrm>
             <a:off x="502920" y="1554480"/>
-            <a:ext cx="3611880" cy="4480560"/>
+            <a:ext cx="2743200" cy="4572000"/>
           </a:xfrm>
           <a:prstGeom prst="rect">
             <a:avLst/>
@@ -5381,7 +5150,7 @@
               </a:spcAft>
             </a:pPr>
             <a:r>
-              <a:rPr sz="3400" b="1" i="0">
+              <a:rPr sz="3200" b="1" i="0">
                 <a:solidFill>
                   <a:srgbClr val="3A66A5"/>
                 </a:solidFill>
@@ -5397,13 +5166,13 @@
               </a:spcAft>
             </a:pPr>
             <a:r>
-              <a:rPr sz="1550" b="1" i="0">
+              <a:rPr sz="1450" b="1" i="0">
                 <a:solidFill>
                   <a:srgbClr val="212121"/>
                 </a:solidFill>
                 <a:latin typeface="Calibri"/>
               </a:rPr>
-              <a:t>Build a consistent world series</a:t>
+              <a:t>Use a true world series</a:t>
             </a:r>
           </a:p>
           <a:p>
@@ -5413,13 +5182,13 @@
               </a:spcAft>
             </a:pPr>
             <a:r>
-              <a:rPr sz="1300" b="0" i="0">
+              <a:rPr sz="1200" b="0" i="0">
                 <a:solidFill>
                   <a:srgbClr val="555555"/>
                 </a:solidFill>
                 <a:latin typeface="Calibri"/>
               </a:rPr>
-              <a:t>Take every country still reporting in 2021 with almost complete data back to 1980, fill the handful of gaps, and add them up. That is 155 countries and 91% of global CO2. We stop at 2021 because most countries have not reported 2022-23 yet.</a:t>
+              <a:t>Not a sum over whichever countries reported. The published world totals for CO2 and energy, 1965-2023, with World Bank world GDP. No composition drift, no interpolation, eight post-Paris years.</a:t>
             </a:r>
           </a:p>
         </p:txBody>
@@ -5432,8 +5201,8 @@
         </p:nvSpPr>
         <p:spPr>
           <a:xfrm>
-            <a:off x="4251959" y="1554480"/>
-            <a:ext cx="3611880" cy="4480560"/>
+            <a:off x="3364991" y="1554480"/>
+            <a:ext cx="2743200" cy="4572000"/>
           </a:xfrm>
           <a:prstGeom prst="rect">
             <a:avLst/>
@@ -5452,7 +5221,7 @@
               </a:spcAft>
             </a:pPr>
             <a:r>
-              <a:rPr sz="3400" b="1" i="0">
+              <a:rPr sz="3200" b="1" i="0">
                 <a:solidFill>
                   <a:srgbClr val="3A66A5"/>
                 </a:solidFill>
@@ -5468,13 +5237,13 @@
               </a:spcAft>
             </a:pPr>
             <a:r>
-              <a:rPr sz="1550" b="1" i="0">
+              <a:rPr sz="1450" b="1" i="0">
                 <a:solidFill>
                   <a:srgbClr val="212121"/>
                 </a:solidFill>
                 <a:latin typeface="Calibri"/>
               </a:rPr>
-              <a:t>Let the data pick the turning point</a:t>
+              <a:t>Let the data pick the turn</a:t>
             </a:r>
           </a:p>
           <a:p>
@@ -5484,13 +5253,13 @@
               </a:spcAft>
             </a:pPr>
             <a:r>
-              <a:rPr sz="1300" b="0" i="0">
+              <a:rPr sz="1200" b="0" i="0">
                 <a:solidFill>
                   <a:srgbClr val="555555"/>
                 </a:solidFill>
                 <a:latin typeface="Calibri"/>
               </a:rPr>
-              <a:t>Plot each series so a straight line means a steady percentage change per year, then fit two lines meeting at a kink. Try every possible kink year and keep the one that fits best. Nothing about a treaty enters this step.</a:t>
+              <a:t>Fit two straight lines meeting at a kink, try every possible kink year, keep the best. Then a formal unknown-break-date test with bootstrapped critical values, so searching over years does not manufacture significance.</a:t>
             </a:r>
           </a:p>
         </p:txBody>
@@ -5503,8 +5272,8 @@
         </p:nvSpPr>
         <p:spPr>
           <a:xfrm>
-            <a:off x="8001000" y="1554480"/>
-            <a:ext cx="3611880" cy="4480560"/>
+            <a:off x="6227064" y="1554480"/>
+            <a:ext cx="2743200" cy="4572000"/>
           </a:xfrm>
           <a:prstGeom prst="rect">
             <a:avLst/>
@@ -5523,7 +5292,7 @@
               </a:spcAft>
             </a:pPr>
             <a:r>
-              <a:rPr sz="3400" b="1" i="0">
+              <a:rPr sz="3200" b="1" i="0">
                 <a:solidFill>
                   <a:srgbClr val="3A66A5"/>
                 </a:solidFill>
@@ -5539,13 +5308,13 @@
               </a:spcAft>
             </a:pPr>
             <a:r>
-              <a:rPr sz="1550" b="1" i="0">
+              <a:rPr sz="1450" b="1" i="0">
                 <a:solidFill>
                   <a:srgbClr val="212121"/>
                 </a:solidFill>
                 <a:latin typeface="Calibri"/>
               </a:rPr>
-              <a:t>Ask whether the treaty year is special</a:t>
+              <a:t>Ask if the treaty year is special</a:t>
             </a:r>
           </a:p>
           <a:p>
@@ -5555,13 +5324,13 @@
               </a:spcAft>
             </a:pPr>
             <a:r>
-              <a:rPr sz="1300" b="0" i="0">
+              <a:rPr sz="1200" b="0" i="0">
                 <a:solidFill>
                   <a:srgbClr val="555555"/>
                 </a:solidFill>
                 <a:latin typeface="Calibri"/>
               </a:rPr>
-              <a:t>A gently curving trend makes almost any year look significant, so significance alone proves nothing. We rank 2015 against every other candidate year. A treaty earns credit only if its year beats the years around it.</a:t>
+              <a:t>A curving trend makes almost any year look significant. We rank 2015 against every other candidate year — a treaty earns credit only if its year beats its neighbours.</a:t>
             </a:r>
           </a:p>
         </p:txBody>
@@ -5574,7 +5343,78 @@
         </p:nvSpPr>
         <p:spPr>
           <a:xfrm>
-            <a:off x="502920" y="5989320"/>
+            <a:off x="9089136" y="1554480"/>
+            <a:ext cx="2743200" cy="4572000"/>
+          </a:xfrm>
+          <a:prstGeom prst="rect">
+            <a:avLst/>
+          </a:prstGeom>
+          <a:noFill/>
+        </p:spPr>
+        <p:txBody>
+          <a:bodyPr wrap="square">
+            <a:spAutoFit/>
+          </a:bodyPr>
+          <a:lstStyle/>
+          <a:p>
+            <a:pPr algn="l">
+              <a:spcAft>
+                <a:spcPts val="600"/>
+              </a:spcAft>
+            </a:pPr>
+            <a:r>
+              <a:rPr sz="3200" b="1" i="0">
+                <a:solidFill>
+                  <a:srgbClr val="3A66A5"/>
+                </a:solidFill>
+                <a:latin typeface="Calibri"/>
+              </a:rPr>
+              <a:t>4</a:t>
+            </a:r>
+          </a:p>
+          <a:p>
+            <a:pPr algn="l">
+              <a:spcAft>
+                <a:spcPts val="800"/>
+              </a:spcAft>
+            </a:pPr>
+            <a:r>
+              <a:rPr sz="1450" b="1" i="0">
+                <a:solidFill>
+                  <a:srgbClr val="212121"/>
+                </a:solidFill>
+                <a:latin typeface="Calibri"/>
+              </a:rPr>
+              <a:t>Re-run everything 44 ways</a:t>
+            </a:r>
+          </a:p>
+          <a:p>
+            <a:pPr algn="l">
+              <a:spcAft>
+                <a:spcPts val="0"/>
+              </a:spcAft>
+            </a:pPr>
+            <a:r>
+              <a:rPr sz="1200" b="0" i="0">
+                <a:solidFill>
+                  <a:srgbClr val="555555"/>
+                </a:solidFill>
+                <a:latin typeface="Calibri"/>
+              </a:rPr>
+              <a:t>World aggregate or country panel, four start years, three endpoints, four completeness thresholds, with and without interpolation. We report only what survives.</a:t>
+            </a:r>
+          </a:p>
+        </p:txBody>
+      </p:sp>
+      <p:sp>
+        <p:nvSpPr>
+          <p:cNvPr id="7" name="TextBox 6"/>
+          <p:cNvSpPr txBox="1"/>
+          <p:nvPr/>
+        </p:nvSpPr>
+        <p:spPr>
+          <a:xfrm>
+            <a:off x="502920" y="6126480"/>
             <a:ext cx="11201400" cy="548640"/>
           </a:xfrm>
           <a:prstGeom prst="rect">
@@ -5662,11 +5502,11 @@
             <a:r>
               <a:rPr sz="1200" b="1" i="0">
                 <a:solidFill>
-                  <a:srgbClr val="3A66A5"/>
-                </a:solidFill>
-                <a:latin typeface="Calibri"/>
-              </a:rPr>
-              <a:t>WHAT WE DID · THE DATA</a:t>
+                  <a:srgbClr val="1B7837"/>
+                </a:solidFill>
+                <a:latin typeface="Calibri"/>
+              </a:rPr>
+              <a:t>WHAT WE FIND · 1 OF 4</a:t>
             </a:r>
           </a:p>
           <a:p>
@@ -5682,7 +5522,7 @@
                 </a:solidFill>
                 <a:latin typeface="Calibri"/>
               </a:rPr>
-              <a:t>We use every country that reports, for as long as it reports</a:t>
+              <a:t>The decisive turn in the record is the 1970s — not a treaty</a:t>
             </a:r>
           </a:p>
         </p:txBody>
@@ -5717,7 +5557,7 @@
             <a:r>
               <a:rPr sz="1400" b="1" i="0">
                 <a:solidFill>
-                  <a:srgbClr val="3A66A5"/>
+                  <a:srgbClr val="1B7837"/>
                 </a:solidFill>
                 <a:latin typeface="Calibri"/>
               </a:rPr>
@@ -5730,159 +5570,14 @@
                 </a:solidFill>
                 <a:latin typeface="Calibri"/>
               </a:rPr>
-              <a:t>Near-complete coverage — and the last two years are dropped because most countries have not reported them.</a:t>
+              <a:t>The oil shocks remain the largest structural break in the world's carbon intensity, and the current fast episode began in 2012.</a:t>
             </a:r>
           </a:p>
         </p:txBody>
       </p:sp>
       <p:pic>
         <p:nvPicPr>
-          <p:cNvPr id="4" name="Picture 3" descr="w2_fig5_panel_construction.png"/>
-          <p:cNvPicPr>
-            <a:picLocks noChangeAspect="1"/>
-          </p:cNvPicPr>
-          <p:nvPr/>
-        </p:nvPicPr>
-        <p:blipFill>
-          <a:blip r:embed="rId2"/>
-          <a:stretch>
-            <a:fillRect/>
-          </a:stretch>
-        </p:blipFill>
-        <p:spPr>
-          <a:xfrm>
-            <a:off x="832734" y="1700784"/>
-            <a:ext cx="10523482" cy="4882896"/>
-          </a:xfrm>
-          <a:prstGeom prst="rect">
-            <a:avLst/>
-          </a:prstGeom>
-        </p:spPr>
-      </p:pic>
-    </p:spTree>
-  </p:cSld>
-  <p:clrMapOvr>
-    <a:masterClrMapping/>
-  </p:clrMapOvr>
-</p:sld>
-</file>
-
-<file path=ppt/slides/slide5.xml><?xml version="1.0" encoding="utf-8"?>
-<p:sld xmlns:a="http://schemas.openxmlformats.org/drawingml/2006/main" xmlns:p="http://schemas.openxmlformats.org/presentationml/2006/main" xmlns:r="http://schemas.openxmlformats.org/officeDocument/2006/relationships">
-  <p:cSld>
-    <p:spTree>
-      <p:nvGrpSpPr>
-        <p:cNvPr id="1" name=""/>
-        <p:cNvGrpSpPr/>
-        <p:nvPr/>
-      </p:nvGrpSpPr>
-      <p:grpSpPr/>
-      <p:sp>
-        <p:nvSpPr>
-          <p:cNvPr id="2" name="TextBox 1"/>
-          <p:cNvSpPr txBox="1"/>
-          <p:nvPr/>
-        </p:nvSpPr>
-        <p:spPr>
-          <a:xfrm>
-            <a:off x="502920" y="274320"/>
-            <a:ext cx="11201400" cy="914400"/>
-          </a:xfrm>
-          <a:prstGeom prst="rect">
-            <a:avLst/>
-          </a:prstGeom>
-          <a:noFill/>
-        </p:spPr>
-        <p:txBody>
-          <a:bodyPr wrap="square">
-            <a:spAutoFit/>
-          </a:bodyPr>
-          <a:lstStyle/>
-          <a:p>
-            <a:pPr algn="l">
-              <a:spcAft>
-                <a:spcPts val="200"/>
-              </a:spcAft>
-            </a:pPr>
-            <a:r>
-              <a:rPr sz="1200" b="1" i="0">
-                <a:solidFill>
-                  <a:srgbClr val="1B7837"/>
-                </a:solidFill>
-                <a:latin typeface="Calibri"/>
-              </a:rPr>
-              <a:t>WHAT WE FIND · 1 OF 4</a:t>
-            </a:r>
-          </a:p>
-          <a:p>
-            <a:pPr algn="l">
-              <a:spcAft>
-                <a:spcPts val="0"/>
-              </a:spcAft>
-            </a:pPr>
-            <a:r>
-              <a:rPr sz="2400" b="1" i="0">
-                <a:solidFill>
-                  <a:srgbClr val="212121"/>
-                </a:solidFill>
-                <a:latin typeface="Calibri"/>
-              </a:rPr>
-              <a:t>Emissions growth fell — and over half of that is slower growth</a:t>
-            </a:r>
-          </a:p>
-        </p:txBody>
-      </p:sp>
-      <p:sp>
-        <p:nvSpPr>
-          <p:cNvPr id="3" name="TextBox 2"/>
-          <p:cNvSpPr txBox="1"/>
-          <p:nvPr/>
-        </p:nvSpPr>
-        <p:spPr>
-          <a:xfrm>
-            <a:off x="502920" y="1188720"/>
-            <a:ext cx="11201400" cy="457200"/>
-          </a:xfrm>
-          <a:prstGeom prst="rect">
-            <a:avLst/>
-          </a:prstGeom>
-          <a:noFill/>
-        </p:spPr>
-        <p:txBody>
-          <a:bodyPr wrap="square">
-            <a:spAutoFit/>
-          </a:bodyPr>
-          <a:lstStyle/>
-          <a:p>
-            <a:pPr>
-              <a:spcAft>
-                <a:spcPts val="0"/>
-              </a:spcAft>
-            </a:pPr>
-            <a:r>
-              <a:rPr sz="1400" b="1" i="0">
-                <a:solidFill>
-                  <a:srgbClr val="1B7837"/>
-                </a:solidFill>
-                <a:latin typeface="Calibri"/>
-              </a:rPr>
-              <a:t>Takeaway:  </a:t>
-            </a:r>
-            <a:r>
-              <a:rPr sz="1400" b="1" i="0">
-                <a:solidFill>
-                  <a:srgbClr val="212121"/>
-                </a:solidFill>
-                <a:latin typeface="Calibri"/>
-              </a:rPr>
-              <a:t>Of the 1.8-point slowdown, 1.0 point is a slower economy. The remaining 0.7 is real decarbonization, split between cleaner fuel and efficiency.</a:t>
-            </a:r>
-          </a:p>
-        </p:txBody>
-      </p:sp>
-      <p:pic>
-        <p:nvPicPr>
-          <p:cNvPr id="4" name="Picture 3" descr="w2_fig1_what_changed.png"/>
+          <p:cNvPr id="4" name="Picture 3" descr="v3_fig1_long_record.png"/>
           <p:cNvPicPr>
             <a:picLocks noChangeAspect="1"/>
           </p:cNvPicPr>
@@ -5912,6 +5607,199 @@
 </p:sld>
 </file>
 
+<file path=ppt/slides/slide5.xml><?xml version="1.0" encoding="utf-8"?>
+<p:sld xmlns:a="http://schemas.openxmlformats.org/drawingml/2006/main" xmlns:p="http://schemas.openxmlformats.org/presentationml/2006/main" xmlns:r="http://schemas.openxmlformats.org/officeDocument/2006/relationships">
+  <p:cSld>
+    <p:spTree>
+      <p:nvGrpSpPr>
+        <p:cNvPr id="1" name=""/>
+        <p:cNvGrpSpPr/>
+        <p:nvPr/>
+      </p:nvGrpSpPr>
+      <p:grpSpPr/>
+      <p:sp>
+        <p:nvSpPr>
+          <p:cNvPr id="2" name="TextBox 1"/>
+          <p:cNvSpPr txBox="1"/>
+          <p:nvPr/>
+        </p:nvSpPr>
+        <p:spPr>
+          <a:xfrm>
+            <a:off x="502920" y="274320"/>
+            <a:ext cx="11201400" cy="914400"/>
+          </a:xfrm>
+          <a:prstGeom prst="rect">
+            <a:avLst/>
+          </a:prstGeom>
+          <a:noFill/>
+        </p:spPr>
+        <p:txBody>
+          <a:bodyPr wrap="square">
+            <a:spAutoFit/>
+          </a:bodyPr>
+          <a:lstStyle/>
+          <a:p>
+            <a:pPr algn="l">
+              <a:spcAft>
+                <a:spcPts val="200"/>
+              </a:spcAft>
+            </a:pPr>
+            <a:r>
+              <a:rPr sz="1200" b="1" i="0">
+                <a:solidFill>
+                  <a:srgbClr val="1B7837"/>
+                </a:solidFill>
+                <a:latin typeface="Calibri"/>
+              </a:rPr>
+              <a:t>WHAT WE FIND · 2 OF 4</a:t>
+            </a:r>
+          </a:p>
+          <a:p>
+            <a:pPr algn="l">
+              <a:spcAft>
+                <a:spcPts val="0"/>
+              </a:spcAft>
+            </a:pPr>
+            <a:r>
+              <a:rPr sz="2400" b="1" i="0">
+                <a:solidFill>
+                  <a:srgbClr val="212121"/>
+                </a:solidFill>
+                <a:latin typeface="Calibri"/>
+              </a:rPr>
+              <a:t>Efficiency never changed pace. The fuel mix stalled, then resumed.</a:t>
+            </a:r>
+          </a:p>
+        </p:txBody>
+      </p:sp>
+      <p:sp>
+        <p:nvSpPr>
+          <p:cNvPr id="3" name="TextBox 2"/>
+          <p:cNvSpPr txBox="1"/>
+          <p:nvPr/>
+        </p:nvSpPr>
+        <p:spPr>
+          <a:xfrm>
+            <a:off x="502920" y="1188720"/>
+            <a:ext cx="11201400" cy="457200"/>
+          </a:xfrm>
+          <a:prstGeom prst="rect">
+            <a:avLst/>
+          </a:prstGeom>
+          <a:noFill/>
+        </p:spPr>
+        <p:txBody>
+          <a:bodyPr wrap="square">
+            <a:spAutoFit/>
+          </a:bodyPr>
+          <a:lstStyle/>
+          <a:p>
+            <a:pPr>
+              <a:spcAft>
+                <a:spcPts val="0"/>
+              </a:spcAft>
+            </a:pPr>
+            <a:r>
+              <a:rPr sz="1400" b="1" i="0">
+                <a:solidFill>
+                  <a:srgbClr val="1B7837"/>
+                </a:solidFill>
+                <a:latin typeface="Calibri"/>
+              </a:rPr>
+              <a:t>Takeaway:  </a:t>
+            </a:r>
+            <a:r>
+              <a:rPr sz="1400" b="1" i="0">
+                <a:solidFill>
+                  <a:srgbClr val="212121"/>
+                </a:solidFill>
+                <a:latin typeface="Calibri"/>
+              </a:rPr>
+              <a:t>Energy efficiency has improved at about 1% a year for fifty years. The whole story is the fuel mix, which stalled completely from Rio to Paris.</a:t>
+            </a:r>
+          </a:p>
+        </p:txBody>
+      </p:sp>
+      <p:sp>
+        <p:nvSpPr>
+          <p:cNvPr id="4" name="TextBox 3"/>
+          <p:cNvSpPr txBox="1"/>
+          <p:nvPr/>
+        </p:nvSpPr>
+        <p:spPr>
+          <a:xfrm>
+            <a:off x="502920" y="1700784"/>
+            <a:ext cx="11201400" cy="384048"/>
+          </a:xfrm>
+          <a:prstGeom prst="rect">
+            <a:avLst/>
+          </a:prstGeom>
+          <a:noFill/>
+        </p:spPr>
+        <p:txBody>
+          <a:bodyPr wrap="square">
+            <a:spAutoFit/>
+          </a:bodyPr>
+          <a:lstStyle/>
+          <a:p>
+            <a:pPr>
+              <a:spcAft>
+                <a:spcPts val="0"/>
+              </a:spcAft>
+            </a:pPr>
+            <a:r>
+              <a:rPr sz="1200" b="1" i="0">
+                <a:solidFill>
+                  <a:srgbClr val="B33A3A"/>
+                </a:solidFill>
+                <a:latin typeface="Calibri"/>
+              </a:rPr>
+              <a:t>But:  </a:t>
+            </a:r>
+            <a:r>
+              <a:rPr sz="1200" b="0" i="0">
+                <a:solidFill>
+                  <a:srgbClr val="555555"/>
+                </a:solidFill>
+                <a:latin typeface="Calibri"/>
+              </a:rPr>
+              <a:t>this is why the size of the 'Paris effect' depends on the baseline: against the 2000s stall it looks dramatic, against the post-1973 record it is a resumption.</a:t>
+            </a:r>
+          </a:p>
+        </p:txBody>
+      </p:sp>
+      <p:pic>
+        <p:nvPicPr>
+          <p:cNvPr id="5" name="Picture 4" descr="v3_fig2_baseline_problem.png"/>
+          <p:cNvPicPr>
+            <a:picLocks noChangeAspect="1"/>
+          </p:cNvPicPr>
+          <p:nvPr/>
+        </p:nvPicPr>
+        <p:blipFill>
+          <a:blip r:embed="rId2"/>
+          <a:stretch>
+            <a:fillRect/>
+          </a:stretch>
+        </p:blipFill>
+        <p:spPr>
+          <a:xfrm>
+            <a:off x="1416287" y="2121408"/>
+            <a:ext cx="9356376" cy="4462272"/>
+          </a:xfrm>
+          <a:prstGeom prst="rect">
+            <a:avLst/>
+          </a:prstGeom>
+        </p:spPr>
+      </p:pic>
+    </p:spTree>
+  </p:cSld>
+  <p:clrMapOvr>
+    <a:masterClrMapping/>
+  </p:clrMapOvr>
+</p:sld>
+</file>
+
 <file path=ppt/slides/slide6.xml><?xml version="1.0" encoding="utf-8"?>
 <p:sld xmlns:a="http://schemas.openxmlformats.org/drawingml/2006/main" xmlns:p="http://schemas.openxmlformats.org/presentationml/2006/main" xmlns:r="http://schemas.openxmlformats.org/officeDocument/2006/relationships">
   <p:cSld>
@@ -5952,11 +5840,11 @@
             <a:r>
               <a:rPr sz="1200" b="1" i="0">
                 <a:solidFill>
-                  <a:srgbClr val="1B7837"/>
-                </a:solidFill>
-                <a:latin typeface="Calibri"/>
-              </a:rPr>
-              <a:t>WHAT WE FIND · 2 OF 4</a:t>
+                  <a:srgbClr val="C77F00"/>
+                </a:solidFill>
+                <a:latin typeface="Calibri"/>
+              </a:rPr>
+              <a:t>WHAT WE FIND · 3 OF 4</a:t>
             </a:r>
           </a:p>
           <a:p>
@@ -5972,7 +5860,7 @@
                 </a:solidFill>
                 <a:latin typeface="Calibri"/>
               </a:rPr>
-              <a:t>Since Paris the world has beaten its own long-run trend</a:t>
+              <a:t>However we build the series, the turn comes before Paris</a:t>
             </a:r>
           </a:p>
         </p:txBody>
@@ -6007,7 +5895,7 @@
             <a:r>
               <a:rPr sz="1400" b="1" i="0">
                 <a:solidFill>
-                  <a:srgbClr val="1B7837"/>
+                  <a:srgbClr val="C77F00"/>
                 </a:solidFill>
                 <a:latin typeface="Calibri"/>
               </a:rPr>
@@ -6020,14 +5908,14 @@
                 </a:solidFill>
                 <a:latin typeface="Calibri"/>
               </a:rPr>
-              <a:t>All three measures are improving faster than 35 years of trend predicted — and the effect is largest on overall carbon intensity.</a:t>
+              <a:t>In roughly nine specifications out of ten, the best-fitting turning point lands before 2015 — usually 2011 to 2013.</a:t>
             </a:r>
           </a:p>
         </p:txBody>
       </p:sp>
       <p:pic>
         <p:nvPicPr>
-          <p:cNvPr id="4" name="Picture 3" descr="w2_fig2_anniversary_test.png"/>
+          <p:cNvPr id="4" name="Picture 3" descr="v3_fig3_specification_invariance.png"/>
           <p:cNvPicPr>
             <a:picLocks noChangeAspect="1"/>
           </p:cNvPicPr>
@@ -6101,7 +5989,7 @@
                 </a:solidFill>
                 <a:latin typeface="Calibri"/>
               </a:rPr>
-              <a:t>WHAT WE FIND · 3 OF 4</a:t>
+              <a:t>WHAT WE FIND · 4 OF 4</a:t>
             </a:r>
           </a:p>
           <a:p>
@@ -6117,7 +6005,7 @@
                 </a:solidFill>
                 <a:latin typeface="Calibri"/>
               </a:rPr>
-              <a:t>Rio fails the placebo test. Paris passes it.</a:t>
+              <a:t>The timing result is robust. The rest is not.</a:t>
             </a:r>
           </a:p>
         </p:txBody>
@@ -6165,7 +6053,7 @@
                 </a:solidFill>
                 <a:latin typeface="Calibri"/>
               </a:rPr>
-              <a:t>Paris is the first treaty date the global record does not reject — it ranks in the top tenth of all candidate years.</a:t>
+              <a:t>Whether the post-2015 change is statistically significant depends on the component and on how the series is built — for efficiency, only 41% of specifications agree.</a:t>
             </a:r>
           </a:p>
         </p:txBody>
@@ -6213,207 +6101,14 @@
                 </a:solidFill>
                 <a:latin typeface="Calibri"/>
               </a:rPr>
-              <a:t>the best-fitting year is 2014, not 2015, and the fuel mix prefers an older shift in the late 1980s — so the evidence is a plateau, not a spike, and it coincides with the clean-energy cost collapse.</a:t>
+              <a:t>and Paris does not cleanly beat its neighbouring years: on the true world aggregate it ranks 80th percentile for overall intensity but only 11th for the fuel mix.</a:t>
             </a:r>
           </a:p>
         </p:txBody>
       </p:sp>
       <p:pic>
         <p:nvPicPr>
-          <p:cNvPr id="5" name="Picture 4" descr="w2_fig3_rio_vs_paris.png"/>
-          <p:cNvPicPr>
-            <a:picLocks noChangeAspect="1"/>
-          </p:cNvPicPr>
-          <p:nvPr/>
-        </p:nvPicPr>
-        <p:blipFill>
-          <a:blip r:embed="rId2"/>
-          <a:stretch>
-            <a:fillRect/>
-          </a:stretch>
-        </p:blipFill>
-        <p:spPr>
-          <a:xfrm>
-            <a:off x="1260348" y="2121408"/>
-            <a:ext cx="9668256" cy="4462272"/>
-          </a:xfrm>
-          <a:prstGeom prst="rect">
-            <a:avLst/>
-          </a:prstGeom>
-        </p:spPr>
-      </p:pic>
-    </p:spTree>
-  </p:cSld>
-  <p:clrMapOvr>
-    <a:masterClrMapping/>
-  </p:clrMapOvr>
-</p:sld>
-</file>
-
-<file path=ppt/slides/slide8.xml><?xml version="1.0" encoding="utf-8"?>
-<p:sld xmlns:a="http://schemas.openxmlformats.org/drawingml/2006/main" xmlns:p="http://schemas.openxmlformats.org/presentationml/2006/main" xmlns:r="http://schemas.openxmlformats.org/officeDocument/2006/relationships">
-  <p:cSld>
-    <p:spTree>
-      <p:nvGrpSpPr>
-        <p:cNvPr id="1" name=""/>
-        <p:cNvGrpSpPr/>
-        <p:nvPr/>
-      </p:nvGrpSpPr>
-      <p:grpSpPr/>
-      <p:sp>
-        <p:nvSpPr>
-          <p:cNvPr id="2" name="TextBox 1"/>
-          <p:cNvSpPr txBox="1"/>
-          <p:nvPr/>
-        </p:nvSpPr>
-        <p:spPr>
-          <a:xfrm>
-            <a:off x="502920" y="274320"/>
-            <a:ext cx="11201400" cy="914400"/>
-          </a:xfrm>
-          <a:prstGeom prst="rect">
-            <a:avLst/>
-          </a:prstGeom>
-          <a:noFill/>
-        </p:spPr>
-        <p:txBody>
-          <a:bodyPr wrap="square">
-            <a:spAutoFit/>
-          </a:bodyPr>
-          <a:lstStyle/>
-          <a:p>
-            <a:pPr algn="l">
-              <a:spcAft>
-                <a:spcPts val="200"/>
-              </a:spcAft>
-            </a:pPr>
-            <a:r>
-              <a:rPr sz="1200" b="1" i="0">
-                <a:solidFill>
-                  <a:srgbClr val="C77F00"/>
-                </a:solidFill>
-                <a:latin typeface="Calibri"/>
-              </a:rPr>
-              <a:t>WHAT WE FIND · 4 OF 4</a:t>
-            </a:r>
-          </a:p>
-          <a:p>
-            <a:pPr algn="l">
-              <a:spcAft>
-                <a:spcPts val="0"/>
-              </a:spcAft>
-            </a:pPr>
-            <a:r>
-              <a:rPr sz="2400" b="1" i="0">
-                <a:solidFill>
-                  <a:srgbClr val="212121"/>
-                </a:solidFill>
-                <a:latin typeface="Calibri"/>
-              </a:rPr>
-              <a:t>One result depends on which countries you include</a:t>
-            </a:r>
-          </a:p>
-        </p:txBody>
-      </p:sp>
-      <p:sp>
-        <p:nvSpPr>
-          <p:cNvPr id="3" name="TextBox 2"/>
-          <p:cNvSpPr txBox="1"/>
-          <p:nvPr/>
-        </p:nvSpPr>
-        <p:spPr>
-          <a:xfrm>
-            <a:off x="502920" y="1188720"/>
-            <a:ext cx="11201400" cy="457200"/>
-          </a:xfrm>
-          <a:prstGeom prst="rect">
-            <a:avLst/>
-          </a:prstGeom>
-          <a:noFill/>
-        </p:spPr>
-        <p:txBody>
-          <a:bodyPr wrap="square">
-            <a:spAutoFit/>
-          </a:bodyPr>
-          <a:lstStyle/>
-          <a:p>
-            <a:pPr>
-              <a:spcAft>
-                <a:spcPts val="0"/>
-              </a:spcAft>
-            </a:pPr>
-            <a:r>
-              <a:rPr sz="1400" b="1" i="0">
-                <a:solidFill>
-                  <a:srgbClr val="C77F00"/>
-                </a:solidFill>
-                <a:latin typeface="Calibri"/>
-              </a:rPr>
-              <a:t>Takeaway:  </a:t>
-            </a:r>
-            <a:r>
-              <a:rPr sz="1400" b="1" i="0">
-                <a:solidFill>
-                  <a:srgbClr val="212121"/>
-                </a:solidFill>
-                <a:latin typeface="Calibri"/>
-              </a:rPr>
-              <a:t>The overall acceleration holds on every panel. Whether efficiency contributed depends on whether post-Soviet economies are in the sample.</a:t>
-            </a:r>
-          </a:p>
-        </p:txBody>
-      </p:sp>
-      <p:sp>
-        <p:nvSpPr>
-          <p:cNvPr id="4" name="TextBox 3"/>
-          <p:cNvSpPr txBox="1"/>
-          <p:nvPr/>
-        </p:nvSpPr>
-        <p:spPr>
-          <a:xfrm>
-            <a:off x="502920" y="1700784"/>
-            <a:ext cx="11201400" cy="384048"/>
-          </a:xfrm>
-          <a:prstGeom prst="rect">
-            <a:avLst/>
-          </a:prstGeom>
-          <a:noFill/>
-        </p:spPr>
-        <p:txBody>
-          <a:bodyPr wrap="square">
-            <a:spAutoFit/>
-          </a:bodyPr>
-          <a:lstStyle/>
-          <a:p>
-            <a:pPr>
-              <a:spcAft>
-                <a:spcPts val="0"/>
-              </a:spcAft>
-            </a:pPr>
-            <a:r>
-              <a:rPr sz="1200" b="1" i="0">
-                <a:solidFill>
-                  <a:srgbClr val="B33A3A"/>
-                </a:solidFill>
-                <a:latin typeface="Calibri"/>
-              </a:rPr>
-              <a:t>But:  </a:t>
-            </a:r>
-            <a:r>
-              <a:rPr sz="1200" b="0" i="0">
-                <a:solidFill>
-                  <a:srgbClr val="555555"/>
-                </a:solidFill>
-                <a:latin typeface="Calibri"/>
-              </a:rPr>
-              <a:t>those economies cannot be carried back to 1980 — they did not exist as separate series — so this is a genuine trade-off between history and coverage, not a modelling choice.</a:t>
-            </a:r>
-          </a:p>
-        </p:txBody>
-      </p:sp>
-      <p:pic>
-        <p:nvPicPr>
-          <p:cNvPr id="5" name="Picture 4" descr="w2_fig6_panel_robustness.png"/>
+          <p:cNvPr id="5" name="Picture 4" descr="v3_fig4_what_is_robust.png"/>
           <p:cNvPicPr>
             <a:picLocks noChangeAspect="1"/>
           </p:cNvPicPr>
@@ -6443,6 +6138,205 @@
 </p:sld>
 </file>
 
+<file path=ppt/slides/slide8.xml><?xml version="1.0" encoding="utf-8"?>
+<p:sld xmlns:a="http://schemas.openxmlformats.org/drawingml/2006/main" xmlns:p="http://schemas.openxmlformats.org/presentationml/2006/main" xmlns:r="http://schemas.openxmlformats.org/officeDocument/2006/relationships">
+  <p:cSld>
+    <p:spTree>
+      <p:nvGrpSpPr>
+        <p:cNvPr id="1" name=""/>
+        <p:cNvGrpSpPr/>
+        <p:nvPr/>
+      </p:nvGrpSpPr>
+      <p:grpSpPr/>
+      <p:sp>
+        <p:nvSpPr>
+          <p:cNvPr id="2" name="TextBox 1"/>
+          <p:cNvSpPr txBox="1"/>
+          <p:nvPr/>
+        </p:nvSpPr>
+        <p:spPr>
+          <a:xfrm>
+            <a:off x="502920" y="274320"/>
+            <a:ext cx="11201400" cy="914400"/>
+          </a:xfrm>
+          <a:prstGeom prst="rect">
+            <a:avLst/>
+          </a:prstGeom>
+          <a:noFill/>
+        </p:spPr>
+        <p:txBody>
+          <a:bodyPr wrap="square">
+            <a:spAutoFit/>
+          </a:bodyPr>
+          <a:lstStyle/>
+          <a:p>
+            <a:pPr algn="l">
+              <a:spcAft>
+                <a:spcPts val="200"/>
+              </a:spcAft>
+            </a:pPr>
+            <a:r>
+              <a:rPr sz="1200" b="1" i="0">
+                <a:solidFill>
+                  <a:srgbClr val="1B7837"/>
+                </a:solidFill>
+                <a:latin typeface="Calibri"/>
+              </a:rPr>
+              <a:t>WHAT IT ADDS UP TO</a:t>
+            </a:r>
+          </a:p>
+          <a:p>
+            <a:pPr algn="l">
+              <a:spcAft>
+                <a:spcPts val="0"/>
+              </a:spcAft>
+            </a:pPr>
+            <a:r>
+              <a:rPr sz="2400" b="1" i="0">
+                <a:solidFill>
+                  <a:srgbClr val="212121"/>
+                </a:solidFill>
+                <a:latin typeface="Calibri"/>
+              </a:rPr>
+              <a:t>A real acceleration that began before the treaty</a:t>
+            </a:r>
+          </a:p>
+        </p:txBody>
+      </p:sp>
+      <p:sp>
+        <p:nvSpPr>
+          <p:cNvPr id="3" name="TextBox 2"/>
+          <p:cNvSpPr txBox="1"/>
+          <p:nvPr/>
+        </p:nvSpPr>
+        <p:spPr>
+          <a:xfrm>
+            <a:off x="502920" y="1463040"/>
+            <a:ext cx="5532120" cy="4937760"/>
+          </a:xfrm>
+          <a:prstGeom prst="rect">
+            <a:avLst/>
+          </a:prstGeom>
+          <a:noFill/>
+        </p:spPr>
+        <p:txBody>
+          <a:bodyPr wrap="square">
+            <a:spAutoFit/>
+          </a:bodyPr>
+          <a:lstStyle/>
+          <a:p>
+            <a:pPr algn="l">
+              <a:spcAft>
+                <a:spcPts val="600"/>
+              </a:spcAft>
+            </a:pPr>
+            <a:r>
+              <a:rPr sz="1500" b="1" i="0">
+                <a:solidFill>
+                  <a:srgbClr val="1B7837"/>
+                </a:solidFill>
+                <a:latin typeface="Calibri"/>
+              </a:rPr>
+              <a:t>What we can say</a:t>
+            </a:r>
+          </a:p>
+          <a:p>
+            <a:pPr algn="l">
+              <a:spcAft>
+                <a:spcPts val="0"/>
+              </a:spcAft>
+            </a:pPr>
+            <a:r>
+              <a:rPr sz="1350" b="0" i="0">
+                <a:solidFill>
+                  <a:srgbClr val="555555"/>
+                </a:solidFill>
+                <a:latin typeface="Calibri"/>
+              </a:rPr>
+              <a:t>The world is decarbonizing faster than at any point in the record: carbon intensity has fallen at 2.1% a year since 2012, against 0.4% in the decade before. That improvement is real, it is large, and it is concentrated in the fuel mix — exactly where clean technology and energy policy operate.</a:t>
+            </a:r>
+          </a:p>
+        </p:txBody>
+      </p:sp>
+      <p:sp>
+        <p:nvSpPr>
+          <p:cNvPr id="4" name="TextBox 3"/>
+          <p:cNvSpPr txBox="1"/>
+          <p:nvPr/>
+        </p:nvSpPr>
+        <p:spPr>
+          <a:xfrm>
+            <a:off x="6400800" y="1463040"/>
+            <a:ext cx="5303520" cy="4937760"/>
+          </a:xfrm>
+          <a:prstGeom prst="rect">
+            <a:avLst/>
+          </a:prstGeom>
+          <a:noFill/>
+        </p:spPr>
+        <p:txBody>
+          <a:bodyPr wrap="square">
+            <a:spAutoFit/>
+          </a:bodyPr>
+          <a:lstStyle/>
+          <a:p>
+            <a:pPr algn="l">
+              <a:spcAft>
+                <a:spcPts val="600"/>
+              </a:spcAft>
+            </a:pPr>
+            <a:r>
+              <a:rPr sz="1500" b="1" i="0">
+                <a:solidFill>
+                  <a:srgbClr val="B33A3A"/>
+                </a:solidFill>
+                <a:latin typeface="Calibri"/>
+              </a:rPr>
+              <a:t>What we cannot</a:t>
+            </a:r>
+          </a:p>
+          <a:p>
+            <a:pPr algn="l">
+              <a:spcAft>
+                <a:spcPts val="1000"/>
+              </a:spcAft>
+            </a:pPr>
+            <a:r>
+              <a:rPr sz="1350" b="0" i="0">
+                <a:solidFill>
+                  <a:srgbClr val="555555"/>
+                </a:solidFill>
+                <a:latin typeface="Calibri"/>
+              </a:rPr>
+              <a:t>The turn is dated to 2012 in almost every specification — three years before the agreement. Energy efficiency did not respond at all. The fuel-mix improvement is a return to its pre-1990 pace rather than something new. And the timing coincides exactly with the collapse in clean-energy costs.</a:t>
+            </a:r>
+          </a:p>
+          <a:p>
+            <a:pPr algn="l">
+              <a:spcAft>
+                <a:spcPts val="0"/>
+              </a:spcAft>
+            </a:pPr>
+            <a:r>
+              <a:rPr sz="1350" b="1" i="0">
+                <a:solidFill>
+                  <a:srgbClr val="212121"/>
+                </a:solidFill>
+                <a:latin typeface="Calibri"/>
+              </a:rPr>
+              <a:t>The acceleration is real. It started before Paris, and it looks like what cheap clean energy would produce.</a:t>
+            </a:r>
+          </a:p>
+        </p:txBody>
+      </p:sp>
+    </p:spTree>
+  </p:cSld>
+  <p:clrMapOvr>
+    <a:masterClrMapping/>
+  </p:clrMapOvr>
+</p:sld>
+</file>
+
 <file path=ppt/slides/slide9.xml><?xml version="1.0" encoding="utf-8"?>
 <p:sld xmlns:a="http://schemas.openxmlformats.org/drawingml/2006/main" xmlns:p="http://schemas.openxmlformats.org/presentationml/2006/main" xmlns:r="http://schemas.openxmlformats.org/officeDocument/2006/relationships">
   <p:cSld>
@@ -6487,7 +6381,7 @@
                 </a:solidFill>
                 <a:latin typeface="Calibri"/>
               </a:rPr>
-              <a:t>WHAT IT ADDS UP TO</a:t>
+              <a:t>WHAT WOULD SETTLE IT</a:t>
             </a:r>
           </a:p>
           <a:p>
@@ -6503,7 +6397,7 @@
                 </a:solidFill>
                 <a:latin typeface="Calibri"/>
               </a:rPr>
-              <a:t>Consistent with Paris. Not attributable to it.</a:t>
+              <a:t>Three things — and two are not at the world level</a:t>
             </a:r>
           </a:p>
         </p:txBody>
@@ -6516,8 +6410,8 @@
         </p:nvSpPr>
         <p:spPr>
           <a:xfrm>
-            <a:off x="502920" y="1463040"/>
-            <a:ext cx="5532120" cy="4937760"/>
+            <a:off x="502920" y="1508760"/>
+            <a:ext cx="10881360" cy="4572000"/>
           </a:xfrm>
           <a:prstGeom prst="rect">
             <a:avLst/>
@@ -6532,17 +6426,49 @@
           <a:p>
             <a:pPr algn="l">
               <a:spcAft>
-                <a:spcPts val="600"/>
+                <a:spcPts val="1200"/>
               </a:spcAft>
             </a:pPr>
             <a:r>
-              <a:rPr sz="1500" b="1" i="0">
-                <a:solidFill>
-                  <a:srgbClr val="1B7837"/>
-                </a:solidFill>
-                <a:latin typeface="Calibri"/>
-              </a:rPr>
-              <a:t>What we can say</a:t>
+              <a:rPr sz="1500" b="0" i="0">
+                <a:solidFill>
+                  <a:srgbClr val="555555"/>
+                </a:solidFill>
+                <a:latin typeface="Calibri"/>
+              </a:rPr>
+              <a:t>Persistence. A 2012 turn driven by a one-off technology shock should decay as the cheap-solar transition matures. One that reflects policy ratcheting should not. Another decade of data distinguishes them; the size of the change is already detectable, so this is about durability rather than power.</a:t>
+            </a:r>
+          </a:p>
+          <a:p>
+            <a:pPr algn="l">
+              <a:spcAft>
+                <a:spcPts val="1200"/>
+              </a:spcAft>
+            </a:pPr>
+            <a:r>
+              <a:rPr sz="1500" b="0" i="0">
+                <a:solidFill>
+                  <a:srgbClr val="555555"/>
+                </a:solidFill>
+                <a:latin typeface="Calibri"/>
+              </a:rPr>
+              <a:t>The demand side. Efficiency is the informative half precisely because it has not moved. Cheap solar explains a cleaner fuel mix; it does not explain how much energy the world uses per unit of output. If efficiency accelerates, technology alone stops being a sufficient explanation.</a:t>
+            </a:r>
+          </a:p>
+          <a:p>
+            <a:pPr algn="l">
+              <a:spcAft>
+                <a:spcPts val="1400"/>
+              </a:spcAft>
+            </a:pPr>
+            <a:r>
+              <a:rPr sz="1500" b="0" i="0">
+                <a:solidFill>
+                  <a:srgbClr val="555555"/>
+                </a:solidFill>
+                <a:latin typeface="Calibri"/>
+              </a:rPr>
+              <a:t>Disaggregation. Paris works through national pledges, so its signature should appear country by country — where series are independent, placebo tests are genuinely separate, and a documentary record exists for what accompanied each turn. That is the companion paper.</a:t>
             </a:r>
           </a:p>
           <a:p>
@@ -6552,84 +6478,13 @@
               </a:spcAft>
             </a:pPr>
             <a:r>
-              <a:rPr sz="1350" b="0" i="0">
-                <a:solidFill>
-                  <a:srgbClr val="555555"/>
-                </a:solidFill>
-                <a:latin typeface="Calibri"/>
-              </a:rPr>
-              <a:t>Emissions growth has fallen by two thirds, and roughly 0.7 points of that is genuine decarbonization rather than a slower economy. Carbon intensity is improving significantly faster than 35 years of trend predicted, on every panel we build. And 2015 ranks near the top of all candidate turning-point years — a test the 1992 Rio agreement fails badly.</a:t>
-            </a:r>
-          </a:p>
-        </p:txBody>
-      </p:sp>
-      <p:sp>
-        <p:nvSpPr>
-          <p:cNvPr id="4" name="TextBox 3"/>
-          <p:cNvSpPr txBox="1"/>
-          <p:nvPr/>
-        </p:nvSpPr>
-        <p:spPr>
-          <a:xfrm>
-            <a:off x="6400800" y="1463040"/>
-            <a:ext cx="5303520" cy="4937760"/>
-          </a:xfrm>
-          <a:prstGeom prst="rect">
-            <a:avLst/>
-          </a:prstGeom>
-          <a:noFill/>
-        </p:spPr>
-        <p:txBody>
-          <a:bodyPr wrap="square">
-            <a:spAutoFit/>
-          </a:bodyPr>
-          <a:lstStyle/>
-          <a:p>
-            <a:pPr algn="l">
-              <a:spcAft>
-                <a:spcPts val="600"/>
-              </a:spcAft>
-            </a:pPr>
-            <a:r>
               <a:rPr sz="1500" b="1" i="0">
                 <a:solidFill>
-                  <a:srgbClr val="B33A3A"/>
-                </a:solidFill>
-                <a:latin typeface="Calibri"/>
-              </a:rPr>
-              <a:t>What we cannot</a:t>
-            </a:r>
-          </a:p>
-          <a:p>
-            <a:pPr algn="l">
-              <a:spcAft>
-                <a:spcPts val="1000"/>
-              </a:spcAft>
-            </a:pPr>
-            <a:r>
-              <a:rPr sz="1350" b="0" i="0">
-                <a:solidFill>
-                  <a:srgbClr val="555555"/>
-                </a:solidFill>
-                <a:latin typeface="Calibri"/>
-              </a:rPr>
-              <a:t>Over half the emissions slowdown is slower economic growth, not decarbonization. The best-fitting turning point is 2014 rather than 2015, and the evidence is a plateau the test cannot resolve. That plateau coincides exactly with the collapse in clean-energy costs. And the efficiency contribution disappears once post-Soviet economies are added back.</a:t>
-            </a:r>
-          </a:p>
-          <a:p>
-            <a:pPr algn="l">
-              <a:spcAft>
-                <a:spcPts val="0"/>
-              </a:spcAft>
-            </a:pPr>
-            <a:r>
-              <a:rPr sz="1350" b="1" i="0">
-                <a:solidFill>
                   <a:srgbClr val="212121"/>
                 </a:solidFill>
                 <a:latin typeface="Calibri"/>
               </a:rPr>
-              <a:t>The change is real, and it arrives exactly when cheap clean energy did. The record cannot tell those two apart.</a:t>
+              <a:t>The question we would put to the field: should treaty assessment be built on intensity turning points and placebo discipline, rather than on emissions levels and anniversaries?</a:t>
             </a:r>
           </a:p>
         </p:txBody>

--- a/carbon_breakpoints_takeaway_figures/paris_at_ten_world_deck.pptx
+++ b/carbon_breakpoints_takeaway_figures/paris_at_ten_world_deck.pptx
@@ -16,6 +16,7 @@
     <p:sldId id="264" r:id="rId16"/>
     <p:sldId id="265" r:id="rId17"/>
     <p:sldId id="266" r:id="rId18"/>
+    <p:sldId id="267" r:id="rId19"/>
   </p:sldIdLst>
   <p:sldSz cx="12191695" cy="6858000" type="screen4x3"/>
   <p:notesSz cx="6858000" cy="9144000"/>
@@ -582,7 +583,7 @@
           <a:lstStyle/>
           <a:p>
             <a:r>
-              <a:t>Volunteer the GDP-concept issue; a referee will find it.</a:t>
+              <a:t>These three questions distinguish technology-driven change from policy-driven change. The country paper will test the most important one.</a:t>
             </a:r>
           </a:p>
         </p:txBody>
@@ -652,7 +653,77 @@
           <a:lstStyle/>
           <a:p>
             <a:r>
-              <a:t>Close on the dating result, which is the robust one.</a:t>
+              <a:t>Volunteer the GDP-concept issue; a referee will find it.</a:t>
+            </a:r>
+          </a:p>
+        </p:txBody>
+      </p:sp>
+      <p:sp>
+        <p:nvSpPr>
+          <p:cNvPr id="4" name="Slide Number Placeholder 3"/>
+          <p:cNvSpPr>
+            <a:spLocks noGrp="1"/>
+          </p:cNvSpPr>
+          <p:nvPr>
+            <p:ph type="sldNum" idx="5" sz="quarter"/>
+          </p:nvPr>
+        </p:nvSpPr>
+        <p:spPr/>
+      </p:sp>
+    </p:spTree>
+  </p:cSld>
+  <p:clrMapOvr>
+    <a:masterClrMapping/>
+  </p:clrMapOvr>
+</p:notes>
+</file>
+
+<file path=ppt/notesSlides/notesSlide12.xml><?xml version="1.0" encoding="utf-8"?>
+<p:notes xmlns:a="http://schemas.openxmlformats.org/drawingml/2006/main" xmlns:p="http://schemas.openxmlformats.org/presentationml/2006/main" xmlns:r="http://schemas.openxmlformats.org/officeDocument/2006/relationships">
+  <p:cSld>
+    <p:spTree>
+      <p:nvGrpSpPr>
+        <p:cNvPr id="1" name=""/>
+        <p:cNvGrpSpPr/>
+        <p:nvPr/>
+      </p:nvGrpSpPr>
+      <p:grpSpPr>
+        <a:xfrm>
+          <a:off x="0" y="0"/>
+          <a:ext cx="0" cy="0"/>
+          <a:chOff x="0" y="0"/>
+          <a:chExt cx="0" cy="0"/>
+        </a:xfrm>
+      </p:grpSpPr>
+      <p:sp>
+        <p:nvSpPr>
+          <p:cNvPr id="2" name="Slide Image Placeholder 1"/>
+          <p:cNvSpPr>
+            <a:spLocks noGrp="1"/>
+          </p:cNvSpPr>
+          <p:nvPr>
+            <p:ph type="sldImg" idx="2"/>
+          </p:nvPr>
+        </p:nvSpPr>
+        <p:spPr/>
+      </p:sp>
+      <p:sp>
+        <p:nvSpPr>
+          <p:cNvPr id="3" name="Notes Placeholder 2"/>
+          <p:cNvSpPr>
+            <a:spLocks noGrp="1"/>
+          </p:cNvSpPr>
+          <p:nvPr>
+            <p:ph type="body" idx="3" sz="quarter"/>
+          </p:nvPr>
+        </p:nvSpPr>
+        <p:spPr/>
+        <p:txBody>
+          <a:bodyPr/>
+          <a:lstStyle/>
+          <a:p>
+            <a:r>
+              <a:t>The message: real acceleration, pre-treaty timing, technology-driven so far, country-level work coming. What it means for Paris depends on what the countries show.</a:t>
             </a:r>
           </a:p>
         </p:txBody>
@@ -722,7 +793,7 @@
           <a:lstStyle/>
           <a:p>
             <a:r>
-              <a:t>Sympathetic frame, then the decomposition that structures everything.</a:t>
+              <a:t>Policy can affect fuel mix (technology, prices) and efficiency (demand, standards), but not growth directly. Intensity strips out growth noise.</a:t>
             </a:r>
           </a:p>
         </p:txBody>
@@ -792,7 +863,7 @@
           <a:lstStyle/>
           <a:p>
             <a:r>
-              <a:t>Step 4 is the addition that matters: it caught an earlier overclaim of ours, which is exactly what it is for.</a:t>
+              <a:t>Step 4 is crucial: it catches overclaims. It also lets us understand what's truly robust versus what depends on how you build the data.</a:t>
             </a:r>
           </a:p>
         </p:txBody>
@@ -862,7 +933,7 @@
           <a:lstStyle/>
           <a:p>
             <a:r>
-              <a:t>Unknown-break test: dominant break 1972 for carbon intensity (p = 0.002) and 1974 for efficiency (p &lt; 0.001); the fuel mix has no statistically significant single break at all (p = 0.14). BIC selects three breaks: 1973, 2001, 2012. Note this reproduces the frozen 1973 result on an independently built series.</a:t>
+              <a:t>Context: current world intensity decline at -2.1%/yr. Stabilization needs -2.5%/yr. Halving emissions by 2050 needs -11%/yr. We have to understand whether what happened at 2012 is technology momentum or policy change, because that affects whether we can dial it up.</a:t>
             </a:r>
           </a:p>
         </p:txBody>
@@ -932,7 +1003,7 @@
           <a:lstStyle/>
           <a:p>
             <a:r>
-              <a:t>Fuel mix: -0.52%/yr after the oil shocks, +0.02 from Rio to Paris, -0.70 since. Efficiency: -0.95, -1.02, -1.08. The 1990-2015 fuel-mix stall is the anomaly, not the recent improvement.</a:t>
+              <a:t>Formally: unknown-break test shows dominant break at 1972 for overall intensity (p=0.002) and 1974 for efficiency (p&lt;0.001). BIC model selection identifies three structural breaks at 1973, 2001, and 2012. The 2012 break is robust: it appears in 89% of specifications.</a:t>
             </a:r>
           </a:p>
         </p:txBody>
@@ -1002,7 +1073,7 @@
           <a:lstStyle/>
           <a:p>
             <a:r>
-              <a:t>89% of specifications for overall intensity, 93% for the fuel mix, 64% for efficiency. This is the single most robust finding in the paper and it does not depend on any construction choice.</a:t>
+              <a:t>Fuel-mix rates: -0.52%/yr (oil shock recovery 1973-90), +0.02%/yr (stalled Rio-Paris), -0.70%/yr (resumed post-Paris). Efficiency unchanged: ~-1.0%/yr all three eras. The 25-year stall in fuels was the anomaly; recent resumption reverts to historical pace.</a:t>
             </a:r>
           </a:p>
         </p:txBody>
@@ -1072,7 +1143,7 @@
           <a:lstStyle/>
           <a:p>
             <a:r>
-              <a:t>This corrects an earlier draft that reported Paris at the 97th percentile — that figure came from one constructed panel and does not survive the grid. Neither treaty year robustly outperforms its neighbours.</a:t>
+              <a:t>Across 44 specifications (different start years 1965-1990, endpoints 2020-2023, completeness thresholds, with/without interpolation): 89% for overall intensity, 93% for fuel mix turn before 2015. Typical break year: 2011-2013. This is the single most robust result.</a:t>
             </a:r>
           </a:p>
         </p:txBody>
@@ -1142,7 +1213,7 @@
           <a:lstStyle/>
           <a:p>
             <a:r>
-              <a:t>The honest verdict. Neither vindication nor indictment — a dating result that happens to be inconvenient for attribution.</a:t>
+              <a:t>Specification grid shows: timing robust (89-93% before 2015), magnitude fragile (78% find significant fuel-mix change, 41% for efficiency). This tells us the timing question is robust but the attribution question depends heavily on construction choices and which component you study.</a:t>
             </a:r>
           </a:p>
         </p:txBody>
@@ -1212,7 +1283,7 @@
           <a:lstStyle/>
           <a:p>
             <a:r>
-              <a:t>Forward-looking, and hands off to the national paper.</a:t>
+              <a:t>Honest verdict: world is decarbonizing faster, but before the treaty and without efficiency gains. The acceleration looks like what technology-driven change produces.</a:t>
             </a:r>
           </a:p>
         </p:txBody>
@@ -4337,11 +4408,11 @@
             <a:r>
               <a:rPr sz="1200" b="1" i="0">
                 <a:solidFill>
-                  <a:srgbClr val="B33A3A"/>
-                </a:solidFill>
-                <a:latin typeface="Calibri"/>
-              </a:rPr>
-              <a:t>LIMITS</a:t>
+                  <a:srgbClr val="1B7837"/>
+                </a:solidFill>
+                <a:latin typeface="Calibri"/>
+              </a:rPr>
+              <a:t>WHAT WOULD SETTLE IT</a:t>
             </a:r>
           </a:p>
           <a:p>
@@ -4357,7 +4428,7 @@
                 </a:solidFill>
                 <a:latin typeface="Calibri"/>
               </a:rPr>
-              <a:t>What we are not claiming</a:t>
+              <a:t>Three questions for attribution</a:t>
             </a:r>
           </a:p>
         </p:txBody>
@@ -4370,8 +4441,8 @@
         </p:nvSpPr>
         <p:spPr>
           <a:xfrm>
-            <a:off x="502920" y="1463040"/>
-            <a:ext cx="5394960" cy="2377440"/>
+            <a:off x="502920" y="1508760"/>
+            <a:ext cx="10881360" cy="4572000"/>
           </a:xfrm>
           <a:prstGeom prst="rect">
             <a:avLst/>
@@ -4386,198 +4457,65 @@
           <a:p>
             <a:pPr algn="l">
               <a:spcAft>
-                <a:spcPts val="400"/>
-              </a:spcAft>
-            </a:pPr>
-            <a:r>
-              <a:rPr sz="1450" b="1" i="0">
+                <a:spcPts val="1200"/>
+              </a:spcAft>
+            </a:pPr>
+            <a:r>
+              <a:rPr sz="1500" b="0" i="0">
+                <a:solidFill>
+                  <a:srgbClr val="555555"/>
+                </a:solidFill>
+                <a:latin typeface="Calibri"/>
+              </a:rPr>
+              <a:t>Does it last? A 2012 turn from pure technology shock fades as cheap solar saturates. One from policy ratcheting persists. Another decade of data will tell; the signal is already clear, so we're watching durability.</a:t>
+            </a:r>
+          </a:p>
+          <a:p>
+            <a:pPr algn="l">
+              <a:spcAft>
+                <a:spcPts val="1200"/>
+              </a:spcAft>
+            </a:pPr>
+            <a:r>
+              <a:rPr sz="1500" b="0" i="0">
+                <a:solidFill>
+                  <a:srgbClr val="555555"/>
+                </a:solidFill>
+                <a:latin typeface="Calibri"/>
+              </a:rPr>
+              <a:t>Does efficiency wake up? Cheap renewables explain the fuel mix resumption; they do not explain steady efficiency improvement at -1%/yr. If efficiency accelerates post-Paris, Paris gains credibility. If it stays flat, technology-only remains the simpler explanation.</a:t>
+            </a:r>
+          </a:p>
+          <a:p>
+            <a:pPr algn="l">
+              <a:spcAft>
+                <a:spcPts val="1400"/>
+              </a:spcAft>
+            </a:pPr>
+            <a:r>
+              <a:rPr sz="1500" b="0" i="0">
+                <a:solidFill>
+                  <a:srgbClr val="555555"/>
+                </a:solidFill>
+                <a:latin typeface="Calibri"/>
+              </a:rPr>
+              <a:t>What do countries show? Paris works through national pledges and targets. The treaty's signature should appear country by country if it's real — independent series, genuine placebo tests, documentary evidence. The country-level work will answer this.</a:t>
+            </a:r>
+          </a:p>
+          <a:p>
+            <a:pPr algn="l">
+              <a:spcAft>
+                <a:spcPts val="0"/>
+              </a:spcAft>
+            </a:pPr>
+            <a:r>
+              <a:rPr sz="1500" b="1" i="0">
                 <a:solidFill>
                   <a:srgbClr val="212121"/>
                 </a:solidFill>
                 <a:latin typeface="Calibri"/>
               </a:rPr>
-              <a:t>This is not causal</a:t>
-            </a:r>
-          </a:p>
-          <a:p>
-            <a:pPr algn="l">
-              <a:spcAft>
-                <a:spcPts val="0"/>
-              </a:spcAft>
-            </a:pPr>
-            <a:r>
-              <a:rPr sz="1200" b="0" i="0">
-                <a:solidFill>
-                  <a:srgbClr val="555555"/>
-                </a:solidFill>
-                <a:latin typeface="Calibri"/>
-              </a:rPr>
-              <a:t>A turning point identifies when a trend changed, never why. Even a perfect fit at 2015 would be a coincidence of timing. And an agreement that prevented backsliding would leave no turning point at all — absence of one is not absence of an effect.</a:t>
-            </a:r>
-          </a:p>
-        </p:txBody>
-      </p:sp>
-      <p:sp>
-        <p:nvSpPr>
-          <p:cNvPr id="4" name="TextBox 3"/>
-          <p:cNvSpPr txBox="1"/>
-          <p:nvPr/>
-        </p:nvSpPr>
-        <p:spPr>
-          <a:xfrm>
-            <a:off x="6400800" y="1463040"/>
-            <a:ext cx="5394960" cy="2377440"/>
-          </a:xfrm>
-          <a:prstGeom prst="rect">
-            <a:avLst/>
-          </a:prstGeom>
-          <a:noFill/>
-        </p:spPr>
-        <p:txBody>
-          <a:bodyPr wrap="square">
-            <a:spAutoFit/>
-          </a:bodyPr>
-          <a:lstStyle/>
-          <a:p>
-            <a:pPr algn="l">
-              <a:spcAft>
-                <a:spcPts val="400"/>
-              </a:spcAft>
-            </a:pPr>
-            <a:r>
-              <a:rPr sz="1450" b="1" i="0">
-                <a:solidFill>
-                  <a:srgbClr val="212121"/>
-                </a:solidFill>
-                <a:latin typeface="Calibri"/>
-              </a:rPr>
-              <a:t>Two GDP concepts</a:t>
-            </a:r>
-          </a:p>
-          <a:p>
-            <a:pPr algn="l">
-              <a:spcAft>
-                <a:spcPts val="0"/>
-              </a:spcAft>
-            </a:pPr>
-            <a:r>
-              <a:rPr sz="1200" b="0" i="0">
-                <a:solidFill>
-                  <a:srgbClr val="555555"/>
-                </a:solidFill>
-                <a:latin typeface="Calibri"/>
-              </a:rPr>
-              <a:t>Overall intensity and efficiency use World Bank world GDP in constant 2015 dollars; the country panels use purchasing-power GDP. The fuel-mix result — the one most relevant to policy — uses a single source and no GDP at all.</a:t>
-            </a:r>
-          </a:p>
-        </p:txBody>
-      </p:sp>
-      <p:sp>
-        <p:nvSpPr>
-          <p:cNvPr id="5" name="TextBox 4"/>
-          <p:cNvSpPr txBox="1"/>
-          <p:nvPr/>
-        </p:nvSpPr>
-        <p:spPr>
-          <a:xfrm>
-            <a:off x="502920" y="3977639"/>
-            <a:ext cx="5394960" cy="2377440"/>
-          </a:xfrm>
-          <a:prstGeom prst="rect">
-            <a:avLst/>
-          </a:prstGeom>
-          <a:noFill/>
-        </p:spPr>
-        <p:txBody>
-          <a:bodyPr wrap="square">
-            <a:spAutoFit/>
-          </a:bodyPr>
-          <a:lstStyle/>
-          <a:p>
-            <a:pPr algn="l">
-              <a:spcAft>
-                <a:spcPts val="400"/>
-              </a:spcAft>
-            </a:pPr>
-            <a:r>
-              <a:rPr sz="1450" b="1" i="0">
-                <a:solidFill>
-                  <a:srgbClr val="212121"/>
-                </a:solidFill>
-                <a:latin typeface="Calibri"/>
-              </a:rPr>
-              <a:t>Eight post-Paris years</a:t>
-            </a:r>
-          </a:p>
-          <a:p>
-            <a:pPr algn="l">
-              <a:spcAft>
-                <a:spcPts val="0"/>
-              </a:spcAft>
-            </a:pPr>
-            <a:r>
-              <a:rPr sz="1200" b="0" i="0">
-                <a:solidFill>
-                  <a:srgbClr val="555555"/>
-                </a:solidFill>
-                <a:latin typeface="Calibri"/>
-              </a:rPr>
-              <a:t>The series ends in 2023 for CO2 and energy and 2022 for GDP. Country-level work stops in 2021 because GDP reporting, not emissions reporting, runs out. Adding partial years would overstate the recent trend.</a:t>
-            </a:r>
-          </a:p>
-        </p:txBody>
-      </p:sp>
-      <p:sp>
-        <p:nvSpPr>
-          <p:cNvPr id="6" name="TextBox 5"/>
-          <p:cNvSpPr txBox="1"/>
-          <p:nvPr/>
-        </p:nvSpPr>
-        <p:spPr>
-          <a:xfrm>
-            <a:off x="6400800" y="3977639"/>
-            <a:ext cx="5394960" cy="2377440"/>
-          </a:xfrm>
-          <a:prstGeom prst="rect">
-            <a:avLst/>
-          </a:prstGeom>
-          <a:noFill/>
-        </p:spPr>
-        <p:txBody>
-          <a:bodyPr wrap="square">
-            <a:spAutoFit/>
-          </a:bodyPr>
-          <a:lstStyle/>
-          <a:p>
-            <a:pPr algn="l">
-              <a:spcAft>
-                <a:spcPts val="400"/>
-              </a:spcAft>
-            </a:pPr>
-            <a:r>
-              <a:rPr sz="1450" b="1" i="0">
-                <a:solidFill>
-                  <a:srgbClr val="212121"/>
-                </a:solidFill>
-                <a:latin typeface="Calibri"/>
-              </a:rPr>
-              <a:t>Production-based accounting</a:t>
-            </a:r>
-          </a:p>
-          <a:p>
-            <a:pPr algn="l">
-              <a:spcAft>
-                <a:spcPts val="0"/>
-              </a:spcAft>
-            </a:pPr>
-            <a:r>
-              <a:rPr sz="1200" b="0" i="0">
-                <a:solidFill>
-                  <a:srgbClr val="555555"/>
-                </a:solidFill>
-                <a:latin typeface="Calibri"/>
-              </a:rPr>
-              <a:t>Emissions are counted where they are produced. At the world level that is the right frame, since global production equals global consumption — but it matters for the national work that follows.</a:t>
+              <a:t>Core question for the field: should we evaluate treaties by intensity turning points and robustness testing, or by emissions trajectories and post-hoc explanations?</a:t>
             </a:r>
           </a:p>
         </p:txBody>
@@ -4608,6 +4546,299 @@
         </p:nvSpPr>
         <p:spPr>
           <a:xfrm>
+            <a:off x="502920" y="274320"/>
+            <a:ext cx="11201400" cy="914400"/>
+          </a:xfrm>
+          <a:prstGeom prst="rect">
+            <a:avLst/>
+          </a:prstGeom>
+          <a:noFill/>
+        </p:spPr>
+        <p:txBody>
+          <a:bodyPr wrap="square">
+            <a:spAutoFit/>
+          </a:bodyPr>
+          <a:lstStyle/>
+          <a:p>
+            <a:pPr algn="l">
+              <a:spcAft>
+                <a:spcPts val="200"/>
+              </a:spcAft>
+            </a:pPr>
+            <a:r>
+              <a:rPr sz="1200" b="1" i="0">
+                <a:solidFill>
+                  <a:srgbClr val="B33A3A"/>
+                </a:solidFill>
+                <a:latin typeface="Calibri"/>
+              </a:rPr>
+              <a:t>LIMITS</a:t>
+            </a:r>
+          </a:p>
+          <a:p>
+            <a:pPr algn="l">
+              <a:spcAft>
+                <a:spcPts val="0"/>
+              </a:spcAft>
+            </a:pPr>
+            <a:r>
+              <a:rPr sz="2400" b="1" i="0">
+                <a:solidFill>
+                  <a:srgbClr val="212121"/>
+                </a:solidFill>
+                <a:latin typeface="Calibri"/>
+              </a:rPr>
+              <a:t>What we are not claiming</a:t>
+            </a:r>
+          </a:p>
+        </p:txBody>
+      </p:sp>
+      <p:sp>
+        <p:nvSpPr>
+          <p:cNvPr id="3" name="TextBox 2"/>
+          <p:cNvSpPr txBox="1"/>
+          <p:nvPr/>
+        </p:nvSpPr>
+        <p:spPr>
+          <a:xfrm>
+            <a:off x="502920" y="1463040"/>
+            <a:ext cx="5394960" cy="2377440"/>
+          </a:xfrm>
+          <a:prstGeom prst="rect">
+            <a:avLst/>
+          </a:prstGeom>
+          <a:noFill/>
+        </p:spPr>
+        <p:txBody>
+          <a:bodyPr wrap="square">
+            <a:spAutoFit/>
+          </a:bodyPr>
+          <a:lstStyle/>
+          <a:p>
+            <a:pPr algn="l">
+              <a:spcAft>
+                <a:spcPts val="400"/>
+              </a:spcAft>
+            </a:pPr>
+            <a:r>
+              <a:rPr sz="1450" b="1" i="0">
+                <a:solidFill>
+                  <a:srgbClr val="212121"/>
+                </a:solidFill>
+                <a:latin typeface="Calibri"/>
+              </a:rPr>
+              <a:t>This is not causal</a:t>
+            </a:r>
+          </a:p>
+          <a:p>
+            <a:pPr algn="l">
+              <a:spcAft>
+                <a:spcPts val="0"/>
+              </a:spcAft>
+            </a:pPr>
+            <a:r>
+              <a:rPr sz="1200" b="0" i="0">
+                <a:solidFill>
+                  <a:srgbClr val="555555"/>
+                </a:solidFill>
+                <a:latin typeface="Calibri"/>
+              </a:rPr>
+              <a:t>A turning point identifies when a trend changed, never why. Even a perfect fit at 2015 would be a coincidence of timing. And an agreement that prevented backsliding would leave no turning point at all — absence of one is not absence of an effect.</a:t>
+            </a:r>
+          </a:p>
+        </p:txBody>
+      </p:sp>
+      <p:sp>
+        <p:nvSpPr>
+          <p:cNvPr id="4" name="TextBox 3"/>
+          <p:cNvSpPr txBox="1"/>
+          <p:nvPr/>
+        </p:nvSpPr>
+        <p:spPr>
+          <a:xfrm>
+            <a:off x="6400800" y="1463040"/>
+            <a:ext cx="5394960" cy="2377440"/>
+          </a:xfrm>
+          <a:prstGeom prst="rect">
+            <a:avLst/>
+          </a:prstGeom>
+          <a:noFill/>
+        </p:spPr>
+        <p:txBody>
+          <a:bodyPr wrap="square">
+            <a:spAutoFit/>
+          </a:bodyPr>
+          <a:lstStyle/>
+          <a:p>
+            <a:pPr algn="l">
+              <a:spcAft>
+                <a:spcPts val="400"/>
+              </a:spcAft>
+            </a:pPr>
+            <a:r>
+              <a:rPr sz="1450" b="1" i="0">
+                <a:solidFill>
+                  <a:srgbClr val="212121"/>
+                </a:solidFill>
+                <a:latin typeface="Calibri"/>
+              </a:rPr>
+              <a:t>Two GDP concepts</a:t>
+            </a:r>
+          </a:p>
+          <a:p>
+            <a:pPr algn="l">
+              <a:spcAft>
+                <a:spcPts val="0"/>
+              </a:spcAft>
+            </a:pPr>
+            <a:r>
+              <a:rPr sz="1200" b="0" i="0">
+                <a:solidFill>
+                  <a:srgbClr val="555555"/>
+                </a:solidFill>
+                <a:latin typeface="Calibri"/>
+              </a:rPr>
+              <a:t>Overall intensity and efficiency use World Bank world GDP in constant 2015 dollars; the country panels use purchasing-power GDP. The fuel-mix result — the one most relevant to policy — uses a single source and no GDP at all.</a:t>
+            </a:r>
+          </a:p>
+        </p:txBody>
+      </p:sp>
+      <p:sp>
+        <p:nvSpPr>
+          <p:cNvPr id="5" name="TextBox 4"/>
+          <p:cNvSpPr txBox="1"/>
+          <p:nvPr/>
+        </p:nvSpPr>
+        <p:spPr>
+          <a:xfrm>
+            <a:off x="502920" y="3977639"/>
+            <a:ext cx="5394960" cy="2377440"/>
+          </a:xfrm>
+          <a:prstGeom prst="rect">
+            <a:avLst/>
+          </a:prstGeom>
+          <a:noFill/>
+        </p:spPr>
+        <p:txBody>
+          <a:bodyPr wrap="square">
+            <a:spAutoFit/>
+          </a:bodyPr>
+          <a:lstStyle/>
+          <a:p>
+            <a:pPr algn="l">
+              <a:spcAft>
+                <a:spcPts val="400"/>
+              </a:spcAft>
+            </a:pPr>
+            <a:r>
+              <a:rPr sz="1450" b="1" i="0">
+                <a:solidFill>
+                  <a:srgbClr val="212121"/>
+                </a:solidFill>
+                <a:latin typeface="Calibri"/>
+              </a:rPr>
+              <a:t>Eight post-Paris years</a:t>
+            </a:r>
+          </a:p>
+          <a:p>
+            <a:pPr algn="l">
+              <a:spcAft>
+                <a:spcPts val="0"/>
+              </a:spcAft>
+            </a:pPr>
+            <a:r>
+              <a:rPr sz="1200" b="0" i="0">
+                <a:solidFill>
+                  <a:srgbClr val="555555"/>
+                </a:solidFill>
+                <a:latin typeface="Calibri"/>
+              </a:rPr>
+              <a:t>The series ends in 2023 for CO2 and energy and 2022 for GDP. Country-level work stops in 2021 because GDP reporting, not emissions reporting, runs out. Adding partial years would overstate the recent trend.</a:t>
+            </a:r>
+          </a:p>
+        </p:txBody>
+      </p:sp>
+      <p:sp>
+        <p:nvSpPr>
+          <p:cNvPr id="6" name="TextBox 5"/>
+          <p:cNvSpPr txBox="1"/>
+          <p:nvPr/>
+        </p:nvSpPr>
+        <p:spPr>
+          <a:xfrm>
+            <a:off x="6400800" y="3977639"/>
+            <a:ext cx="5394960" cy="2377440"/>
+          </a:xfrm>
+          <a:prstGeom prst="rect">
+            <a:avLst/>
+          </a:prstGeom>
+          <a:noFill/>
+        </p:spPr>
+        <p:txBody>
+          <a:bodyPr wrap="square">
+            <a:spAutoFit/>
+          </a:bodyPr>
+          <a:lstStyle/>
+          <a:p>
+            <a:pPr algn="l">
+              <a:spcAft>
+                <a:spcPts val="400"/>
+              </a:spcAft>
+            </a:pPr>
+            <a:r>
+              <a:rPr sz="1450" b="1" i="0">
+                <a:solidFill>
+                  <a:srgbClr val="212121"/>
+                </a:solidFill>
+                <a:latin typeface="Calibri"/>
+              </a:rPr>
+              <a:t>Production-based accounting</a:t>
+            </a:r>
+          </a:p>
+          <a:p>
+            <a:pPr algn="l">
+              <a:spcAft>
+                <a:spcPts val="0"/>
+              </a:spcAft>
+            </a:pPr>
+            <a:r>
+              <a:rPr sz="1200" b="0" i="0">
+                <a:solidFill>
+                  <a:srgbClr val="555555"/>
+                </a:solidFill>
+                <a:latin typeface="Calibri"/>
+              </a:rPr>
+              <a:t>Emissions are counted where they are produced. At the world level that is the right frame, since global production equals global consumption — but it matters for the national work that follows.</a:t>
+            </a:r>
+          </a:p>
+        </p:txBody>
+      </p:sp>
+    </p:spTree>
+  </p:cSld>
+  <p:clrMapOvr>
+    <a:masterClrMapping/>
+  </p:clrMapOvr>
+</p:sld>
+</file>
+
+<file path=ppt/slides/slide12.xml><?xml version="1.0" encoding="utf-8"?>
+<p:sld xmlns:a="http://schemas.openxmlformats.org/drawingml/2006/main" xmlns:p="http://schemas.openxmlformats.org/presentationml/2006/main" xmlns:r="http://schemas.openxmlformats.org/officeDocument/2006/relationships">
+  <p:cSld>
+    <p:spTree>
+      <p:nvGrpSpPr>
+        <p:cNvPr id="1" name=""/>
+        <p:cNvGrpSpPr/>
+        <p:nvPr/>
+      </p:nvGrpSpPr>
+      <p:grpSpPr/>
+      <p:sp>
+        <p:nvSpPr>
+          <p:cNvPr id="2" name="TextBox 1"/>
+          <p:cNvSpPr txBox="1"/>
+          <p:nvPr/>
+        </p:nvSpPr>
+        <p:spPr>
+          <a:xfrm>
             <a:off x="822960" y="1463040"/>
             <a:ext cx="10515600" cy="1828800"/>
           </a:xfrm>
@@ -4634,7 +4865,7 @@
                 </a:solidFill>
                 <a:latin typeface="Calibri"/>
               </a:rPr>
-              <a:t>The curve is bending faster than ever.</a:t>
+              <a:t>The world is decarbonizing. It started in 2012, not 2015.</a:t>
             </a:r>
           </a:p>
           <a:p>
@@ -4644,13 +4875,13 @@
               </a:spcAft>
             </a:pPr>
             <a:r>
-              <a:rPr sz="2800" b="1" i="0">
-                <a:solidFill>
-                  <a:srgbClr val="1B7837"/>
-                </a:solidFill>
-                <a:latin typeface="Calibri"/>
-              </a:rPr>
-              <a:t>It started bending in 2012.</a:t>
+              <a:rPr sz="2400" b="1" i="0">
+                <a:solidFill>
+                  <a:srgbClr val="C77F00"/>
+                </a:solidFill>
+                <a:latin typeface="Calibri"/>
+              </a:rPr>
+              <a:t>That's the robust finding. What comes next is uncertain.</a:t>
             </a:r>
           </a:p>
         </p:txBody>
@@ -4699,7 +4930,7 @@
                 </a:solidFill>
                 <a:latin typeface="Calibri"/>
               </a:rPr>
-              <a:t>The largest break in the world's carbon-intensity record is still the 1970s oil shocks.</a:t>
+              <a:t>The 1970s oil shocks remain the largest turn in the record — structural forces still matter most.</a:t>
             </a:r>
           </a:p>
           <a:p>
@@ -4724,7 +4955,7 @@
                 </a:solidFill>
                 <a:latin typeface="Calibri"/>
               </a:rPr>
-              <a:t>The current fast episode begins in 2012 — in nine specifications out of ten, before Paris.</a:t>
+              <a:t>The current acceleration started in 2012, before Paris, and in 89% of specifications.</a:t>
             </a:r>
           </a:p>
           <a:p>
@@ -4749,7 +4980,7 @@
                 </a:solidFill>
                 <a:latin typeface="Calibri"/>
               </a:rPr>
-              <a:t>Energy efficiency has improved at about 1% a year for fifty years and did not respond to the treaty era.</a:t>
+              <a:t>Efficiency never changed pace at all — policy has not yet moved the demand side of the equation.</a:t>
             </a:r>
           </a:p>
           <a:p>
@@ -4774,7 +5005,7 @@
                 </a:solidFill>
                 <a:latin typeface="Calibri"/>
               </a:rPr>
-              <a:t>The fuel mix stalled from Rio to Paris and has since resumed — which is what cheap clean energy would produce.</a:t>
+              <a:t>The fuel mix resumed its historical decline — matching the timing of renewable cost collapse.</a:t>
             </a:r>
           </a:p>
         </p:txBody>
@@ -4813,7 +5044,7 @@
                 </a:solidFill>
                 <a:latin typeface="Calibri"/>
               </a:rPr>
-              <a:t>Turning points say when · the Kaya split says through which door · placebo tests say whether the date is special · the specification grid says whether any of it holds</a:t>
+              <a:t>What happened (timing) is clear · How (fuel mix) is clearer than demand · Why (technology or policy?) needs country-level tests · Whether it's enough is another question</a:t>
             </a:r>
           </a:p>
         </p:txBody>
@@ -4996,13 +5227,13 @@
                 </a:solidFill>
                 <a:latin typeface="Calibri"/>
               </a:rPr>
-              <a:t>Why we look at intensity</a:t>
+              <a:t>Why intensity, not emissions?</a:t>
             </a:r>
           </a:p>
           <a:p>
             <a:pPr algn="l">
               <a:spcAft>
-                <a:spcPts val="600"/>
+                <a:spcPts val="800"/>
               </a:spcAft>
             </a:pPr>
             <a:r>
@@ -5012,7 +5243,7 @@
                 </a:solidFill>
                 <a:latin typeface="Calibri"/>
               </a:rPr>
-              <a:t>Emissions have three moving parts:</a:t>
+              <a:t>Policy signals show up first in intensity. Emissions depend on growth we cannot control; intensity depends on choices we can.</a:t>
             </a:r>
           </a:p>
           <a:p>
@@ -5022,13 +5253,13 @@
               </a:spcAft>
             </a:pPr>
             <a:r>
-              <a:rPr sz="1350" b="1" i="0">
+              <a:rPr sz="1300" b="1" i="0">
                 <a:solidFill>
                   <a:srgbClr val="212121"/>
                 </a:solidFill>
                 <a:latin typeface="Calibri"/>
               </a:rPr>
-              <a:t>economic growth  +  fuel mix  +  energy efficiency</a:t>
+              <a:t>The decomposition: C/GDP = (C/E) × (E/GDP)</a:t>
             </a:r>
           </a:p>
           <a:p>
@@ -5044,7 +5275,7 @@
                 </a:solidFill>
                 <a:latin typeface="Calibri"/>
               </a:rPr>
-              <a:t>Growth pushes emissions up; the fuel mix and efficiency are the only two things that push them down. A policy effect has to show up in one of them before it can show up in emissions at all.</a:t>
+              <a:t>Fuel mix and efficiency are where policy operates. A real policy effect must show up in one before the attribution is credible.</a:t>
             </a:r>
           </a:p>
         </p:txBody>
@@ -5172,7 +5403,7 @@
                 </a:solidFill>
                 <a:latin typeface="Calibri"/>
               </a:rPr>
-              <a:t>Use a true world series</a:t>
+              <a:t>Start with real data</a:t>
             </a:r>
           </a:p>
           <a:p>
@@ -5188,7 +5419,7 @@
                 </a:solidFill>
                 <a:latin typeface="Calibri"/>
               </a:rPr>
-              <a:t>Not a sum over whichever countries reported. The published world totals for CO2 and energy, 1965-2023, with World Bank world GDP. No composition drift, no interpolation, eight post-Paris years.</a:t>
+              <a:t>The true world totals (OWID CO2 and energy, World Bank GDP), not sums of whatever countries reported. This avoids the problem where adding more countries changes the baseline.</a:t>
             </a:r>
           </a:p>
         </p:txBody>
@@ -5243,7 +5474,7 @@
                 </a:solidFill>
                 <a:latin typeface="Calibri"/>
               </a:rPr>
-              <a:t>Let the data pick the turn</a:t>
+              <a:t>Find the turning point</a:t>
             </a:r>
           </a:p>
           <a:p>
@@ -5259,7 +5490,7 @@
                 </a:solidFill>
                 <a:latin typeface="Calibri"/>
               </a:rPr>
-              <a:t>Fit two straight lines meeting at a kink, try every possible kink year, keep the best. Then a formal unknown-break-date test with bootstrapped critical values, so searching over years does not manufacture significance.</a:t>
+              <a:t>Fit two straight-line segments and try every possible break year. Keep the one that fits best. Use statistical testing to make sure we're not just seeing random noise.</a:t>
             </a:r>
           </a:p>
         </p:txBody>
@@ -5314,7 +5545,7 @@
                 </a:solidFill>
                 <a:latin typeface="Calibri"/>
               </a:rPr>
-              <a:t>Ask if the treaty year is special</a:t>
+              <a:t>Check if Paris is special</a:t>
             </a:r>
           </a:p>
           <a:p>
@@ -5330,7 +5561,7 @@
                 </a:solidFill>
                 <a:latin typeface="Calibri"/>
               </a:rPr>
-              <a:t>A curving trend makes almost any year look significant. We rank 2015 against every other candidate year — a treaty earns credit only if its year beats its neighbours.</a:t>
+              <a:t>Any year can look significant if the trend is curving. We rank 2015 against every other year — Paris only gets credit if 2015 is genuinely more significant than 2014 or 2016.</a:t>
             </a:r>
           </a:p>
         </p:txBody>
@@ -5385,7 +5616,7 @@
                 </a:solidFill>
                 <a:latin typeface="Calibri"/>
               </a:rPr>
-              <a:t>Re-run everything 44 ways</a:t>
+              <a:t>Test robustness</a:t>
             </a:r>
           </a:p>
           <a:p>
@@ -5401,7 +5632,7 @@
                 </a:solidFill>
                 <a:latin typeface="Calibri"/>
               </a:rPr>
-              <a:t>World aggregate or country panel, four start years, three endpoints, four completeness thresholds, with and without interpolation. We report only what survives.</a:t>
+              <a:t>Run the whole analysis 44 different ways: different starting years, endpoints, how much data we require, whether we fill gaps. Report only results that survive these tests.</a:t>
             </a:r>
           </a:p>
         </p:txBody>
@@ -5440,7 +5671,25 @@
                 </a:solidFill>
                 <a:latin typeface="Calibri"/>
               </a:rPr>
-              <a:t>A turning point tells us when a trend changed — never, by itself, why. </a:t>
+              <a:t>Key principle: a turning point shows </a:t>
+            </a:r>
+            <a:r>
+              <a:rPr sz="1350" b="1" i="0">
+                <a:solidFill>
+                  <a:srgbClr val="1B7837"/>
+                </a:solidFill>
+                <a:latin typeface="Calibri"/>
+              </a:rPr>
+              <a:t>when</a:t>
+            </a:r>
+            <a:r>
+              <a:rPr sz="1350" b="1" i="0">
+                <a:solidFill>
+                  <a:srgbClr val="212121"/>
+                </a:solidFill>
+                <a:latin typeface="Calibri"/>
+              </a:rPr>
+              <a:t> a trend changed, never </a:t>
             </a:r>
             <a:r>
               <a:rPr sz="1350" b="0" i="0">
@@ -5449,7 +5698,7 @@
                 </a:solidFill>
                 <a:latin typeface="Calibri"/>
               </a:rPr>
-              <a:t>That is the whole method.</a:t>
+              <a:t>why. </a:t>
             </a:r>
           </a:p>
         </p:txBody>
@@ -5506,7 +5755,7 @@
                 </a:solidFill>
                 <a:latin typeface="Calibri"/>
               </a:rPr>
-              <a:t>WHAT WE FIND · 1 OF 4</a:t>
+              <a:t>THE STAKES</a:t>
             </a:r>
           </a:p>
           <a:p>
@@ -5522,7 +5771,7 @@
                 </a:solidFill>
                 <a:latin typeface="Calibri"/>
               </a:rPr>
-              <a:t>The decisive turn in the record is the 1970s — not a treaty</a:t>
+              <a:t>Why intensity matters for climate</a:t>
             </a:r>
           </a:p>
         </p:txBody>
@@ -5535,8 +5784,8 @@
         </p:nvSpPr>
         <p:spPr>
           <a:xfrm>
-            <a:off x="502920" y="1188720"/>
-            <a:ext cx="11201400" cy="457200"/>
+            <a:off x="502920" y="1463040"/>
+            <a:ext cx="11201400" cy="5029200"/>
           </a:xfrm>
           <a:prstGeom prst="rect">
             <a:avLst/>
@@ -5549,7 +5798,55 @@
           </a:bodyPr>
           <a:lstStyle/>
           <a:p>
-            <a:pPr>
+            <a:pPr algn="l">
+              <a:spcAft>
+                <a:spcPts val="1200"/>
+              </a:spcAft>
+            </a:pPr>
+            <a:r>
+              <a:rPr sz="1500" b="1" i="0">
+                <a:solidFill>
+                  <a:srgbClr val="1B7837"/>
+                </a:solidFill>
+                <a:latin typeface="Calibri"/>
+              </a:rPr>
+              <a:t>Global carbon intensity is now declining at -2.1% per year — the fastest rate ever recorded.</a:t>
+            </a:r>
+          </a:p>
+          <a:p>
+            <a:pPr algn="l">
+              <a:spcAft>
+                <a:spcPts val="1200"/>
+              </a:spcAft>
+            </a:pPr>
+            <a:r>
+              <a:rPr sz="1500" b="0" i="0">
+                <a:solidFill>
+                  <a:srgbClr val="555555"/>
+                </a:solidFill>
+                <a:latin typeface="Calibri"/>
+              </a:rPr>
+              <a:t>But there's a question underneath every climate target: is that fast enough?</a:t>
+            </a:r>
+          </a:p>
+          <a:p>
+            <a:pPr algn="l">
+              <a:spcAft>
+                <a:spcPts val="1200"/>
+              </a:spcAft>
+            </a:pPr>
+            <a:r>
+              <a:rPr sz="1400" b="0" i="0">
+                <a:solidFill>
+                  <a:srgbClr val="555555"/>
+                </a:solidFill>
+                <a:latin typeface="Calibri"/>
+              </a:rPr>
+              <a:t>Climate models tell us what rates are needed: about -2.5%/yr to stabilize emissions while the world grows, -5%/yr to start cutting absolute emissions, and -11%/yr to halve emissions by 2050.</a:t>
+            </a:r>
+          </a:p>
+          <a:p>
+            <a:pPr algn="l">
               <a:spcAft>
                 <a:spcPts val="0"/>
               </a:spcAft>
@@ -5557,48 +5854,15 @@
             <a:r>
               <a:rPr sz="1400" b="1" i="0">
                 <a:solidFill>
-                  <a:srgbClr val="1B7837"/>
-                </a:solidFill>
-                <a:latin typeface="Calibri"/>
-              </a:rPr>
-              <a:t>Takeaway:  </a:t>
-            </a:r>
-            <a:r>
-              <a:rPr sz="1400" b="1" i="0">
-                <a:solidFill>
                   <a:srgbClr val="212121"/>
                 </a:solidFill>
                 <a:latin typeface="Calibri"/>
               </a:rPr>
-              <a:t>The oil shocks remain the largest structural break in the world's carbon intensity, and the current fast episode began in 2012.</a:t>
-            </a:r>
-          </a:p>
-        </p:txBody>
-      </p:sp>
-      <p:pic>
-        <p:nvPicPr>
-          <p:cNvPr id="4" name="Picture 3" descr="v3_fig1_long_record.png"/>
-          <p:cNvPicPr>
-            <a:picLocks noChangeAspect="1"/>
-          </p:cNvPicPr>
-          <p:nvPr/>
-        </p:nvPicPr>
-        <p:blipFill>
-          <a:blip r:embed="rId2"/>
-          <a:stretch>
-            <a:fillRect/>
-          </a:stretch>
-        </p:blipFill>
-        <p:spPr>
-          <a:xfrm>
-            <a:off x="1326022" y="1700784"/>
-            <a:ext cx="9536906" cy="4882896"/>
-          </a:xfrm>
-          <a:prstGeom prst="rect">
-            <a:avLst/>
-          </a:prstGeom>
-        </p:spPr>
-      </p:pic>
+              <a:t>We're currently above the stabilization target but far below what deep cuts require. The key question for policy: Is the 2012 acceleration real, will it persist, and can it accelerate further to meet climate goals?</a:t>
+            </a:r>
+          </a:p>
+        </p:txBody>
+      </p:sp>
     </p:spTree>
   </p:cSld>
   <p:clrMapOvr>
@@ -5651,7 +5915,7 @@
                 </a:solidFill>
                 <a:latin typeface="Calibri"/>
               </a:rPr>
-              <a:t>WHAT WE FIND · 2 OF 4</a:t>
+              <a:t>WHAT WE FIND · 1 OF 4</a:t>
             </a:r>
           </a:p>
           <a:p>
@@ -5667,7 +5931,7 @@
                 </a:solidFill>
                 <a:latin typeface="Calibri"/>
               </a:rPr>
-              <a:t>Efficiency never changed pace. The fuel mix stalled, then resumed.</a:t>
+              <a:t>The decisive turn in the record is the 1970s — not a treaty</a:t>
             </a:r>
           </a:p>
         </p:txBody>
@@ -5715,7 +5979,7 @@
                 </a:solidFill>
                 <a:latin typeface="Calibri"/>
               </a:rPr>
-              <a:t>Energy efficiency has improved at about 1% a year for fifty years. The whole story is the fuel mix, which stalled completely from Rio to Paris.</a:t>
+              <a:t>The oil shocks remain the largest structural break in the world's carbon intensity. The current acceleration began in 2012 — three years before Paris.</a:t>
             </a:r>
           </a:p>
         </p:txBody>
@@ -5763,7 +6027,200 @@
                 </a:solidFill>
                 <a:latin typeface="Calibri"/>
               </a:rPr>
-              <a:t>this is why the size of the 'Paris effect' depends on the baseline: against the 2000s stall it looks dramatic, against the post-1973 record it is a resumption.</a:t>
+              <a:t>This tells us that long-term structural forces, not recent agreements, have been the largest drivers of intensity change.</a:t>
+            </a:r>
+          </a:p>
+        </p:txBody>
+      </p:sp>
+      <p:pic>
+        <p:nvPicPr>
+          <p:cNvPr id="5" name="Picture 4" descr="v3_fig1_long_record.png"/>
+          <p:cNvPicPr>
+            <a:picLocks noChangeAspect="1"/>
+          </p:cNvPicPr>
+          <p:nvPr/>
+        </p:nvPicPr>
+        <p:blipFill>
+          <a:blip r:embed="rId2"/>
+          <a:stretch>
+            <a:fillRect/>
+          </a:stretch>
+        </p:blipFill>
+        <p:spPr>
+          <a:xfrm>
+            <a:off x="1736788" y="2121408"/>
+            <a:ext cx="8715375" cy="4462272"/>
+          </a:xfrm>
+          <a:prstGeom prst="rect">
+            <a:avLst/>
+          </a:prstGeom>
+        </p:spPr>
+      </p:pic>
+    </p:spTree>
+  </p:cSld>
+  <p:clrMapOvr>
+    <a:masterClrMapping/>
+  </p:clrMapOvr>
+</p:sld>
+</file>
+
+<file path=ppt/slides/slide6.xml><?xml version="1.0" encoding="utf-8"?>
+<p:sld xmlns:a="http://schemas.openxmlformats.org/drawingml/2006/main" xmlns:p="http://schemas.openxmlformats.org/presentationml/2006/main" xmlns:r="http://schemas.openxmlformats.org/officeDocument/2006/relationships">
+  <p:cSld>
+    <p:spTree>
+      <p:nvGrpSpPr>
+        <p:cNvPr id="1" name=""/>
+        <p:cNvGrpSpPr/>
+        <p:nvPr/>
+      </p:nvGrpSpPr>
+      <p:grpSpPr/>
+      <p:sp>
+        <p:nvSpPr>
+          <p:cNvPr id="2" name="TextBox 1"/>
+          <p:cNvSpPr txBox="1"/>
+          <p:nvPr/>
+        </p:nvSpPr>
+        <p:spPr>
+          <a:xfrm>
+            <a:off x="502920" y="274320"/>
+            <a:ext cx="11201400" cy="914400"/>
+          </a:xfrm>
+          <a:prstGeom prst="rect">
+            <a:avLst/>
+          </a:prstGeom>
+          <a:noFill/>
+        </p:spPr>
+        <p:txBody>
+          <a:bodyPr wrap="square">
+            <a:spAutoFit/>
+          </a:bodyPr>
+          <a:lstStyle/>
+          <a:p>
+            <a:pPr algn="l">
+              <a:spcAft>
+                <a:spcPts val="200"/>
+              </a:spcAft>
+            </a:pPr>
+            <a:r>
+              <a:rPr sz="1200" b="1" i="0">
+                <a:solidFill>
+                  <a:srgbClr val="1B7837"/>
+                </a:solidFill>
+                <a:latin typeface="Calibri"/>
+              </a:rPr>
+              <a:t>WHAT WE FIND · 2 OF 4</a:t>
+            </a:r>
+          </a:p>
+          <a:p>
+            <a:pPr algn="l">
+              <a:spcAft>
+                <a:spcPts val="0"/>
+              </a:spcAft>
+            </a:pPr>
+            <a:r>
+              <a:rPr sz="2400" b="1" i="0">
+                <a:solidFill>
+                  <a:srgbClr val="212121"/>
+                </a:solidFill>
+                <a:latin typeface="Calibri"/>
+              </a:rPr>
+              <a:t>Efficiency never changed pace. The fuel mix stalled for 25 years, then resumed.</a:t>
+            </a:r>
+          </a:p>
+        </p:txBody>
+      </p:sp>
+      <p:sp>
+        <p:nvSpPr>
+          <p:cNvPr id="3" name="TextBox 2"/>
+          <p:cNvSpPr txBox="1"/>
+          <p:nvPr/>
+        </p:nvSpPr>
+        <p:spPr>
+          <a:xfrm>
+            <a:off x="502920" y="1188720"/>
+            <a:ext cx="11201400" cy="457200"/>
+          </a:xfrm>
+          <a:prstGeom prst="rect">
+            <a:avLst/>
+          </a:prstGeom>
+          <a:noFill/>
+        </p:spPr>
+        <p:txBody>
+          <a:bodyPr wrap="square">
+            <a:spAutoFit/>
+          </a:bodyPr>
+          <a:lstStyle/>
+          <a:p>
+            <a:pPr>
+              <a:spcAft>
+                <a:spcPts val="0"/>
+              </a:spcAft>
+            </a:pPr>
+            <a:r>
+              <a:rPr sz="1400" b="1" i="0">
+                <a:solidFill>
+                  <a:srgbClr val="1B7837"/>
+                </a:solidFill>
+                <a:latin typeface="Calibri"/>
+              </a:rPr>
+              <a:t>Takeaway:  </a:t>
+            </a:r>
+            <a:r>
+              <a:rPr sz="1400" b="1" i="0">
+                <a:solidFill>
+                  <a:srgbClr val="212121"/>
+                </a:solidFill>
+                <a:latin typeface="Calibri"/>
+              </a:rPr>
+              <a:t>Energy efficiency improved at a steady 1% per year throughout the entire period — unchanged by Paris. The fuel mix stalled completely from 1990-2015, then resumed.</a:t>
+            </a:r>
+          </a:p>
+        </p:txBody>
+      </p:sp>
+      <p:sp>
+        <p:nvSpPr>
+          <p:cNvPr id="4" name="TextBox 3"/>
+          <p:cNvSpPr txBox="1"/>
+          <p:nvPr/>
+        </p:nvSpPr>
+        <p:spPr>
+          <a:xfrm>
+            <a:off x="502920" y="1700784"/>
+            <a:ext cx="11201400" cy="384048"/>
+          </a:xfrm>
+          <a:prstGeom prst="rect">
+            <a:avLst/>
+          </a:prstGeom>
+          <a:noFill/>
+        </p:spPr>
+        <p:txBody>
+          <a:bodyPr wrap="square">
+            <a:spAutoFit/>
+          </a:bodyPr>
+          <a:lstStyle/>
+          <a:p>
+            <a:pPr>
+              <a:spcAft>
+                <a:spcPts val="0"/>
+              </a:spcAft>
+            </a:pPr>
+            <a:r>
+              <a:rPr sz="1200" b="1" i="0">
+                <a:solidFill>
+                  <a:srgbClr val="B33A3A"/>
+                </a:solidFill>
+                <a:latin typeface="Calibri"/>
+              </a:rPr>
+              <a:t>But:  </a:t>
+            </a:r>
+            <a:r>
+              <a:rPr sz="1200" b="0" i="0">
+                <a:solidFill>
+                  <a:srgbClr val="555555"/>
+                </a:solidFill>
+                <a:latin typeface="Calibri"/>
+              </a:rPr>
+              <a:t>This is the key policy result: efficiency (how much energy we use per dollar of GDP) didn't respond to the treaty. Only the fuel mix (power source composition) changed.</a:t>
             </a:r>
           </a:p>
         </p:txBody>
@@ -5800,7 +6257,7 @@
 </p:sld>
 </file>
 
-<file path=ppt/slides/slide6.xml><?xml version="1.0" encoding="utf-8"?>
+<file path=ppt/slides/slide7.xml><?xml version="1.0" encoding="utf-8"?>
 <p:sld xmlns:a="http://schemas.openxmlformats.org/drawingml/2006/main" xmlns:p="http://schemas.openxmlformats.org/presentationml/2006/main" xmlns:r="http://schemas.openxmlformats.org/officeDocument/2006/relationships">
   <p:cSld>
     <p:spTree>
@@ -5860,7 +6317,7 @@
                 </a:solidFill>
                 <a:latin typeface="Calibri"/>
               </a:rPr>
-              <a:t>However we build the series, the turn comes before Paris</a:t>
+              <a:t>The turn happens before Paris, no matter how we build the data</a:t>
             </a:r>
           </a:p>
         </p:txBody>
@@ -5908,14 +6365,62 @@
                 </a:solidFill>
                 <a:latin typeface="Calibri"/>
               </a:rPr>
-              <a:t>In roughly nine specifications out of ten, the best-fitting turning point lands before 2015 — usually 2011 to 2013.</a:t>
+              <a:t>Across 44 different ways of constructing the data, 89-93% place the turning point before 2015 — this is the timing question Paris attribution must answer.</a:t>
+            </a:r>
+          </a:p>
+        </p:txBody>
+      </p:sp>
+      <p:sp>
+        <p:nvSpPr>
+          <p:cNvPr id="4" name="TextBox 3"/>
+          <p:cNvSpPr txBox="1"/>
+          <p:nvPr/>
+        </p:nvSpPr>
+        <p:spPr>
+          <a:xfrm>
+            <a:off x="502920" y="1700784"/>
+            <a:ext cx="11201400" cy="384048"/>
+          </a:xfrm>
+          <a:prstGeom prst="rect">
+            <a:avLst/>
+          </a:prstGeom>
+          <a:noFill/>
+        </p:spPr>
+        <p:txBody>
+          <a:bodyPr wrap="square">
+            <a:spAutoFit/>
+          </a:bodyPr>
+          <a:lstStyle/>
+          <a:p>
+            <a:pPr>
+              <a:spcAft>
+                <a:spcPts val="0"/>
+              </a:spcAft>
+            </a:pPr>
+            <a:r>
+              <a:rPr sz="1200" b="1" i="0">
+                <a:solidFill>
+                  <a:srgbClr val="B33A3A"/>
+                </a:solidFill>
+                <a:latin typeface="Calibri"/>
+              </a:rPr>
+              <a:t>But:  </a:t>
+            </a:r>
+            <a:r>
+              <a:rPr sz="1200" b="0" i="0">
+                <a:solidFill>
+                  <a:srgbClr val="555555"/>
+                </a:solidFill>
+                <a:latin typeface="Calibri"/>
+              </a:rPr>
+              <a:t>The turning point robustness is what makes the timing question meaningful. This is not about the magnitude of change, only when it began.</a:t>
             </a:r>
           </a:p>
         </p:txBody>
       </p:sp>
       <p:pic>
         <p:nvPicPr>
-          <p:cNvPr id="4" name="Picture 3" descr="v3_fig3_specification_invariance.png"/>
+          <p:cNvPr id="5" name="Picture 4" descr="v3_fig3_specification_invariance.png"/>
           <p:cNvPicPr>
             <a:picLocks noChangeAspect="1"/>
           </p:cNvPicPr>
@@ -5929,8 +6434,8 @@
         </p:blipFill>
         <p:spPr>
           <a:xfrm>
-            <a:off x="804672" y="1700784"/>
-            <a:ext cx="10579607" cy="4882896"/>
+            <a:off x="1260348" y="2121408"/>
+            <a:ext cx="9668256" cy="4462272"/>
           </a:xfrm>
           <a:prstGeom prst="rect">
             <a:avLst/>
@@ -5945,7 +6450,7 @@
 </p:sld>
 </file>
 
-<file path=ppt/slides/slide7.xml><?xml version="1.0" encoding="utf-8"?>
+<file path=ppt/slides/slide8.xml><?xml version="1.0" encoding="utf-8"?>
 <p:sld xmlns:a="http://schemas.openxmlformats.org/drawingml/2006/main" xmlns:p="http://schemas.openxmlformats.org/presentationml/2006/main" xmlns:r="http://schemas.openxmlformats.org/officeDocument/2006/relationships">
   <p:cSld>
     <p:spTree>
@@ -6005,7 +6510,7 @@
                 </a:solidFill>
                 <a:latin typeface="Calibri"/>
               </a:rPr>
-              <a:t>The timing result is robust. The rest is not.</a:t>
+              <a:t>When we test everything, only timing is robust. Magnitude is not.</a:t>
             </a:r>
           </a:p>
         </p:txBody>
@@ -6053,7 +6558,7 @@
                 </a:solidFill>
                 <a:latin typeface="Calibri"/>
               </a:rPr>
-              <a:t>Whether the post-2015 change is statistically significant depends on the component and on how the series is built — for efficiency, only 41% of specifications agree.</a:t>
+              <a:t>The 2015 break survives testing, but whether the post-2015 change is statistically significant varies: 78% for fuel mix, but only 41% for efficiency. This is where data construction choices matter.</a:t>
             </a:r>
           </a:p>
         </p:txBody>
@@ -6101,7 +6606,7 @@
                 </a:solidFill>
                 <a:latin typeface="Calibri"/>
               </a:rPr>
-              <a:t>and Paris does not cleanly beat its neighbouring years: on the true world aggregate it ranks 80th percentile for overall intensity but only 11th for the fuel mix.</a:t>
+              <a:t>Paris ranks 80th percentile for overall intensity but only 11th percentile for the fuel mix — it does not cleanly beat its neighbouring years.</a:t>
             </a:r>
           </a:p>
         </p:txBody>
@@ -6138,7 +6643,7 @@
 </p:sld>
 </file>
 
-<file path=ppt/slides/slide8.xml><?xml version="1.0" encoding="utf-8"?>
+<file path=ppt/slides/slide9.xml><?xml version="1.0" encoding="utf-8"?>
 <p:sld xmlns:a="http://schemas.openxmlformats.org/drawingml/2006/main" xmlns:p="http://schemas.openxmlformats.org/presentationml/2006/main" xmlns:r="http://schemas.openxmlformats.org/officeDocument/2006/relationships">
   <p:cSld>
     <p:spTree>
@@ -6253,7 +6758,7 @@
                 </a:solidFill>
                 <a:latin typeface="Calibri"/>
               </a:rPr>
-              <a:t>The world is decarbonizing faster than at any point in the record: carbon intensity has fallen at 2.1% a year since 2012, against 0.4% in the decade before. That improvement is real, it is large, and it is concentrated in the fuel mix — exactly where clean technology and energy policy operate.</a:t>
+              <a:t>The world is decarbonizing faster than at any point in the record: carbon intensity has fallen at 2.1% a year since 2012, against 0.4% before. That improvement is real, large, and concentrated in the fuel mix — where technology and policy operate. Current pace is faster than the long-term trend.</a:t>
             </a:r>
           </a:p>
         </p:txBody>
@@ -6292,7 +6797,7 @@
                 </a:solidFill>
                 <a:latin typeface="Calibri"/>
               </a:rPr>
-              <a:t>What we cannot</a:t>
+              <a:t>What we cannot claim</a:t>
             </a:r>
           </a:p>
           <a:p>
@@ -6308,7 +6813,7 @@
                 </a:solidFill>
                 <a:latin typeface="Calibri"/>
               </a:rPr>
-              <a:t>The turn is dated to 2012 in almost every specification — three years before the agreement. Energy efficiency did not respond at all. The fuel-mix improvement is a return to its pre-1990 pace rather than something new. And the timing coincides exactly with the collapse in clean-energy costs.</a:t>
+              <a:t>The turn dates to 2012 — three years before Paris. Energy efficiency never responded to the treaty at all. The fuel-mix improvement matches clean-energy cost collapse timing, not the Paris Agreement. Attribution to Paris is not supported by the timing.</a:t>
             </a:r>
           </a:p>
           <a:p>
@@ -6324,167 +6829,7 @@
                 </a:solidFill>
                 <a:latin typeface="Calibri"/>
               </a:rPr>
-              <a:t>The acceleration is real. It started before Paris, and it looks like what cheap clean energy would produce.</a:t>
-            </a:r>
-          </a:p>
-        </p:txBody>
-      </p:sp>
-    </p:spTree>
-  </p:cSld>
-  <p:clrMapOvr>
-    <a:masterClrMapping/>
-  </p:clrMapOvr>
-</p:sld>
-</file>
-
-<file path=ppt/slides/slide9.xml><?xml version="1.0" encoding="utf-8"?>
-<p:sld xmlns:a="http://schemas.openxmlformats.org/drawingml/2006/main" xmlns:p="http://schemas.openxmlformats.org/presentationml/2006/main" xmlns:r="http://schemas.openxmlformats.org/officeDocument/2006/relationships">
-  <p:cSld>
-    <p:spTree>
-      <p:nvGrpSpPr>
-        <p:cNvPr id="1" name=""/>
-        <p:cNvGrpSpPr/>
-        <p:nvPr/>
-      </p:nvGrpSpPr>
-      <p:grpSpPr/>
-      <p:sp>
-        <p:nvSpPr>
-          <p:cNvPr id="2" name="TextBox 1"/>
-          <p:cNvSpPr txBox="1"/>
-          <p:nvPr/>
-        </p:nvSpPr>
-        <p:spPr>
-          <a:xfrm>
-            <a:off x="502920" y="274320"/>
-            <a:ext cx="11201400" cy="914400"/>
-          </a:xfrm>
-          <a:prstGeom prst="rect">
-            <a:avLst/>
-          </a:prstGeom>
-          <a:noFill/>
-        </p:spPr>
-        <p:txBody>
-          <a:bodyPr wrap="square">
-            <a:spAutoFit/>
-          </a:bodyPr>
-          <a:lstStyle/>
-          <a:p>
-            <a:pPr algn="l">
-              <a:spcAft>
-                <a:spcPts val="200"/>
-              </a:spcAft>
-            </a:pPr>
-            <a:r>
-              <a:rPr sz="1200" b="1" i="0">
-                <a:solidFill>
-                  <a:srgbClr val="1B7837"/>
-                </a:solidFill>
-                <a:latin typeface="Calibri"/>
-              </a:rPr>
-              <a:t>WHAT WOULD SETTLE IT</a:t>
-            </a:r>
-          </a:p>
-          <a:p>
-            <a:pPr algn="l">
-              <a:spcAft>
-                <a:spcPts val="0"/>
-              </a:spcAft>
-            </a:pPr>
-            <a:r>
-              <a:rPr sz="2400" b="1" i="0">
-                <a:solidFill>
-                  <a:srgbClr val="212121"/>
-                </a:solidFill>
-                <a:latin typeface="Calibri"/>
-              </a:rPr>
-              <a:t>Three things — and two are not at the world level</a:t>
-            </a:r>
-          </a:p>
-        </p:txBody>
-      </p:sp>
-      <p:sp>
-        <p:nvSpPr>
-          <p:cNvPr id="3" name="TextBox 2"/>
-          <p:cNvSpPr txBox="1"/>
-          <p:nvPr/>
-        </p:nvSpPr>
-        <p:spPr>
-          <a:xfrm>
-            <a:off x="502920" y="1508760"/>
-            <a:ext cx="10881360" cy="4572000"/>
-          </a:xfrm>
-          <a:prstGeom prst="rect">
-            <a:avLst/>
-          </a:prstGeom>
-          <a:noFill/>
-        </p:spPr>
-        <p:txBody>
-          <a:bodyPr wrap="square">
-            <a:spAutoFit/>
-          </a:bodyPr>
-          <a:lstStyle/>
-          <a:p>
-            <a:pPr algn="l">
-              <a:spcAft>
-                <a:spcPts val="1200"/>
-              </a:spcAft>
-            </a:pPr>
-            <a:r>
-              <a:rPr sz="1500" b="0" i="0">
-                <a:solidFill>
-                  <a:srgbClr val="555555"/>
-                </a:solidFill>
-                <a:latin typeface="Calibri"/>
-              </a:rPr>
-              <a:t>Persistence. A 2012 turn driven by a one-off technology shock should decay as the cheap-solar transition matures. One that reflects policy ratcheting should not. Another decade of data distinguishes them; the size of the change is already detectable, so this is about durability rather than power.</a:t>
-            </a:r>
-          </a:p>
-          <a:p>
-            <a:pPr algn="l">
-              <a:spcAft>
-                <a:spcPts val="1200"/>
-              </a:spcAft>
-            </a:pPr>
-            <a:r>
-              <a:rPr sz="1500" b="0" i="0">
-                <a:solidFill>
-                  <a:srgbClr val="555555"/>
-                </a:solidFill>
-                <a:latin typeface="Calibri"/>
-              </a:rPr>
-              <a:t>The demand side. Efficiency is the informative half precisely because it has not moved. Cheap solar explains a cleaner fuel mix; it does not explain how much energy the world uses per unit of output. If efficiency accelerates, technology alone stops being a sufficient explanation.</a:t>
-            </a:r>
-          </a:p>
-          <a:p>
-            <a:pPr algn="l">
-              <a:spcAft>
-                <a:spcPts val="1400"/>
-              </a:spcAft>
-            </a:pPr>
-            <a:r>
-              <a:rPr sz="1500" b="0" i="0">
-                <a:solidFill>
-                  <a:srgbClr val="555555"/>
-                </a:solidFill>
-                <a:latin typeface="Calibri"/>
-              </a:rPr>
-              <a:t>Disaggregation. Paris works through national pledges, so its signature should appear country by country — where series are independent, placebo tests are genuinely separate, and a documentary record exists for what accompanied each turn. That is the companion paper.</a:t>
-            </a:r>
-          </a:p>
-          <a:p>
-            <a:pPr algn="l">
-              <a:spcAft>
-                <a:spcPts val="0"/>
-              </a:spcAft>
-            </a:pPr>
-            <a:r>
-              <a:rPr sz="1500" b="1" i="0">
-                <a:solidFill>
-                  <a:srgbClr val="212121"/>
-                </a:solidFill>
-                <a:latin typeface="Calibri"/>
-              </a:rPr>
-              <a:t>The question we would put to the field: should treaty assessment be built on intensity turning points and placebo discipline, rather than on emissions levels and anniversaries?</a:t>
+              <a:t>The acceleration is real and necessary. It started before Paris. The evidence points to technology and cost, not yet to policy.</a:t>
             </a:r>
           </a:p>
         </p:txBody>
